--- a/spark/Spark.pptx
+++ b/spark/Spark.pptx
@@ -14,8 +14,8 @@
     <p:sldId id="265" r:id="rId8"/>
     <p:sldId id="266" r:id="rId9"/>
     <p:sldId id="267" r:id="rId10"/>
-    <p:sldId id="268" r:id="rId11"/>
-    <p:sldId id="269" r:id="rId12"/>
+    <p:sldId id="269" r:id="rId11"/>
+    <p:sldId id="268" r:id="rId12"/>
     <p:sldId id="270" r:id="rId13"/>
     <p:sldId id="271" r:id="rId14"/>
     <p:sldId id="272" r:id="rId15"/>
@@ -50,51 +50,55 @@
     <p:sldId id="303" r:id="rId44"/>
     <p:sldId id="304" r:id="rId45"/>
     <p:sldId id="306" r:id="rId46"/>
-    <p:sldId id="305" r:id="rId47"/>
-    <p:sldId id="307" r:id="rId48"/>
-    <p:sldId id="308" r:id="rId49"/>
-    <p:sldId id="309" r:id="rId50"/>
-    <p:sldId id="310" r:id="rId51"/>
-    <p:sldId id="311" r:id="rId52"/>
-    <p:sldId id="312" r:id="rId53"/>
-    <p:sldId id="313" r:id="rId54"/>
-    <p:sldId id="316" r:id="rId55"/>
-    <p:sldId id="315" r:id="rId56"/>
-    <p:sldId id="317" r:id="rId57"/>
-    <p:sldId id="318" r:id="rId58"/>
-    <p:sldId id="319" r:id="rId59"/>
-    <p:sldId id="321" r:id="rId60"/>
-    <p:sldId id="320" r:id="rId61"/>
-    <p:sldId id="322" r:id="rId62"/>
-    <p:sldId id="323" r:id="rId63"/>
-    <p:sldId id="324" r:id="rId64"/>
-    <p:sldId id="325" r:id="rId65"/>
-    <p:sldId id="327" r:id="rId66"/>
-    <p:sldId id="328" r:id="rId67"/>
-    <p:sldId id="326" r:id="rId68"/>
-    <p:sldId id="329" r:id="rId69"/>
-    <p:sldId id="330" r:id="rId70"/>
-    <p:sldId id="331" r:id="rId71"/>
-    <p:sldId id="332" r:id="rId72"/>
-    <p:sldId id="334" r:id="rId73"/>
-    <p:sldId id="333" r:id="rId74"/>
-    <p:sldId id="335" r:id="rId75"/>
-    <p:sldId id="336" r:id="rId76"/>
-    <p:sldId id="337" r:id="rId77"/>
-    <p:sldId id="338" r:id="rId78"/>
-    <p:sldId id="339" r:id="rId79"/>
-    <p:sldId id="340" r:id="rId80"/>
-    <p:sldId id="341" r:id="rId81"/>
-    <p:sldId id="342" r:id="rId82"/>
-    <p:sldId id="343" r:id="rId83"/>
-    <p:sldId id="344" r:id="rId84"/>
-    <p:sldId id="345" r:id="rId85"/>
-    <p:sldId id="346" r:id="rId86"/>
-    <p:sldId id="257" r:id="rId87"/>
-    <p:sldId id="258" r:id="rId88"/>
-    <p:sldId id="260" r:id="rId89"/>
-    <p:sldId id="261" r:id="rId90"/>
-    <p:sldId id="262" r:id="rId91"/>
+    <p:sldId id="347" r:id="rId47"/>
+    <p:sldId id="348" r:id="rId48"/>
+    <p:sldId id="349" r:id="rId49"/>
+    <p:sldId id="350" r:id="rId50"/>
+    <p:sldId id="305" r:id="rId51"/>
+    <p:sldId id="307" r:id="rId52"/>
+    <p:sldId id="308" r:id="rId53"/>
+    <p:sldId id="309" r:id="rId54"/>
+    <p:sldId id="310" r:id="rId55"/>
+    <p:sldId id="311" r:id="rId56"/>
+    <p:sldId id="312" r:id="rId57"/>
+    <p:sldId id="313" r:id="rId58"/>
+    <p:sldId id="316" r:id="rId59"/>
+    <p:sldId id="315" r:id="rId60"/>
+    <p:sldId id="317" r:id="rId61"/>
+    <p:sldId id="318" r:id="rId62"/>
+    <p:sldId id="319" r:id="rId63"/>
+    <p:sldId id="321" r:id="rId64"/>
+    <p:sldId id="320" r:id="rId65"/>
+    <p:sldId id="322" r:id="rId66"/>
+    <p:sldId id="323" r:id="rId67"/>
+    <p:sldId id="324" r:id="rId68"/>
+    <p:sldId id="325" r:id="rId69"/>
+    <p:sldId id="327" r:id="rId70"/>
+    <p:sldId id="328" r:id="rId71"/>
+    <p:sldId id="326" r:id="rId72"/>
+    <p:sldId id="329" r:id="rId73"/>
+    <p:sldId id="330" r:id="rId74"/>
+    <p:sldId id="331" r:id="rId75"/>
+    <p:sldId id="332" r:id="rId76"/>
+    <p:sldId id="334" r:id="rId77"/>
+    <p:sldId id="333" r:id="rId78"/>
+    <p:sldId id="335" r:id="rId79"/>
+    <p:sldId id="336" r:id="rId80"/>
+    <p:sldId id="337" r:id="rId81"/>
+    <p:sldId id="338" r:id="rId82"/>
+    <p:sldId id="339" r:id="rId83"/>
+    <p:sldId id="340" r:id="rId84"/>
+    <p:sldId id="341" r:id="rId85"/>
+    <p:sldId id="342" r:id="rId86"/>
+    <p:sldId id="343" r:id="rId87"/>
+    <p:sldId id="344" r:id="rId88"/>
+    <p:sldId id="345" r:id="rId89"/>
+    <p:sldId id="346" r:id="rId90"/>
+    <p:sldId id="257" r:id="rId91"/>
+    <p:sldId id="258" r:id="rId92"/>
+    <p:sldId id="260" r:id="rId93"/>
+    <p:sldId id="261" r:id="rId94"/>
+    <p:sldId id="262" r:id="rId95"/>
   </p:sldIdLst>
   <p:sldSz cx="12192000" cy="6858000"/>
   <p:notesSz cx="6858000" cy="9144000"/>
@@ -3351,7 +3355,7 @@
             <a:fld id="{B61BEF0D-F0BB-DE4B-95CE-6DB70DBA9567}" type="datetimeFigureOut">
               <a:rPr lang="en-US" dirty="0"/>
               <a:pPr/>
-              <a:t>6/17/2026</a:t>
+              <a:t>6/29/2026</a:t>
             </a:fld>
             <a:endParaRPr lang="en-US" dirty="0"/>
           </a:p>
@@ -3613,7 +3617,7 @@
             <a:fld id="{B61BEF0D-F0BB-DE4B-95CE-6DB70DBA9567}" type="datetimeFigureOut">
               <a:rPr lang="en-US" dirty="0"/>
               <a:pPr/>
-              <a:t>6/17/2026</a:t>
+              <a:t>6/29/2026</a:t>
             </a:fld>
             <a:endParaRPr lang="en-US" dirty="0"/>
           </a:p>
@@ -3848,7 +3852,7 @@
             <a:fld id="{B61BEF0D-F0BB-DE4B-95CE-6DB70DBA9567}" type="datetimeFigureOut">
               <a:rPr lang="en-US" dirty="0"/>
               <a:pPr/>
-              <a:t>6/17/2026</a:t>
+              <a:t>6/29/2026</a:t>
             </a:fld>
             <a:endParaRPr lang="en-US" dirty="0"/>
           </a:p>
@@ -4095,7 +4099,7 @@
             <a:fld id="{B61BEF0D-F0BB-DE4B-95CE-6DB70DBA9567}" type="datetimeFigureOut">
               <a:rPr lang="en-US" dirty="0"/>
               <a:pPr/>
-              <a:t>6/17/2026</a:t>
+              <a:t>6/29/2026</a:t>
             </a:fld>
             <a:endParaRPr lang="en-US" dirty="0"/>
           </a:p>
@@ -4403,7 +4407,7 @@
             <a:fld id="{B61BEF0D-F0BB-DE4B-95CE-6DB70DBA9567}" type="datetimeFigureOut">
               <a:rPr lang="en-US" dirty="0"/>
               <a:pPr/>
-              <a:t>6/17/2026</a:t>
+              <a:t>6/29/2026</a:t>
             </a:fld>
             <a:endParaRPr lang="en-US" dirty="0"/>
           </a:p>
@@ -4704,7 +4708,7 @@
             <a:fld id="{B61BEF0D-F0BB-DE4B-95CE-6DB70DBA9567}" type="datetimeFigureOut">
               <a:rPr lang="en-US" dirty="0"/>
               <a:pPr/>
-              <a:t>6/17/2026</a:t>
+              <a:t>6/29/2026</a:t>
             </a:fld>
             <a:endParaRPr lang="en-US" dirty="0"/>
           </a:p>
@@ -5125,7 +5129,7 @@
             <a:fld id="{B61BEF0D-F0BB-DE4B-95CE-6DB70DBA9567}" type="datetimeFigureOut">
               <a:rPr lang="en-US" dirty="0"/>
               <a:pPr/>
-              <a:t>6/17/2026</a:t>
+              <a:t>6/29/2026</a:t>
             </a:fld>
             <a:endParaRPr lang="en-US" dirty="0"/>
           </a:p>
@@ -5288,7 +5292,7 @@
             <a:fld id="{B61BEF0D-F0BB-DE4B-95CE-6DB70DBA9567}" type="datetimeFigureOut">
               <a:rPr lang="en-US" dirty="0"/>
               <a:pPr/>
-              <a:t>6/17/2026</a:t>
+              <a:t>6/29/2026</a:t>
             </a:fld>
             <a:endParaRPr lang="en-US" dirty="0"/>
           </a:p>
@@ -5385,7 +5389,7 @@
             <a:fld id="{B61BEF0D-F0BB-DE4B-95CE-6DB70DBA9567}" type="datetimeFigureOut">
               <a:rPr lang="en-US" dirty="0"/>
               <a:pPr/>
-              <a:t>6/17/2026</a:t>
+              <a:t>6/29/2026</a:t>
             </a:fld>
             <a:endParaRPr lang="en-US" dirty="0"/>
           </a:p>
@@ -5763,7 +5767,7 @@
             <a:fld id="{B61BEF0D-F0BB-DE4B-95CE-6DB70DBA9567}" type="datetimeFigureOut">
               <a:rPr lang="en-US" dirty="0"/>
               <a:pPr/>
-              <a:t>6/17/2026</a:t>
+              <a:t>6/29/2026</a:t>
             </a:fld>
             <a:endParaRPr lang="en-US" dirty="0"/>
           </a:p>
@@ -6049,7 +6053,7 @@
             <a:fld id="{B61BEF0D-F0BB-DE4B-95CE-6DB70DBA9567}" type="datetimeFigureOut">
               <a:rPr lang="en-US" dirty="0"/>
               <a:pPr/>
-              <a:t>6/17/2026</a:t>
+              <a:t>6/29/2026</a:t>
             </a:fld>
             <a:endParaRPr lang="en-US" dirty="0"/>
           </a:p>
@@ -6288,7 +6292,7 @@
             <a:fld id="{B61BEF0D-F0BB-DE4B-95CE-6DB70DBA9567}" type="datetimeFigureOut">
               <a:rPr lang="en-US" dirty="0"/>
               <a:pPr/>
-              <a:t>6/17/2026</a:t>
+              <a:t>6/29/2026</a:t>
             </a:fld>
             <a:endParaRPr lang="en-US" dirty="0"/>
           </a:p>
@@ -6969,7 +6973,7 @@
           <p:cNvPr id="2" name="Title 1">
             <a:extLst>
               <a:ext uri="{FF2B5EF4-FFF2-40B4-BE49-F238E27FC236}">
-                <a16:creationId xmlns:a16="http://schemas.microsoft.com/office/drawing/2014/main" id="{2ADC410E-BE96-E76A-7D7E-AABFBC9E5653}"/>
+                <a16:creationId xmlns:a16="http://schemas.microsoft.com/office/drawing/2014/main" id="{0904E796-5DC0-12E8-D680-47CC82886A71}"/>
               </a:ext>
             </a:extLst>
           </p:cNvPr>
@@ -6986,72 +6990,48 @@
           <a:lstStyle/>
           <a:p>
             <a:r>
-              <a:rPr lang="en-US" dirty="0" err="1"/>
-              <a:t>PySpark</a:t>
-            </a:r>
-            <a:r>
-              <a:rPr lang="en-US" dirty="0"/>
-              <a:t> Example</a:t>
-            </a:r>
-          </a:p>
-        </p:txBody>
-      </p:sp>
-      <p:sp>
-        <p:nvSpPr>
-          <p:cNvPr id="3" name="Content Placeholder 2">
-            <a:extLst>
-              <a:ext uri="{FF2B5EF4-FFF2-40B4-BE49-F238E27FC236}">
-                <a16:creationId xmlns:a16="http://schemas.microsoft.com/office/drawing/2014/main" id="{F0192607-9575-8E97-6786-0E780D5A3E05}"/>
-              </a:ext>
-            </a:extLst>
-          </p:cNvPr>
-          <p:cNvSpPr>
-            <a:spLocks noGrp="1"/>
-          </p:cNvSpPr>
-          <p:nvPr>
-            <p:ph idx="1"/>
-          </p:nvPr>
-        </p:nvSpPr>
+              <a:rPr lang="en-US" dirty="0"/>
+              <a:t>VSCODE – Recommended Extensions</a:t>
+            </a:r>
+          </a:p>
+        </p:txBody>
+      </p:sp>
+      <p:pic>
+        <p:nvPicPr>
+          <p:cNvPr id="5" name="Picture 4">
+            <a:extLst>
+              <a:ext uri="{FF2B5EF4-FFF2-40B4-BE49-F238E27FC236}">
+                <a16:creationId xmlns:a16="http://schemas.microsoft.com/office/drawing/2014/main" id="{A0184B40-7045-C6A9-036F-053A8A7716FD}"/>
+              </a:ext>
+            </a:extLst>
+          </p:cNvPr>
+          <p:cNvPicPr>
+            <a:picLocks noChangeAspect="1"/>
+          </p:cNvPicPr>
+          <p:nvPr/>
+        </p:nvPicPr>
+        <p:blipFill>
+          <a:blip r:embed="rId2"/>
+          <a:stretch>
+            <a:fillRect/>
+          </a:stretch>
+        </p:blipFill>
         <p:spPr>
           <a:xfrm>
-            <a:off x="581192" y="2180497"/>
-            <a:ext cx="11029615" cy="932222"/>
+            <a:off x="3434669" y="1874457"/>
+            <a:ext cx="5322662" cy="1714776"/>
           </a:xfrm>
+          <a:prstGeom prst="rect">
+            <a:avLst/>
+          </a:prstGeom>
         </p:spPr>
-        <p:txBody>
-          <a:bodyPr/>
-          <a:lstStyle/>
-          <a:p>
-            <a:r>
-              <a:rPr lang="en-US" dirty="0"/>
-              <a:t>Uses data from </a:t>
-            </a:r>
-            <a:r>
-              <a:rPr lang="en-US" dirty="0" err="1">
-                <a:hlinkClick r:id="rId2"/>
-              </a:rPr>
-              <a:t>grouplens</a:t>
-            </a:r>
-            <a:endParaRPr lang="en-US" dirty="0"/>
-          </a:p>
-          <a:p>
-            <a:r>
-              <a:rPr lang="en-US" dirty="0" err="1"/>
-              <a:t>MovieLens</a:t>
-            </a:r>
-            <a:r>
-              <a:rPr lang="en-US" dirty="0"/>
-              <a:t> 100k Dataset</a:t>
-            </a:r>
-          </a:p>
-        </p:txBody>
-      </p:sp>
+      </p:pic>
       <p:pic>
         <p:nvPicPr>
-          <p:cNvPr id="7" name="Picture 6">
-            <a:extLst>
-              <a:ext uri="{FF2B5EF4-FFF2-40B4-BE49-F238E27FC236}">
-                <a16:creationId xmlns:a16="http://schemas.microsoft.com/office/drawing/2014/main" id="{A49CC73F-9BD1-75FB-8D86-0B0E7EEA7617}"/>
+          <p:cNvPr id="9" name="Picture 8">
+            <a:extLst>
+              <a:ext uri="{FF2B5EF4-FFF2-40B4-BE49-F238E27FC236}">
+                <a16:creationId xmlns:a16="http://schemas.microsoft.com/office/drawing/2014/main" id="{CCAC3259-C24A-D1BD-F1B8-A54023DADDAE}"/>
               </a:ext>
             </a:extLst>
           </p:cNvPr>
@@ -7068,8 +7048,38 @@
         </p:blipFill>
         <p:spPr>
           <a:xfrm>
-            <a:off x="3803904" y="2113919"/>
-            <a:ext cx="7363968" cy="4241556"/>
+            <a:off x="2167836" y="3664575"/>
+            <a:ext cx="7856327" cy="1420155"/>
+          </a:xfrm>
+          <a:prstGeom prst="rect">
+            <a:avLst/>
+          </a:prstGeom>
+        </p:spPr>
+      </p:pic>
+      <p:pic>
+        <p:nvPicPr>
+          <p:cNvPr id="11" name="Picture 10">
+            <a:extLst>
+              <a:ext uri="{FF2B5EF4-FFF2-40B4-BE49-F238E27FC236}">
+                <a16:creationId xmlns:a16="http://schemas.microsoft.com/office/drawing/2014/main" id="{F3721C1E-096B-29CA-58BB-004E7D347EE1}"/>
+              </a:ext>
+            </a:extLst>
+          </p:cNvPr>
+          <p:cNvPicPr>
+            <a:picLocks noChangeAspect="1"/>
+          </p:cNvPicPr>
+          <p:nvPr/>
+        </p:nvPicPr>
+        <p:blipFill>
+          <a:blip r:embed="rId4"/>
+          <a:stretch>
+            <a:fillRect/>
+          </a:stretch>
+        </p:blipFill>
+        <p:spPr>
+          <a:xfrm>
+            <a:off x="1470354" y="5243809"/>
+            <a:ext cx="9251290" cy="1327907"/>
           </a:xfrm>
           <a:prstGeom prst="rect">
             <a:avLst/>
@@ -7079,7 +7089,7 @@
     </p:spTree>
     <p:extLst>
       <p:ext uri="{BB962C8B-B14F-4D97-AF65-F5344CB8AC3E}">
-        <p14:creationId xmlns:p14="http://schemas.microsoft.com/office/powerpoint/2010/main" val="3120336137"/>
+        <p14:creationId xmlns:p14="http://schemas.microsoft.com/office/powerpoint/2010/main" val="423461142"/>
       </p:ext>
     </p:extLst>
   </p:cSld>
@@ -7111,7 +7121,7 @@
           <p:cNvPr id="2" name="Title 1">
             <a:extLst>
               <a:ext uri="{FF2B5EF4-FFF2-40B4-BE49-F238E27FC236}">
-                <a16:creationId xmlns:a16="http://schemas.microsoft.com/office/drawing/2014/main" id="{0904E796-5DC0-12E8-D680-47CC82886A71}"/>
+                <a16:creationId xmlns:a16="http://schemas.microsoft.com/office/drawing/2014/main" id="{2ADC410E-BE96-E76A-7D7E-AABFBC9E5653}"/>
               </a:ext>
             </a:extLst>
           </p:cNvPr>
@@ -7128,48 +7138,72 @@
           <a:lstStyle/>
           <a:p>
             <a:r>
-              <a:rPr lang="en-US" dirty="0"/>
-              <a:t>VSCODE – Recommended Extensions</a:t>
+              <a:rPr lang="en-US" dirty="0" err="1"/>
+              <a:t>PySpark</a:t>
+            </a:r>
+            <a:r>
+              <a:rPr lang="en-US" dirty="0"/>
+              <a:t> Example</a:t>
+            </a:r>
+          </a:p>
+        </p:txBody>
+      </p:sp>
+      <p:sp>
+        <p:nvSpPr>
+          <p:cNvPr id="3" name="Content Placeholder 2">
+            <a:extLst>
+              <a:ext uri="{FF2B5EF4-FFF2-40B4-BE49-F238E27FC236}">
+                <a16:creationId xmlns:a16="http://schemas.microsoft.com/office/drawing/2014/main" id="{F0192607-9575-8E97-6786-0E780D5A3E05}"/>
+              </a:ext>
+            </a:extLst>
+          </p:cNvPr>
+          <p:cNvSpPr>
+            <a:spLocks noGrp="1"/>
+          </p:cNvSpPr>
+          <p:nvPr>
+            <p:ph idx="1"/>
+          </p:nvPr>
+        </p:nvSpPr>
+        <p:spPr>
+          <a:xfrm>
+            <a:off x="581192" y="2180497"/>
+            <a:ext cx="11029615" cy="932222"/>
+          </a:xfrm>
+        </p:spPr>
+        <p:txBody>
+          <a:bodyPr/>
+          <a:lstStyle/>
+          <a:p>
+            <a:r>
+              <a:rPr lang="en-US" dirty="0"/>
+              <a:t>Uses data from </a:t>
+            </a:r>
+            <a:r>
+              <a:rPr lang="en-US" dirty="0" err="1">
+                <a:hlinkClick r:id="rId2"/>
+              </a:rPr>
+              <a:t>grouplens</a:t>
+            </a:r>
+            <a:endParaRPr lang="en-US" dirty="0"/>
+          </a:p>
+          <a:p>
+            <a:r>
+              <a:rPr lang="en-US" dirty="0" err="1"/>
+              <a:t>MovieLens</a:t>
+            </a:r>
+            <a:r>
+              <a:rPr lang="en-US" dirty="0"/>
+              <a:t> 100k Dataset</a:t>
             </a:r>
           </a:p>
         </p:txBody>
       </p:sp>
       <p:pic>
         <p:nvPicPr>
-          <p:cNvPr id="5" name="Picture 4">
-            <a:extLst>
-              <a:ext uri="{FF2B5EF4-FFF2-40B4-BE49-F238E27FC236}">
-                <a16:creationId xmlns:a16="http://schemas.microsoft.com/office/drawing/2014/main" id="{A0184B40-7045-C6A9-036F-053A8A7716FD}"/>
-              </a:ext>
-            </a:extLst>
-          </p:cNvPr>
-          <p:cNvPicPr>
-            <a:picLocks noChangeAspect="1"/>
-          </p:cNvPicPr>
-          <p:nvPr/>
-        </p:nvPicPr>
-        <p:blipFill>
-          <a:blip r:embed="rId2"/>
-          <a:stretch>
-            <a:fillRect/>
-          </a:stretch>
-        </p:blipFill>
-        <p:spPr>
-          <a:xfrm>
-            <a:off x="3434669" y="1874457"/>
-            <a:ext cx="5322662" cy="1714776"/>
-          </a:xfrm>
-          <a:prstGeom prst="rect">
-            <a:avLst/>
-          </a:prstGeom>
-        </p:spPr>
-      </p:pic>
-      <p:pic>
-        <p:nvPicPr>
-          <p:cNvPr id="9" name="Picture 8">
-            <a:extLst>
-              <a:ext uri="{FF2B5EF4-FFF2-40B4-BE49-F238E27FC236}">
-                <a16:creationId xmlns:a16="http://schemas.microsoft.com/office/drawing/2014/main" id="{CCAC3259-C24A-D1BD-F1B8-A54023DADDAE}"/>
+          <p:cNvPr id="7" name="Picture 6">
+            <a:extLst>
+              <a:ext uri="{FF2B5EF4-FFF2-40B4-BE49-F238E27FC236}">
+                <a16:creationId xmlns:a16="http://schemas.microsoft.com/office/drawing/2014/main" id="{A49CC73F-9BD1-75FB-8D86-0B0E7EEA7617}"/>
               </a:ext>
             </a:extLst>
           </p:cNvPr>
@@ -7186,38 +7220,8 @@
         </p:blipFill>
         <p:spPr>
           <a:xfrm>
-            <a:off x="2167836" y="3664575"/>
-            <a:ext cx="7856327" cy="1420155"/>
-          </a:xfrm>
-          <a:prstGeom prst="rect">
-            <a:avLst/>
-          </a:prstGeom>
-        </p:spPr>
-      </p:pic>
-      <p:pic>
-        <p:nvPicPr>
-          <p:cNvPr id="11" name="Picture 10">
-            <a:extLst>
-              <a:ext uri="{FF2B5EF4-FFF2-40B4-BE49-F238E27FC236}">
-                <a16:creationId xmlns:a16="http://schemas.microsoft.com/office/drawing/2014/main" id="{F3721C1E-096B-29CA-58BB-004E7D347EE1}"/>
-              </a:ext>
-            </a:extLst>
-          </p:cNvPr>
-          <p:cNvPicPr>
-            <a:picLocks noChangeAspect="1"/>
-          </p:cNvPicPr>
-          <p:nvPr/>
-        </p:nvPicPr>
-        <p:blipFill>
-          <a:blip r:embed="rId4"/>
-          <a:stretch>
-            <a:fillRect/>
-          </a:stretch>
-        </p:blipFill>
-        <p:spPr>
-          <a:xfrm>
-            <a:off x="1470354" y="5243809"/>
-            <a:ext cx="9251290" cy="1327907"/>
+            <a:off x="3803904" y="2113919"/>
+            <a:ext cx="7363968" cy="4241556"/>
           </a:xfrm>
           <a:prstGeom prst="rect">
             <a:avLst/>
@@ -7227,7 +7231,7 @@
     </p:spTree>
     <p:extLst>
       <p:ext uri="{BB962C8B-B14F-4D97-AF65-F5344CB8AC3E}">
-        <p14:creationId xmlns:p14="http://schemas.microsoft.com/office/powerpoint/2010/main" val="423461142"/>
+        <p14:creationId xmlns:p14="http://schemas.microsoft.com/office/powerpoint/2010/main" val="3120336137"/>
       </p:ext>
     </p:extLst>
   </p:cSld>
@@ -14203,7 +14207,7 @@
           <p:cNvPr id="2" name="Title 1">
             <a:extLst>
               <a:ext uri="{FF2B5EF4-FFF2-40B4-BE49-F238E27FC236}">
-                <a16:creationId xmlns:a16="http://schemas.microsoft.com/office/drawing/2014/main" id="{0D67B0CF-2E57-30F0-E83D-05F3BB002F7A}"/>
+                <a16:creationId xmlns:a16="http://schemas.microsoft.com/office/drawing/2014/main" id="{68376BB2-5769-992C-B4B2-8B6CDDC1EF2D}"/>
               </a:ext>
             </a:extLst>
           </p:cNvPr>
@@ -14221,7 +14225,7 @@
           <a:p>
             <a:r>
               <a:rPr lang="en-US" dirty="0"/>
-              <a:t>Spark SQL</a:t>
+              <a:t>Shuffling</a:t>
             </a:r>
           </a:p>
         </p:txBody>
@@ -14231,7 +14235,7 @@
           <p:cNvPr id="3" name="Content Placeholder 2">
             <a:extLst>
               <a:ext uri="{FF2B5EF4-FFF2-40B4-BE49-F238E27FC236}">
-                <a16:creationId xmlns:a16="http://schemas.microsoft.com/office/drawing/2014/main" id="{09A7E7CB-1FB2-9CD9-9733-24D7333909B2}"/>
+                <a16:creationId xmlns:a16="http://schemas.microsoft.com/office/drawing/2014/main" id="{EDF80823-6ED8-8A08-CD61-F782015FF656}"/>
               </a:ext>
             </a:extLst>
           </p:cNvPr>
@@ -14242,67 +14246,150 @@
             <p:ph idx="1"/>
           </p:nvPr>
         </p:nvSpPr>
-        <p:spPr/>
+        <p:spPr>
+          <a:xfrm>
+            <a:off x="581193" y="2180496"/>
+            <a:ext cx="6202380" cy="3678303"/>
+          </a:xfrm>
+        </p:spPr>
         <p:txBody>
           <a:bodyPr/>
           <a:lstStyle/>
           <a:p>
             <a:r>
-              <a:rPr lang="en-US" dirty="0"/>
-              <a:t>Extends RDD to a </a:t>
-            </a:r>
-            <a:r>
-              <a:rPr lang="en-US" dirty="0" err="1"/>
-              <a:t>DataFrame</a:t>
-            </a:r>
-            <a:r>
-              <a:rPr lang="en-US" dirty="0"/>
-              <a:t> object</a:t>
-            </a:r>
-          </a:p>
-          <a:p>
-            <a:r>
-              <a:rPr lang="en-US" dirty="0" err="1"/>
-              <a:t>DataFrames</a:t>
-            </a:r>
-            <a:r>
-              <a:rPr lang="en-US" dirty="0"/>
-              <a:t>:</a:t>
-            </a:r>
-          </a:p>
-          <a:p>
-            <a:pPr lvl="1"/>
-            <a:r>
-              <a:rPr lang="en-US" dirty="0"/>
-              <a:t>Contain Row objects</a:t>
-            </a:r>
-          </a:p>
-          <a:p>
-            <a:pPr lvl="1"/>
-            <a:r>
-              <a:rPr lang="en-US" dirty="0"/>
-              <a:t>Can run SQL queries</a:t>
-            </a:r>
-          </a:p>
-          <a:p>
-            <a:pPr lvl="1"/>
-            <a:r>
-              <a:rPr lang="en-US" dirty="0"/>
-              <a:t>Can have a schema (store as correct datatype instead of all strings)</a:t>
-            </a:r>
-          </a:p>
-          <a:p>
-            <a:pPr lvl="1"/>
-            <a:r>
-              <a:rPr lang="en-US" dirty="0"/>
-              <a:t>Read and write to JSON, Hive, parquet, csv…</a:t>
-            </a:r>
-          </a:p>
-          <a:p>
-            <a:pPr lvl="1"/>
-            <a:r>
-              <a:rPr lang="en-US" dirty="0"/>
-              <a:t>Communication with JDBC/ODBC, Tableau</a:t>
+              <a:rPr lang="en-US" b="1" dirty="0"/>
+              <a:t>Shuffling</a:t>
+            </a:r>
+            <a:r>
+              <a:rPr lang="en-US" dirty="0"/>
+              <a:t> in </a:t>
+            </a:r>
+            <a:r>
+              <a:rPr lang="en-US" b="1" dirty="0"/>
+              <a:t>Apache Spark</a:t>
+            </a:r>
+            <a:r>
+              <a:rPr lang="en-US" dirty="0"/>
+              <a:t> is the process of </a:t>
+            </a:r>
+            <a:r>
+              <a:rPr lang="en-US" b="1" dirty="0"/>
+              <a:t>redistributing data across partitions</a:t>
+            </a:r>
+            <a:r>
+              <a:rPr lang="en-US" dirty="0"/>
+              <a:t> so that records with the same key (or related data) end up on the same executor or partition</a:t>
+            </a:r>
+          </a:p>
+          <a:p>
+            <a:r>
+              <a:rPr lang="en-US" dirty="0"/>
+              <a:t>It is one of the most expensive operations in Spark because it involves moving data over the network, writing intermediate data to disk, and sorting.</a:t>
+            </a:r>
+          </a:p>
+        </p:txBody>
+      </p:sp>
+      <p:pic>
+        <p:nvPicPr>
+          <p:cNvPr id="5" name="Picture 4">
+            <a:extLst>
+              <a:ext uri="{FF2B5EF4-FFF2-40B4-BE49-F238E27FC236}">
+                <a16:creationId xmlns:a16="http://schemas.microsoft.com/office/drawing/2014/main" id="{34E6AFCB-E873-D9AE-EFE5-6A4BC2EC4CDB}"/>
+              </a:ext>
+            </a:extLst>
+          </p:cNvPr>
+          <p:cNvPicPr>
+            <a:picLocks noChangeAspect="1"/>
+          </p:cNvPicPr>
+          <p:nvPr/>
+        </p:nvPicPr>
+        <p:blipFill>
+          <a:blip r:embed="rId2"/>
+          <a:stretch>
+            <a:fillRect/>
+          </a:stretch>
+        </p:blipFill>
+        <p:spPr>
+          <a:xfrm>
+            <a:off x="7247749" y="2751953"/>
+            <a:ext cx="4363059" cy="1524213"/>
+          </a:xfrm>
+          <a:prstGeom prst="rect">
+            <a:avLst/>
+          </a:prstGeom>
+        </p:spPr>
+      </p:pic>
+      <p:sp>
+        <p:nvSpPr>
+          <p:cNvPr id="7" name="TextBox 6">
+            <a:extLst>
+              <a:ext uri="{FF2B5EF4-FFF2-40B4-BE49-F238E27FC236}">
+                <a16:creationId xmlns:a16="http://schemas.microsoft.com/office/drawing/2014/main" id="{B4F99FDB-483A-B97A-34B8-6D5F91B084F1}"/>
+              </a:ext>
+            </a:extLst>
+          </p:cNvPr>
+          <p:cNvSpPr txBox="1"/>
+          <p:nvPr/>
+        </p:nvSpPr>
+        <p:spPr>
+          <a:xfrm>
+            <a:off x="7247749" y="4573499"/>
+            <a:ext cx="4579088" cy="1477328"/>
+          </a:xfrm>
+          <a:prstGeom prst="rect">
+            <a:avLst/>
+          </a:prstGeom>
+          <a:noFill/>
+        </p:spPr>
+        <p:txBody>
+          <a:bodyPr wrap="square">
+            <a:spAutoFit/>
+          </a:bodyPr>
+          <a:lstStyle/>
+          <a:p>
+            <a:r>
+              <a:rPr lang="en-US" dirty="0"/>
+              <a:t>Initially, records with key </a:t>
+            </a:r>
+            <a:r>
+              <a:rPr lang="en-US" dirty="0">
+                <a:latin typeface="Courier New" panose="02070309020205020404" pitchFamily="49" charset="0"/>
+              </a:rPr>
+              <a:t>"A"</a:t>
+            </a:r>
+            <a:r>
+              <a:rPr lang="en-US" dirty="0"/>
+              <a:t> and </a:t>
+            </a:r>
+            <a:r>
+              <a:rPr lang="en-US" dirty="0">
+                <a:latin typeface="Courier New" panose="02070309020205020404" pitchFamily="49" charset="0"/>
+              </a:rPr>
+              <a:t>"B"</a:t>
+            </a:r>
+            <a:r>
+              <a:rPr lang="en-US" dirty="0"/>
+              <a:t> may be spread across different partitions. Spark shuffles the data so all </a:t>
+            </a:r>
+            <a:r>
+              <a:rPr lang="en-US" dirty="0">
+                <a:latin typeface="Courier New" panose="02070309020205020404" pitchFamily="49" charset="0"/>
+              </a:rPr>
+              <a:t>"A"</a:t>
+            </a:r>
+            <a:r>
+              <a:rPr lang="en-US" dirty="0"/>
+              <a:t> records are together and all </a:t>
+            </a:r>
+            <a:r>
+              <a:rPr lang="en-US" dirty="0">
+                <a:latin typeface="Courier New" panose="02070309020205020404" pitchFamily="49" charset="0"/>
+              </a:rPr>
+              <a:t>"B"</a:t>
+            </a:r>
+            <a:r>
+              <a:rPr lang="en-US" dirty="0"/>
+              <a:t> records are together before performing the reduction.</a:t>
             </a:r>
           </a:p>
         </p:txBody>
@@ -14310,7 +14397,7 @@
     </p:spTree>
     <p:extLst>
       <p:ext uri="{BB962C8B-B14F-4D97-AF65-F5344CB8AC3E}">
-        <p14:creationId xmlns:p14="http://schemas.microsoft.com/office/powerpoint/2010/main" val="1991824758"/>
+        <p14:creationId xmlns:p14="http://schemas.microsoft.com/office/powerpoint/2010/main" val="2134369940"/>
       </p:ext>
     </p:extLst>
   </p:cSld>
@@ -14342,6 +14429,1035 @@
           <p:cNvPr id="2" name="Title 1">
             <a:extLst>
               <a:ext uri="{FF2B5EF4-FFF2-40B4-BE49-F238E27FC236}">
+                <a16:creationId xmlns:a16="http://schemas.microsoft.com/office/drawing/2014/main" id="{D427D644-9700-CEBE-0461-20C0E9EA73F8}"/>
+              </a:ext>
+            </a:extLst>
+          </p:cNvPr>
+          <p:cNvSpPr>
+            <a:spLocks noGrp="1"/>
+          </p:cNvSpPr>
+          <p:nvPr>
+            <p:ph type="title"/>
+          </p:nvPr>
+        </p:nvSpPr>
+        <p:spPr/>
+        <p:txBody>
+          <a:bodyPr/>
+          <a:lstStyle/>
+          <a:p>
+            <a:r>
+              <a:rPr lang="en-US" dirty="0"/>
+              <a:t>Shuffling</a:t>
+            </a:r>
+          </a:p>
+        </p:txBody>
+      </p:sp>
+      <p:sp>
+        <p:nvSpPr>
+          <p:cNvPr id="3" name="Content Placeholder 2">
+            <a:extLst>
+              <a:ext uri="{FF2B5EF4-FFF2-40B4-BE49-F238E27FC236}">
+                <a16:creationId xmlns:a16="http://schemas.microsoft.com/office/drawing/2014/main" id="{F26186D7-0CC2-C478-050A-816A1053E3A4}"/>
+              </a:ext>
+            </a:extLst>
+          </p:cNvPr>
+          <p:cNvSpPr>
+            <a:spLocks noGrp="1"/>
+          </p:cNvSpPr>
+          <p:nvPr>
+            <p:ph idx="1"/>
+          </p:nvPr>
+        </p:nvSpPr>
+        <p:spPr>
+          <a:xfrm>
+            <a:off x="581193" y="2180496"/>
+            <a:ext cx="5968464" cy="3678303"/>
+          </a:xfrm>
+        </p:spPr>
+        <p:txBody>
+          <a:bodyPr/>
+          <a:lstStyle/>
+          <a:p>
+            <a:r>
+              <a:rPr lang="en-US" dirty="0"/>
+              <a:t>Each executor processes its local partition. </a:t>
+            </a:r>
+          </a:p>
+          <a:p>
+            <a:r>
+              <a:rPr lang="en-US" dirty="0"/>
+              <a:t>Spark partitions the output based on a partitioning function (typically a hash of the key). </a:t>
+            </a:r>
+          </a:p>
+          <a:p>
+            <a:r>
+              <a:rPr lang="en-US" dirty="0"/>
+              <a:t>Data is written to local disk as intermediate shuffle files. </a:t>
+            </a:r>
+          </a:p>
+          <a:p>
+            <a:r>
+              <a:rPr lang="en-US" dirty="0"/>
+              <a:t>Executors transfer the appropriate data to other executors over the network. </a:t>
+            </a:r>
+          </a:p>
+          <a:p>
+            <a:r>
+              <a:rPr lang="en-US" dirty="0"/>
+              <a:t>The receiving executors merge, sort (if necessary), and process the shuffled data.</a:t>
+            </a:r>
+          </a:p>
+        </p:txBody>
+      </p:sp>
+      <p:pic>
+        <p:nvPicPr>
+          <p:cNvPr id="5" name="Picture 4">
+            <a:extLst>
+              <a:ext uri="{FF2B5EF4-FFF2-40B4-BE49-F238E27FC236}">
+                <a16:creationId xmlns:a16="http://schemas.microsoft.com/office/drawing/2014/main" id="{2D88CDF2-CCE4-AD1E-83A6-4A2B24D24582}"/>
+              </a:ext>
+            </a:extLst>
+          </p:cNvPr>
+          <p:cNvPicPr>
+            <a:picLocks noChangeAspect="1"/>
+          </p:cNvPicPr>
+          <p:nvPr/>
+        </p:nvPicPr>
+        <p:blipFill>
+          <a:blip r:embed="rId2"/>
+          <a:stretch>
+            <a:fillRect/>
+          </a:stretch>
+        </p:blipFill>
+        <p:spPr>
+          <a:xfrm>
+            <a:off x="7336466" y="2329584"/>
+            <a:ext cx="2846440" cy="3856211"/>
+          </a:xfrm>
+          <a:prstGeom prst="rect">
+            <a:avLst/>
+          </a:prstGeom>
+        </p:spPr>
+      </p:pic>
+    </p:spTree>
+    <p:extLst>
+      <p:ext uri="{BB962C8B-B14F-4D97-AF65-F5344CB8AC3E}">
+        <p14:creationId xmlns:p14="http://schemas.microsoft.com/office/powerpoint/2010/main" val="900925438"/>
+      </p:ext>
+    </p:extLst>
+  </p:cSld>
+  <p:clrMapOvr>
+    <a:masterClrMapping/>
+  </p:clrMapOvr>
+</p:sld>
+</file>
+
+<file path=ppt/slides/slide48.xml><?xml version="1.0" encoding="utf-8"?>
+<p:sld xmlns:a="http://schemas.openxmlformats.org/drawingml/2006/main" xmlns:r="http://schemas.openxmlformats.org/officeDocument/2006/relationships" xmlns:p="http://schemas.openxmlformats.org/presentationml/2006/main">
+  <p:cSld>
+    <p:spTree>
+      <p:nvGrpSpPr>
+        <p:cNvPr id="1" name=""/>
+        <p:cNvGrpSpPr/>
+        <p:nvPr/>
+      </p:nvGrpSpPr>
+      <p:grpSpPr>
+        <a:xfrm>
+          <a:off x="0" y="0"/>
+          <a:ext cx="0" cy="0"/>
+          <a:chOff x="0" y="0"/>
+          <a:chExt cx="0" cy="0"/>
+        </a:xfrm>
+      </p:grpSpPr>
+      <p:sp>
+        <p:nvSpPr>
+          <p:cNvPr id="2" name="Title 1">
+            <a:extLst>
+              <a:ext uri="{FF2B5EF4-FFF2-40B4-BE49-F238E27FC236}">
+                <a16:creationId xmlns:a16="http://schemas.microsoft.com/office/drawing/2014/main" id="{84CC7C16-6EC0-3C82-641E-41118E8EAB75}"/>
+              </a:ext>
+            </a:extLst>
+          </p:cNvPr>
+          <p:cNvSpPr>
+            <a:spLocks noGrp="1"/>
+          </p:cNvSpPr>
+          <p:nvPr>
+            <p:ph type="title"/>
+          </p:nvPr>
+        </p:nvSpPr>
+        <p:spPr/>
+        <p:txBody>
+          <a:bodyPr/>
+          <a:lstStyle/>
+          <a:p>
+            <a:r>
+              <a:rPr lang="en-US" dirty="0"/>
+              <a:t>Narrow vs wide transformations</a:t>
+            </a:r>
+          </a:p>
+        </p:txBody>
+      </p:sp>
+      <p:graphicFrame>
+        <p:nvGraphicFramePr>
+          <p:cNvPr id="4" name="Content Placeholder 3">
+            <a:extLst>
+              <a:ext uri="{FF2B5EF4-FFF2-40B4-BE49-F238E27FC236}">
+                <a16:creationId xmlns:a16="http://schemas.microsoft.com/office/drawing/2014/main" id="{102165AF-2DD4-F91F-0216-B8601B501E58}"/>
+              </a:ext>
+            </a:extLst>
+          </p:cNvPr>
+          <p:cNvGraphicFramePr>
+            <a:graphicFrameLocks noGrp="1"/>
+          </p:cNvGraphicFramePr>
+          <p:nvPr>
+            <p:ph idx="1"/>
+            <p:extLst>
+              <p:ext uri="{D42A27DB-BD31-4B8C-83A1-F6EECF244321}">
+                <p14:modId xmlns:p14="http://schemas.microsoft.com/office/powerpoint/2010/main" val="4225002304"/>
+              </p:ext>
+            </p:extLst>
+          </p:nvPr>
+        </p:nvGraphicFramePr>
+        <p:xfrm>
+          <a:off x="804476" y="3712000"/>
+          <a:ext cx="11029950" cy="1828800"/>
+        </p:xfrm>
+        <a:graphic>
+          <a:graphicData uri="http://schemas.openxmlformats.org/drawingml/2006/table">
+            <a:tbl>
+              <a:tblPr/>
+              <a:tblGrid>
+                <a:gridCol w="5514975">
+                  <a:extLst>
+                    <a:ext uri="{9D8B030D-6E8A-4147-A177-3AD203B41FA5}">
+                      <a16:colId xmlns:a16="http://schemas.microsoft.com/office/drawing/2014/main" val="1143201161"/>
+                    </a:ext>
+                  </a:extLst>
+                </a:gridCol>
+                <a:gridCol w="5514975">
+                  <a:extLst>
+                    <a:ext uri="{9D8B030D-6E8A-4147-A177-3AD203B41FA5}">
+                      <a16:colId xmlns:a16="http://schemas.microsoft.com/office/drawing/2014/main" val="2032918123"/>
+                    </a:ext>
+                  </a:extLst>
+                </a:gridCol>
+              </a:tblGrid>
+              <a:tr h="0">
+                <a:tc>
+                  <a:txBody>
+                    <a:bodyPr/>
+                    <a:lstStyle/>
+                    <a:p>
+                      <a:pPr>
+                        <a:buNone/>
+                      </a:pPr>
+                      <a:r>
+                        <a:rPr lang="en-US" dirty="0"/>
+                        <a:t>Narrow Transformation</a:t>
+                      </a:r>
+                    </a:p>
+                  </a:txBody>
+                  <a:tcPr anchor="ctr">
+                    <a:lnL>
+                      <a:noFill/>
+                    </a:lnL>
+                    <a:lnR>
+                      <a:noFill/>
+                    </a:lnR>
+                    <a:lnT>
+                      <a:noFill/>
+                    </a:lnT>
+                    <a:lnB>
+                      <a:noFill/>
+                    </a:lnB>
+                    <a:noFill/>
+                  </a:tcPr>
+                </a:tc>
+                <a:tc>
+                  <a:txBody>
+                    <a:bodyPr/>
+                    <a:lstStyle/>
+                    <a:p>
+                      <a:pPr>
+                        <a:buNone/>
+                      </a:pPr>
+                      <a:r>
+                        <a:rPr lang="en-US"/>
+                        <a:t>Wide Transformation</a:t>
+                      </a:r>
+                    </a:p>
+                  </a:txBody>
+                  <a:tcPr anchor="ctr">
+                    <a:lnL>
+                      <a:noFill/>
+                    </a:lnL>
+                    <a:lnR>
+                      <a:noFill/>
+                    </a:lnR>
+                    <a:lnT>
+                      <a:noFill/>
+                    </a:lnT>
+                    <a:lnB>
+                      <a:noFill/>
+                    </a:lnB>
+                    <a:noFill/>
+                  </a:tcPr>
+                </a:tc>
+                <a:extLst>
+                  <a:ext uri="{0D108BD9-81ED-4DB2-BD59-A6C34878D82A}">
+                    <a16:rowId xmlns:a16="http://schemas.microsoft.com/office/drawing/2014/main" val="1994641548"/>
+                  </a:ext>
+                </a:extLst>
+              </a:tr>
+              <a:tr h="0">
+                <a:tc>
+                  <a:txBody>
+                    <a:bodyPr/>
+                    <a:lstStyle/>
+                    <a:p>
+                      <a:pPr>
+                        <a:buNone/>
+                      </a:pPr>
+                      <a:r>
+                        <a:rPr lang="en-US">
+                          <a:latin typeface="Courier New" panose="02070309020205020404" pitchFamily="49" charset="0"/>
+                        </a:rPr>
+                        <a:t>map()</a:t>
+                      </a:r>
+                      <a:endParaRPr lang="en-US"/>
+                    </a:p>
+                  </a:txBody>
+                  <a:tcPr anchor="ctr">
+                    <a:lnL>
+                      <a:noFill/>
+                    </a:lnL>
+                    <a:lnR>
+                      <a:noFill/>
+                    </a:lnR>
+                    <a:lnT>
+                      <a:noFill/>
+                    </a:lnT>
+                    <a:lnB>
+                      <a:noFill/>
+                    </a:lnB>
+                    <a:noFill/>
+                  </a:tcPr>
+                </a:tc>
+                <a:tc>
+                  <a:txBody>
+                    <a:bodyPr/>
+                    <a:lstStyle/>
+                    <a:p>
+                      <a:pPr>
+                        <a:buNone/>
+                      </a:pPr>
+                      <a:r>
+                        <a:rPr lang="en-US">
+                          <a:latin typeface="Courier New" panose="02070309020205020404" pitchFamily="49" charset="0"/>
+                        </a:rPr>
+                        <a:t>groupByKey()</a:t>
+                      </a:r>
+                      <a:endParaRPr lang="en-US"/>
+                    </a:p>
+                  </a:txBody>
+                  <a:tcPr anchor="ctr">
+                    <a:lnL>
+                      <a:noFill/>
+                    </a:lnL>
+                    <a:lnR>
+                      <a:noFill/>
+                    </a:lnR>
+                    <a:lnT>
+                      <a:noFill/>
+                    </a:lnT>
+                    <a:lnB>
+                      <a:noFill/>
+                    </a:lnB>
+                    <a:noFill/>
+                  </a:tcPr>
+                </a:tc>
+                <a:extLst>
+                  <a:ext uri="{0D108BD9-81ED-4DB2-BD59-A6C34878D82A}">
+                    <a16:rowId xmlns:a16="http://schemas.microsoft.com/office/drawing/2014/main" val="2546410540"/>
+                  </a:ext>
+                </a:extLst>
+              </a:tr>
+              <a:tr h="0">
+                <a:tc>
+                  <a:txBody>
+                    <a:bodyPr/>
+                    <a:lstStyle/>
+                    <a:p>
+                      <a:pPr>
+                        <a:buNone/>
+                      </a:pPr>
+                      <a:r>
+                        <a:rPr lang="en-US">
+                          <a:latin typeface="Courier New" panose="02070309020205020404" pitchFamily="49" charset="0"/>
+                        </a:rPr>
+                        <a:t>filter()</a:t>
+                      </a:r>
+                      <a:endParaRPr lang="en-US"/>
+                    </a:p>
+                  </a:txBody>
+                  <a:tcPr anchor="ctr">
+                    <a:lnL>
+                      <a:noFill/>
+                    </a:lnL>
+                    <a:lnR>
+                      <a:noFill/>
+                    </a:lnR>
+                    <a:lnT>
+                      <a:noFill/>
+                    </a:lnT>
+                    <a:lnB>
+                      <a:noFill/>
+                    </a:lnB>
+                    <a:noFill/>
+                  </a:tcPr>
+                </a:tc>
+                <a:tc>
+                  <a:txBody>
+                    <a:bodyPr/>
+                    <a:lstStyle/>
+                    <a:p>
+                      <a:pPr>
+                        <a:buNone/>
+                      </a:pPr>
+                      <a:r>
+                        <a:rPr lang="en-US">
+                          <a:latin typeface="Courier New" panose="02070309020205020404" pitchFamily="49" charset="0"/>
+                        </a:rPr>
+                        <a:t>reduceByKey()</a:t>
+                      </a:r>
+                      <a:endParaRPr lang="en-US"/>
+                    </a:p>
+                  </a:txBody>
+                  <a:tcPr anchor="ctr">
+                    <a:lnL>
+                      <a:noFill/>
+                    </a:lnL>
+                    <a:lnR>
+                      <a:noFill/>
+                    </a:lnR>
+                    <a:lnT>
+                      <a:noFill/>
+                    </a:lnT>
+                    <a:lnB>
+                      <a:noFill/>
+                    </a:lnB>
+                    <a:noFill/>
+                  </a:tcPr>
+                </a:tc>
+                <a:extLst>
+                  <a:ext uri="{0D108BD9-81ED-4DB2-BD59-A6C34878D82A}">
+                    <a16:rowId xmlns:a16="http://schemas.microsoft.com/office/drawing/2014/main" val="2187875997"/>
+                  </a:ext>
+                </a:extLst>
+              </a:tr>
+              <a:tr h="0">
+                <a:tc>
+                  <a:txBody>
+                    <a:bodyPr/>
+                    <a:lstStyle/>
+                    <a:p>
+                      <a:pPr>
+                        <a:buNone/>
+                      </a:pPr>
+                      <a:r>
+                        <a:rPr lang="en-US">
+                          <a:latin typeface="Courier New" panose="02070309020205020404" pitchFamily="49" charset="0"/>
+                        </a:rPr>
+                        <a:t>flatMap()</a:t>
+                      </a:r>
+                      <a:endParaRPr lang="en-US"/>
+                    </a:p>
+                  </a:txBody>
+                  <a:tcPr anchor="ctr">
+                    <a:lnL>
+                      <a:noFill/>
+                    </a:lnL>
+                    <a:lnR>
+                      <a:noFill/>
+                    </a:lnR>
+                    <a:lnT>
+                      <a:noFill/>
+                    </a:lnT>
+                    <a:lnB>
+                      <a:noFill/>
+                    </a:lnB>
+                    <a:noFill/>
+                  </a:tcPr>
+                </a:tc>
+                <a:tc>
+                  <a:txBody>
+                    <a:bodyPr/>
+                    <a:lstStyle/>
+                    <a:p>
+                      <a:pPr>
+                        <a:buNone/>
+                      </a:pPr>
+                      <a:r>
+                        <a:rPr lang="en-US">
+                          <a:latin typeface="Courier New" panose="02070309020205020404" pitchFamily="49" charset="0"/>
+                        </a:rPr>
+                        <a:t>join()</a:t>
+                      </a:r>
+                      <a:endParaRPr lang="en-US"/>
+                    </a:p>
+                  </a:txBody>
+                  <a:tcPr anchor="ctr">
+                    <a:lnL>
+                      <a:noFill/>
+                    </a:lnL>
+                    <a:lnR>
+                      <a:noFill/>
+                    </a:lnR>
+                    <a:lnT>
+                      <a:noFill/>
+                    </a:lnT>
+                    <a:lnB>
+                      <a:noFill/>
+                    </a:lnB>
+                    <a:noFill/>
+                  </a:tcPr>
+                </a:tc>
+                <a:extLst>
+                  <a:ext uri="{0D108BD9-81ED-4DB2-BD59-A6C34878D82A}">
+                    <a16:rowId xmlns:a16="http://schemas.microsoft.com/office/drawing/2014/main" val="2579710299"/>
+                  </a:ext>
+                </a:extLst>
+              </a:tr>
+              <a:tr h="0">
+                <a:tc>
+                  <a:txBody>
+                    <a:bodyPr/>
+                    <a:lstStyle/>
+                    <a:p>
+                      <a:pPr>
+                        <a:buNone/>
+                      </a:pPr>
+                      <a:r>
+                        <a:rPr lang="en-US" dirty="0" err="1">
+                          <a:latin typeface="Courier New" panose="02070309020205020404" pitchFamily="49" charset="0"/>
+                        </a:rPr>
+                        <a:t>mapValues</a:t>
+                      </a:r>
+                      <a:r>
+                        <a:rPr lang="en-US" dirty="0">
+                          <a:latin typeface="Courier New" panose="02070309020205020404" pitchFamily="49" charset="0"/>
+                        </a:rPr>
+                        <a:t>()</a:t>
+                      </a:r>
+                      <a:endParaRPr lang="en-US" dirty="0"/>
+                    </a:p>
+                  </a:txBody>
+                  <a:tcPr anchor="ctr">
+                    <a:lnL>
+                      <a:noFill/>
+                    </a:lnL>
+                    <a:lnR>
+                      <a:noFill/>
+                    </a:lnR>
+                    <a:lnT>
+                      <a:noFill/>
+                    </a:lnT>
+                    <a:lnB>
+                      <a:noFill/>
+                    </a:lnB>
+                    <a:noFill/>
+                  </a:tcPr>
+                </a:tc>
+                <a:tc>
+                  <a:txBody>
+                    <a:bodyPr/>
+                    <a:lstStyle/>
+                    <a:p>
+                      <a:pPr>
+                        <a:buNone/>
+                      </a:pPr>
+                      <a:r>
+                        <a:rPr lang="en-US" dirty="0">
+                          <a:latin typeface="Courier New" panose="02070309020205020404" pitchFamily="49" charset="0"/>
+                        </a:rPr>
+                        <a:t>distinct()</a:t>
+                      </a:r>
+                      <a:endParaRPr lang="en-US" dirty="0"/>
+                    </a:p>
+                  </a:txBody>
+                  <a:tcPr anchor="ctr">
+                    <a:lnL>
+                      <a:noFill/>
+                    </a:lnL>
+                    <a:lnR>
+                      <a:noFill/>
+                    </a:lnR>
+                    <a:lnT>
+                      <a:noFill/>
+                    </a:lnT>
+                    <a:lnB>
+                      <a:noFill/>
+                    </a:lnB>
+                    <a:noFill/>
+                  </a:tcPr>
+                </a:tc>
+                <a:extLst>
+                  <a:ext uri="{0D108BD9-81ED-4DB2-BD59-A6C34878D82A}">
+                    <a16:rowId xmlns:a16="http://schemas.microsoft.com/office/drawing/2014/main" val="1478034479"/>
+                  </a:ext>
+                </a:extLst>
+              </a:tr>
+            </a:tbl>
+          </a:graphicData>
+        </a:graphic>
+      </p:graphicFrame>
+      <p:sp>
+        <p:nvSpPr>
+          <p:cNvPr id="6" name="TextBox 5">
+            <a:extLst>
+              <a:ext uri="{FF2B5EF4-FFF2-40B4-BE49-F238E27FC236}">
+                <a16:creationId xmlns:a16="http://schemas.microsoft.com/office/drawing/2014/main" id="{97617C38-9941-A1B4-9B7F-91230C3C1E4F}"/>
+              </a:ext>
+            </a:extLst>
+          </p:cNvPr>
+          <p:cNvSpPr txBox="1"/>
+          <p:nvPr/>
+        </p:nvSpPr>
+        <p:spPr>
+          <a:xfrm>
+            <a:off x="2921295" y="1951672"/>
+            <a:ext cx="6097772" cy="1477328"/>
+          </a:xfrm>
+          <a:prstGeom prst="rect">
+            <a:avLst/>
+          </a:prstGeom>
+          <a:noFill/>
+        </p:spPr>
+        <p:txBody>
+          <a:bodyPr wrap="square">
+            <a:spAutoFit/>
+          </a:bodyPr>
+          <a:lstStyle/>
+          <a:p>
+            <a:r>
+              <a:rPr lang="en-US" b="1" dirty="0"/>
+              <a:t>Narrow transformations</a:t>
+            </a:r>
+            <a:r>
+              <a:rPr lang="en-US" dirty="0"/>
+              <a:t>: Each output partition depends on a single input partition. No shuffle is needed. </a:t>
+            </a:r>
+          </a:p>
+          <a:p>
+            <a:endParaRPr lang="en-US" b="1" dirty="0"/>
+          </a:p>
+          <a:p>
+            <a:r>
+              <a:rPr lang="en-US" b="1" dirty="0"/>
+              <a:t>Wide transformations</a:t>
+            </a:r>
+            <a:r>
+              <a:rPr lang="en-US" dirty="0"/>
+              <a:t>: An output partition depends on multiple input partitions. Shuffle is required.</a:t>
+            </a:r>
+          </a:p>
+        </p:txBody>
+      </p:sp>
+    </p:spTree>
+    <p:extLst>
+      <p:ext uri="{BB962C8B-B14F-4D97-AF65-F5344CB8AC3E}">
+        <p14:creationId xmlns:p14="http://schemas.microsoft.com/office/powerpoint/2010/main" val="1870815295"/>
+      </p:ext>
+    </p:extLst>
+  </p:cSld>
+  <p:clrMapOvr>
+    <a:masterClrMapping/>
+  </p:clrMapOvr>
+</p:sld>
+</file>
+
+<file path=ppt/slides/slide49.xml><?xml version="1.0" encoding="utf-8"?>
+<p:sld xmlns:a="http://schemas.openxmlformats.org/drawingml/2006/main" xmlns:r="http://schemas.openxmlformats.org/officeDocument/2006/relationships" xmlns:p="http://schemas.openxmlformats.org/presentationml/2006/main">
+  <p:cSld>
+    <p:spTree>
+      <p:nvGrpSpPr>
+        <p:cNvPr id="1" name=""/>
+        <p:cNvGrpSpPr/>
+        <p:nvPr/>
+      </p:nvGrpSpPr>
+      <p:grpSpPr>
+        <a:xfrm>
+          <a:off x="0" y="0"/>
+          <a:ext cx="0" cy="0"/>
+          <a:chOff x="0" y="0"/>
+          <a:chExt cx="0" cy="0"/>
+        </a:xfrm>
+      </p:grpSpPr>
+      <p:sp>
+        <p:nvSpPr>
+          <p:cNvPr id="2" name="Title 1">
+            <a:extLst>
+              <a:ext uri="{FF2B5EF4-FFF2-40B4-BE49-F238E27FC236}">
+                <a16:creationId xmlns:a16="http://schemas.microsoft.com/office/drawing/2014/main" id="{E07F8A83-9167-C2C5-75C1-38C29937D9DC}"/>
+              </a:ext>
+            </a:extLst>
+          </p:cNvPr>
+          <p:cNvSpPr>
+            <a:spLocks noGrp="1"/>
+          </p:cNvSpPr>
+          <p:nvPr>
+            <p:ph type="title"/>
+          </p:nvPr>
+        </p:nvSpPr>
+        <p:spPr/>
+        <p:txBody>
+          <a:bodyPr/>
+          <a:lstStyle/>
+          <a:p>
+            <a:endParaRPr lang="en-US"/>
+          </a:p>
+        </p:txBody>
+      </p:sp>
+      <p:sp>
+        <p:nvSpPr>
+          <p:cNvPr id="3" name="Content Placeholder 2">
+            <a:extLst>
+              <a:ext uri="{FF2B5EF4-FFF2-40B4-BE49-F238E27FC236}">
+                <a16:creationId xmlns:a16="http://schemas.microsoft.com/office/drawing/2014/main" id="{B4E7DE1B-5B4C-4703-D312-8838595F0838}"/>
+              </a:ext>
+            </a:extLst>
+          </p:cNvPr>
+          <p:cNvSpPr>
+            <a:spLocks noGrp="1"/>
+          </p:cNvSpPr>
+          <p:nvPr>
+            <p:ph idx="1"/>
+          </p:nvPr>
+        </p:nvSpPr>
+        <p:spPr/>
+        <p:txBody>
+          <a:bodyPr/>
+          <a:lstStyle/>
+          <a:p>
+            <a:endParaRPr lang="en-US"/>
+          </a:p>
+        </p:txBody>
+      </p:sp>
+    </p:spTree>
+    <p:extLst>
+      <p:ext uri="{BB962C8B-B14F-4D97-AF65-F5344CB8AC3E}">
+        <p14:creationId xmlns:p14="http://schemas.microsoft.com/office/powerpoint/2010/main" val="277379055"/>
+      </p:ext>
+    </p:extLst>
+  </p:cSld>
+  <p:clrMapOvr>
+    <a:masterClrMapping/>
+  </p:clrMapOvr>
+</p:sld>
+</file>
+
+<file path=ppt/slides/slide5.xml><?xml version="1.0" encoding="utf-8"?>
+<p:sld xmlns:a="http://schemas.openxmlformats.org/drawingml/2006/main" xmlns:r="http://schemas.openxmlformats.org/officeDocument/2006/relationships" xmlns:p="http://schemas.openxmlformats.org/presentationml/2006/main">
+  <p:cSld>
+    <p:spTree>
+      <p:nvGrpSpPr>
+        <p:cNvPr id="1" name=""/>
+        <p:cNvGrpSpPr/>
+        <p:nvPr/>
+      </p:nvGrpSpPr>
+      <p:grpSpPr>
+        <a:xfrm>
+          <a:off x="0" y="0"/>
+          <a:ext cx="0" cy="0"/>
+          <a:chOff x="0" y="0"/>
+          <a:chExt cx="0" cy="0"/>
+        </a:xfrm>
+      </p:grpSpPr>
+      <p:sp>
+        <p:nvSpPr>
+          <p:cNvPr id="2" name="Title 1">
+            <a:extLst>
+              <a:ext uri="{FF2B5EF4-FFF2-40B4-BE49-F238E27FC236}">
+                <a16:creationId xmlns:a16="http://schemas.microsoft.com/office/drawing/2014/main" id="{5BF1DFC8-EB33-1409-27E4-946C56ACB974}"/>
+              </a:ext>
+            </a:extLst>
+          </p:cNvPr>
+          <p:cNvSpPr>
+            <a:spLocks noGrp="1"/>
+          </p:cNvSpPr>
+          <p:nvPr>
+            <p:ph type="title"/>
+          </p:nvPr>
+        </p:nvSpPr>
+        <p:spPr/>
+        <p:txBody>
+          <a:bodyPr/>
+          <a:lstStyle/>
+          <a:p>
+            <a:r>
+              <a:rPr lang="en-US" dirty="0"/>
+              <a:t>Apache Hadoop</a:t>
+            </a:r>
+          </a:p>
+        </p:txBody>
+      </p:sp>
+      <p:sp>
+        <p:nvSpPr>
+          <p:cNvPr id="3" name="Content Placeholder 2">
+            <a:extLst>
+              <a:ext uri="{FF2B5EF4-FFF2-40B4-BE49-F238E27FC236}">
+                <a16:creationId xmlns:a16="http://schemas.microsoft.com/office/drawing/2014/main" id="{F5C00017-767E-F9C5-B3C8-52067E28ADE5}"/>
+              </a:ext>
+            </a:extLst>
+          </p:cNvPr>
+          <p:cNvSpPr>
+            <a:spLocks noGrp="1"/>
+          </p:cNvSpPr>
+          <p:nvPr>
+            <p:ph idx="1"/>
+          </p:nvPr>
+        </p:nvSpPr>
+        <p:spPr>
+          <a:xfrm>
+            <a:off x="581192" y="2180496"/>
+            <a:ext cx="11029615" cy="4251619"/>
+          </a:xfrm>
+        </p:spPr>
+        <p:txBody>
+          <a:bodyPr/>
+          <a:lstStyle/>
+          <a:p>
+            <a:r>
+              <a:rPr lang="en-US" dirty="0"/>
+              <a:t>Apache Hadoop is an open-source software framework for distributed storage and large-scale data processing. Developed by Apache Software Foundation, it enables reliable, fault-tolerant computation across clusters of commodity servers.</a:t>
+            </a:r>
+          </a:p>
+          <a:p>
+            <a:r>
+              <a:rPr lang="en-US" dirty="0"/>
+              <a:t>Apache Hadoop is not just one thing. Historically it included:</a:t>
+            </a:r>
+          </a:p>
+          <a:p>
+            <a:pPr lvl="1"/>
+            <a:r>
+              <a:rPr lang="en-US" dirty="0"/>
+              <a:t>Storage: Hadoop Distributed File System (HDFS) </a:t>
+            </a:r>
+          </a:p>
+          <a:p>
+            <a:pPr lvl="1"/>
+            <a:r>
+              <a:rPr lang="en-US" dirty="0"/>
+              <a:t>Resource management (job scheduling layer): Yet Another Resource Negotiator (YARN) </a:t>
+            </a:r>
+          </a:p>
+          <a:p>
+            <a:pPr lvl="1"/>
+            <a:r>
+              <a:rPr lang="en-US" dirty="0"/>
+              <a:t>Processing (compute engine): Hadoop MapReduce</a:t>
+            </a:r>
+          </a:p>
+          <a:p>
+            <a:r>
+              <a:rPr lang="en-US" dirty="0"/>
+              <a:t>In modern workflows, Spark has come to replace Hadoop MapReduce as the compute engine layer, but will still make use of the HDFS, and can run on YARN </a:t>
+            </a:r>
+          </a:p>
+          <a:p>
+            <a:pPr lvl="1"/>
+            <a:r>
+              <a:rPr lang="en-US" dirty="0"/>
+              <a:t>“Run programs up to 100x faster than Hadoop MapReduce in memory, or 10x faster on disk.”</a:t>
+            </a:r>
+          </a:p>
+          <a:p>
+            <a:pPr lvl="1"/>
+            <a:r>
+              <a:rPr lang="en-US" dirty="0"/>
+              <a:t>Under the hood: DAG Engine (directed acyclic graph) optimizes workflows </a:t>
+            </a:r>
+          </a:p>
+          <a:p>
+            <a:endParaRPr lang="en-US" dirty="0"/>
+          </a:p>
+        </p:txBody>
+      </p:sp>
+    </p:spTree>
+    <p:extLst>
+      <p:ext uri="{BB962C8B-B14F-4D97-AF65-F5344CB8AC3E}">
+        <p14:creationId xmlns:p14="http://schemas.microsoft.com/office/powerpoint/2010/main" val="1157775720"/>
+      </p:ext>
+    </p:extLst>
+  </p:cSld>
+  <p:clrMapOvr>
+    <a:masterClrMapping/>
+  </p:clrMapOvr>
+</p:sld>
+</file>
+
+<file path=ppt/slides/slide50.xml><?xml version="1.0" encoding="utf-8"?>
+<p:sld xmlns:a="http://schemas.openxmlformats.org/drawingml/2006/main" xmlns:r="http://schemas.openxmlformats.org/officeDocument/2006/relationships" xmlns:p="http://schemas.openxmlformats.org/presentationml/2006/main">
+  <p:cSld>
+    <p:spTree>
+      <p:nvGrpSpPr>
+        <p:cNvPr id="1" name=""/>
+        <p:cNvGrpSpPr/>
+        <p:nvPr/>
+      </p:nvGrpSpPr>
+      <p:grpSpPr>
+        <a:xfrm>
+          <a:off x="0" y="0"/>
+          <a:ext cx="0" cy="0"/>
+          <a:chOff x="0" y="0"/>
+          <a:chExt cx="0" cy="0"/>
+        </a:xfrm>
+      </p:grpSpPr>
+      <p:sp>
+        <p:nvSpPr>
+          <p:cNvPr id="2" name="Title 1">
+            <a:extLst>
+              <a:ext uri="{FF2B5EF4-FFF2-40B4-BE49-F238E27FC236}">
+                <a16:creationId xmlns:a16="http://schemas.microsoft.com/office/drawing/2014/main" id="{0D67B0CF-2E57-30F0-E83D-05F3BB002F7A}"/>
+              </a:ext>
+            </a:extLst>
+          </p:cNvPr>
+          <p:cNvSpPr>
+            <a:spLocks noGrp="1"/>
+          </p:cNvSpPr>
+          <p:nvPr>
+            <p:ph type="title"/>
+          </p:nvPr>
+        </p:nvSpPr>
+        <p:spPr/>
+        <p:txBody>
+          <a:bodyPr/>
+          <a:lstStyle/>
+          <a:p>
+            <a:r>
+              <a:rPr lang="en-US" dirty="0"/>
+              <a:t>Spark SQL</a:t>
+            </a:r>
+          </a:p>
+        </p:txBody>
+      </p:sp>
+      <p:sp>
+        <p:nvSpPr>
+          <p:cNvPr id="3" name="Content Placeholder 2">
+            <a:extLst>
+              <a:ext uri="{FF2B5EF4-FFF2-40B4-BE49-F238E27FC236}">
+                <a16:creationId xmlns:a16="http://schemas.microsoft.com/office/drawing/2014/main" id="{09A7E7CB-1FB2-9CD9-9733-24D7333909B2}"/>
+              </a:ext>
+            </a:extLst>
+          </p:cNvPr>
+          <p:cNvSpPr>
+            <a:spLocks noGrp="1"/>
+          </p:cNvSpPr>
+          <p:nvPr>
+            <p:ph idx="1"/>
+          </p:nvPr>
+        </p:nvSpPr>
+        <p:spPr/>
+        <p:txBody>
+          <a:bodyPr/>
+          <a:lstStyle/>
+          <a:p>
+            <a:r>
+              <a:rPr lang="en-US" dirty="0"/>
+              <a:t>Extends RDD to a </a:t>
+            </a:r>
+            <a:r>
+              <a:rPr lang="en-US" dirty="0" err="1"/>
+              <a:t>DataFrame</a:t>
+            </a:r>
+            <a:r>
+              <a:rPr lang="en-US" dirty="0"/>
+              <a:t> object</a:t>
+            </a:r>
+          </a:p>
+          <a:p>
+            <a:r>
+              <a:rPr lang="en-US" dirty="0" err="1"/>
+              <a:t>DataFrames</a:t>
+            </a:r>
+            <a:r>
+              <a:rPr lang="en-US" dirty="0"/>
+              <a:t>:</a:t>
+            </a:r>
+          </a:p>
+          <a:p>
+            <a:pPr lvl="1"/>
+            <a:r>
+              <a:rPr lang="en-US" dirty="0"/>
+              <a:t>Contain Row objects</a:t>
+            </a:r>
+          </a:p>
+          <a:p>
+            <a:pPr lvl="1"/>
+            <a:r>
+              <a:rPr lang="en-US" dirty="0"/>
+              <a:t>Can run SQL queries</a:t>
+            </a:r>
+          </a:p>
+          <a:p>
+            <a:pPr lvl="1"/>
+            <a:r>
+              <a:rPr lang="en-US" dirty="0"/>
+              <a:t>Can have a schema (store as correct datatype instead of all strings)</a:t>
+            </a:r>
+          </a:p>
+          <a:p>
+            <a:pPr lvl="1"/>
+            <a:r>
+              <a:rPr lang="en-US" dirty="0"/>
+              <a:t>Read and write to JSON, Hive, parquet, csv…</a:t>
+            </a:r>
+          </a:p>
+          <a:p>
+            <a:pPr lvl="1"/>
+            <a:r>
+              <a:rPr lang="en-US" dirty="0"/>
+              <a:t>Communication with JDBC/ODBC, Tableau</a:t>
+            </a:r>
+          </a:p>
+        </p:txBody>
+      </p:sp>
+    </p:spTree>
+    <p:extLst>
+      <p:ext uri="{BB962C8B-B14F-4D97-AF65-F5344CB8AC3E}">
+        <p14:creationId xmlns:p14="http://schemas.microsoft.com/office/powerpoint/2010/main" val="1991824758"/>
+      </p:ext>
+    </p:extLst>
+  </p:cSld>
+  <p:clrMapOvr>
+    <a:masterClrMapping/>
+  </p:clrMapOvr>
+</p:sld>
+</file>
+
+<file path=ppt/slides/slide51.xml><?xml version="1.0" encoding="utf-8"?>
+<p:sld xmlns:a="http://schemas.openxmlformats.org/drawingml/2006/main" xmlns:r="http://schemas.openxmlformats.org/officeDocument/2006/relationships" xmlns:p="http://schemas.openxmlformats.org/presentationml/2006/main">
+  <p:cSld>
+    <p:spTree>
+      <p:nvGrpSpPr>
+        <p:cNvPr id="1" name=""/>
+        <p:cNvGrpSpPr/>
+        <p:nvPr/>
+      </p:nvGrpSpPr>
+      <p:grpSpPr>
+        <a:xfrm>
+          <a:off x="0" y="0"/>
+          <a:ext cx="0" cy="0"/>
+          <a:chOff x="0" y="0"/>
+          <a:chExt cx="0" cy="0"/>
+        </a:xfrm>
+      </p:grpSpPr>
+      <p:sp>
+        <p:nvSpPr>
+          <p:cNvPr id="2" name="Title 1">
+            <a:extLst>
+              <a:ext uri="{FF2B5EF4-FFF2-40B4-BE49-F238E27FC236}">
                 <a16:creationId xmlns:a16="http://schemas.microsoft.com/office/drawing/2014/main" id="{D35463D4-1EA0-7811-1996-6DFACEFBF62B}"/>
               </a:ext>
             </a:extLst>
@@ -14514,7 +15630,7 @@
 </p:sld>
 </file>
 
-<file path=ppt/slides/slide48.xml><?xml version="1.0" encoding="utf-8"?>
+<file path=ppt/slides/slide52.xml><?xml version="1.0" encoding="utf-8"?>
 <p:sld xmlns:a="http://schemas.openxmlformats.org/drawingml/2006/main" xmlns:r="http://schemas.openxmlformats.org/officeDocument/2006/relationships" xmlns:p="http://schemas.openxmlformats.org/presentationml/2006/main">
   <p:cSld>
     <p:spTree>
@@ -14609,7 +15725,7 @@
 </p:sld>
 </file>
 
-<file path=ppt/slides/slide49.xml><?xml version="1.0" encoding="utf-8"?>
+<file path=ppt/slides/slide53.xml><?xml version="1.0" encoding="utf-8"?>
 <p:sld xmlns:a="http://schemas.openxmlformats.org/drawingml/2006/main" xmlns:r="http://schemas.openxmlformats.org/officeDocument/2006/relationships" xmlns:p="http://schemas.openxmlformats.org/presentationml/2006/main">
   <p:cSld>
     <p:spTree>
@@ -14701,148 +15817,7 @@
 </p:sld>
 </file>
 
-<file path=ppt/slides/slide5.xml><?xml version="1.0" encoding="utf-8"?>
-<p:sld xmlns:a="http://schemas.openxmlformats.org/drawingml/2006/main" xmlns:r="http://schemas.openxmlformats.org/officeDocument/2006/relationships" xmlns:p="http://schemas.openxmlformats.org/presentationml/2006/main">
-  <p:cSld>
-    <p:spTree>
-      <p:nvGrpSpPr>
-        <p:cNvPr id="1" name=""/>
-        <p:cNvGrpSpPr/>
-        <p:nvPr/>
-      </p:nvGrpSpPr>
-      <p:grpSpPr>
-        <a:xfrm>
-          <a:off x="0" y="0"/>
-          <a:ext cx="0" cy="0"/>
-          <a:chOff x="0" y="0"/>
-          <a:chExt cx="0" cy="0"/>
-        </a:xfrm>
-      </p:grpSpPr>
-      <p:sp>
-        <p:nvSpPr>
-          <p:cNvPr id="2" name="Title 1">
-            <a:extLst>
-              <a:ext uri="{FF2B5EF4-FFF2-40B4-BE49-F238E27FC236}">
-                <a16:creationId xmlns:a16="http://schemas.microsoft.com/office/drawing/2014/main" id="{5BF1DFC8-EB33-1409-27E4-946C56ACB974}"/>
-              </a:ext>
-            </a:extLst>
-          </p:cNvPr>
-          <p:cNvSpPr>
-            <a:spLocks noGrp="1"/>
-          </p:cNvSpPr>
-          <p:nvPr>
-            <p:ph type="title"/>
-          </p:nvPr>
-        </p:nvSpPr>
-        <p:spPr/>
-        <p:txBody>
-          <a:bodyPr/>
-          <a:lstStyle/>
-          <a:p>
-            <a:r>
-              <a:rPr lang="en-US" dirty="0"/>
-              <a:t>Apache Hadoop</a:t>
-            </a:r>
-          </a:p>
-        </p:txBody>
-      </p:sp>
-      <p:sp>
-        <p:nvSpPr>
-          <p:cNvPr id="3" name="Content Placeholder 2">
-            <a:extLst>
-              <a:ext uri="{FF2B5EF4-FFF2-40B4-BE49-F238E27FC236}">
-                <a16:creationId xmlns:a16="http://schemas.microsoft.com/office/drawing/2014/main" id="{F5C00017-767E-F9C5-B3C8-52067E28ADE5}"/>
-              </a:ext>
-            </a:extLst>
-          </p:cNvPr>
-          <p:cNvSpPr>
-            <a:spLocks noGrp="1"/>
-          </p:cNvSpPr>
-          <p:nvPr>
-            <p:ph idx="1"/>
-          </p:nvPr>
-        </p:nvSpPr>
-        <p:spPr>
-          <a:xfrm>
-            <a:off x="581192" y="2180496"/>
-            <a:ext cx="11029615" cy="4251619"/>
-          </a:xfrm>
-        </p:spPr>
-        <p:txBody>
-          <a:bodyPr/>
-          <a:lstStyle/>
-          <a:p>
-            <a:r>
-              <a:rPr lang="en-US" dirty="0"/>
-              <a:t>Apache Hadoop is an open-source software framework for distributed storage and large-scale data processing. Developed by Apache Software Foundation, it enables reliable, fault-tolerant computation across clusters of commodity servers.</a:t>
-            </a:r>
-          </a:p>
-          <a:p>
-            <a:r>
-              <a:rPr lang="en-US" dirty="0"/>
-              <a:t>Apache Hadoop is not just one thing. Historically it included:</a:t>
-            </a:r>
-          </a:p>
-          <a:p>
-            <a:pPr lvl="1"/>
-            <a:r>
-              <a:rPr lang="en-US" dirty="0"/>
-              <a:t>Storage: Hadoop Distributed File System (HDFS) </a:t>
-            </a:r>
-          </a:p>
-          <a:p>
-            <a:pPr lvl="1"/>
-            <a:r>
-              <a:rPr lang="en-US" dirty="0"/>
-              <a:t>Resource management (job scheduling layer): Yet Another Resource Negotiator (YARN) </a:t>
-            </a:r>
-          </a:p>
-          <a:p>
-            <a:pPr lvl="1"/>
-            <a:r>
-              <a:rPr lang="en-US" dirty="0"/>
-              <a:t>Processing (compute engine): Hadoop MapReduce</a:t>
-            </a:r>
-          </a:p>
-          <a:p>
-            <a:r>
-              <a:rPr lang="en-US" dirty="0"/>
-              <a:t>In modern workflows, Spark has come to replace Hadoop MapReduce as the compute engine layer, but will still make use of the HDFS, and can run on YARN </a:t>
-            </a:r>
-          </a:p>
-          <a:p>
-            <a:pPr lvl="1"/>
-            <a:r>
-              <a:rPr lang="en-US" dirty="0"/>
-              <a:t>“Run programs up to 100x faster than Hadoop MapReduce in memory, or 10x faster on disk.”</a:t>
-            </a:r>
-          </a:p>
-          <a:p>
-            <a:pPr lvl="1"/>
-            <a:r>
-              <a:rPr lang="en-US" dirty="0"/>
-              <a:t>Under the hood: DAG Engine (directed acyclic graph) optimizes workflows </a:t>
-            </a:r>
-          </a:p>
-          <a:p>
-            <a:endParaRPr lang="en-US" dirty="0"/>
-          </a:p>
-        </p:txBody>
-      </p:sp>
-    </p:spTree>
-    <p:extLst>
-      <p:ext uri="{BB962C8B-B14F-4D97-AF65-F5344CB8AC3E}">
-        <p14:creationId xmlns:p14="http://schemas.microsoft.com/office/powerpoint/2010/main" val="1157775720"/>
-      </p:ext>
-    </p:extLst>
-  </p:cSld>
-  <p:clrMapOvr>
-    <a:masterClrMapping/>
-  </p:clrMapOvr>
-</p:sld>
-</file>
-
-<file path=ppt/slides/slide50.xml><?xml version="1.0" encoding="utf-8"?>
+<file path=ppt/slides/slide54.xml><?xml version="1.0" encoding="utf-8"?>
 <p:sld xmlns:a="http://schemas.openxmlformats.org/drawingml/2006/main" xmlns:r="http://schemas.openxmlformats.org/officeDocument/2006/relationships" xmlns:p="http://schemas.openxmlformats.org/presentationml/2006/main">
   <p:cSld>
     <p:spTree>
@@ -14932,7 +15907,7 @@
 </p:sld>
 </file>
 
-<file path=ppt/slides/slide51.xml><?xml version="1.0" encoding="utf-8"?>
+<file path=ppt/slides/slide55.xml><?xml version="1.0" encoding="utf-8"?>
 <p:sld xmlns:a="http://schemas.openxmlformats.org/drawingml/2006/main" xmlns:r="http://schemas.openxmlformats.org/officeDocument/2006/relationships" xmlns:p="http://schemas.openxmlformats.org/presentationml/2006/main">
   <p:cSld>
     <p:spTree>
@@ -15092,7 +16067,7 @@
 </p:sld>
 </file>
 
-<file path=ppt/slides/slide52.xml><?xml version="1.0" encoding="utf-8"?>
+<file path=ppt/slides/slide56.xml><?xml version="1.0" encoding="utf-8"?>
 <p:sld xmlns:a="http://schemas.openxmlformats.org/drawingml/2006/main" xmlns:r="http://schemas.openxmlformats.org/officeDocument/2006/relationships" xmlns:p="http://schemas.openxmlformats.org/presentationml/2006/main">
   <p:cSld>
     <p:spTree>
@@ -15317,7 +16292,7 @@
 </p:sld>
 </file>
 
-<file path=ppt/slides/slide53.xml><?xml version="1.0" encoding="utf-8"?>
+<file path=ppt/slides/slide57.xml><?xml version="1.0" encoding="utf-8"?>
 <p:sld xmlns:a="http://schemas.openxmlformats.org/drawingml/2006/main" xmlns:r="http://schemas.openxmlformats.org/officeDocument/2006/relationships" xmlns:p="http://schemas.openxmlformats.org/presentationml/2006/main">
   <p:cSld>
     <p:spTree>
@@ -15560,7 +16535,7 @@
 </p:sld>
 </file>
 
-<file path=ppt/slides/slide54.xml><?xml version="1.0" encoding="utf-8"?>
+<file path=ppt/slides/slide58.xml><?xml version="1.0" encoding="utf-8"?>
 <p:sld xmlns:a="http://schemas.openxmlformats.org/drawingml/2006/main" xmlns:r="http://schemas.openxmlformats.org/officeDocument/2006/relationships" xmlns:p="http://schemas.openxmlformats.org/presentationml/2006/main">
   <p:cSld>
     <p:spTree>
@@ -15714,7 +16689,7 @@
 </p:sld>
 </file>
 
-<file path=ppt/slides/slide55.xml><?xml version="1.0" encoding="utf-8"?>
+<file path=ppt/slides/slide59.xml><?xml version="1.0" encoding="utf-8"?>
 <p:sld xmlns:a="http://schemas.openxmlformats.org/drawingml/2006/main" xmlns:r="http://schemas.openxmlformats.org/officeDocument/2006/relationships" xmlns:p="http://schemas.openxmlformats.org/presentationml/2006/main">
   <p:cSld>
     <p:spTree>
@@ -15853,610 +16828,6 @@
     <p:extLst>
       <p:ext uri="{BB962C8B-B14F-4D97-AF65-F5344CB8AC3E}">
         <p14:creationId xmlns:p14="http://schemas.microsoft.com/office/powerpoint/2010/main" val="4110267748"/>
-      </p:ext>
-    </p:extLst>
-  </p:cSld>
-  <p:clrMapOvr>
-    <a:masterClrMapping/>
-  </p:clrMapOvr>
-</p:sld>
-</file>
-
-<file path=ppt/slides/slide56.xml><?xml version="1.0" encoding="utf-8"?>
-<p:sld xmlns:a="http://schemas.openxmlformats.org/drawingml/2006/main" xmlns:r="http://schemas.openxmlformats.org/officeDocument/2006/relationships" xmlns:p="http://schemas.openxmlformats.org/presentationml/2006/main">
-  <p:cSld>
-    <p:spTree>
-      <p:nvGrpSpPr>
-        <p:cNvPr id="1" name=""/>
-        <p:cNvGrpSpPr/>
-        <p:nvPr/>
-      </p:nvGrpSpPr>
-      <p:grpSpPr>
-        <a:xfrm>
-          <a:off x="0" y="0"/>
-          <a:ext cx="0" cy="0"/>
-          <a:chOff x="0" y="0"/>
-          <a:chExt cx="0" cy="0"/>
-        </a:xfrm>
-      </p:grpSpPr>
-      <p:sp>
-        <p:nvSpPr>
-          <p:cNvPr id="2" name="Title 1">
-            <a:extLst>
-              <a:ext uri="{FF2B5EF4-FFF2-40B4-BE49-F238E27FC236}">
-                <a16:creationId xmlns:a16="http://schemas.microsoft.com/office/drawing/2014/main" id="{87AA6410-08E4-FA57-04A7-79862F40A49C}"/>
-              </a:ext>
-            </a:extLst>
-          </p:cNvPr>
-          <p:cNvSpPr>
-            <a:spLocks noGrp="1"/>
-          </p:cNvSpPr>
-          <p:nvPr>
-            <p:ph type="title"/>
-          </p:nvPr>
-        </p:nvSpPr>
-        <p:spPr/>
-        <p:txBody>
-          <a:bodyPr/>
-          <a:lstStyle/>
-          <a:p>
-            <a:r>
-              <a:rPr lang="en-US" dirty="0"/>
-              <a:t>Word Count With </a:t>
-            </a:r>
-            <a:r>
-              <a:rPr lang="en-US" dirty="0" err="1"/>
-              <a:t>dataframes</a:t>
-            </a:r>
-            <a:endParaRPr lang="en-US" dirty="0"/>
-          </a:p>
-        </p:txBody>
-      </p:sp>
-      <p:pic>
-        <p:nvPicPr>
-          <p:cNvPr id="5" name="Content Placeholder 4">
-            <a:extLst>
-              <a:ext uri="{FF2B5EF4-FFF2-40B4-BE49-F238E27FC236}">
-                <a16:creationId xmlns:a16="http://schemas.microsoft.com/office/drawing/2014/main" id="{B0BFAABC-BFC1-1BA9-9F84-52E48037CE18}"/>
-              </a:ext>
-            </a:extLst>
-          </p:cNvPr>
-          <p:cNvPicPr>
-            <a:picLocks noGrp="1" noChangeAspect="1"/>
-          </p:cNvPicPr>
-          <p:nvPr>
-            <p:ph idx="1"/>
-          </p:nvPr>
-        </p:nvPicPr>
-        <p:blipFill>
-          <a:blip r:embed="rId2"/>
-          <a:stretch>
-            <a:fillRect/>
-          </a:stretch>
-        </p:blipFill>
-        <p:spPr>
-          <a:xfrm>
-            <a:off x="1075374" y="2709625"/>
-            <a:ext cx="6544588" cy="2753109"/>
-          </a:xfrm>
-          <a:prstGeom prst="rect">
-            <a:avLst/>
-          </a:prstGeom>
-        </p:spPr>
-      </p:pic>
-      <p:pic>
-        <p:nvPicPr>
-          <p:cNvPr id="7" name="Picture 6">
-            <a:extLst>
-              <a:ext uri="{FF2B5EF4-FFF2-40B4-BE49-F238E27FC236}">
-                <a16:creationId xmlns:a16="http://schemas.microsoft.com/office/drawing/2014/main" id="{2B006710-9C66-AAF5-DD12-C0E9DA8570D8}"/>
-              </a:ext>
-            </a:extLst>
-          </p:cNvPr>
-          <p:cNvPicPr>
-            <a:picLocks noChangeAspect="1"/>
-          </p:cNvPicPr>
-          <p:nvPr/>
-        </p:nvPicPr>
-        <p:blipFill>
-          <a:blip r:embed="rId3"/>
-          <a:stretch>
-            <a:fillRect/>
-          </a:stretch>
-        </p:blipFill>
-        <p:spPr>
-          <a:xfrm>
-            <a:off x="8456978" y="3194269"/>
-            <a:ext cx="1686160" cy="1581371"/>
-          </a:xfrm>
-          <a:prstGeom prst="rect">
-            <a:avLst/>
-          </a:prstGeom>
-        </p:spPr>
-      </p:pic>
-    </p:spTree>
-    <p:extLst>
-      <p:ext uri="{BB962C8B-B14F-4D97-AF65-F5344CB8AC3E}">
-        <p14:creationId xmlns:p14="http://schemas.microsoft.com/office/powerpoint/2010/main" val="2013019381"/>
-      </p:ext>
-    </p:extLst>
-  </p:cSld>
-  <p:clrMapOvr>
-    <a:masterClrMapping/>
-  </p:clrMapOvr>
-</p:sld>
-</file>
-
-<file path=ppt/slides/slide57.xml><?xml version="1.0" encoding="utf-8"?>
-<p:sld xmlns:a="http://schemas.openxmlformats.org/drawingml/2006/main" xmlns:r="http://schemas.openxmlformats.org/officeDocument/2006/relationships" xmlns:p="http://schemas.openxmlformats.org/presentationml/2006/main">
-  <p:cSld>
-    <p:spTree>
-      <p:nvGrpSpPr>
-        <p:cNvPr id="1" name=""/>
-        <p:cNvGrpSpPr/>
-        <p:nvPr/>
-      </p:nvGrpSpPr>
-      <p:grpSpPr>
-        <a:xfrm>
-          <a:off x="0" y="0"/>
-          <a:ext cx="0" cy="0"/>
-          <a:chOff x="0" y="0"/>
-          <a:chExt cx="0" cy="0"/>
-        </a:xfrm>
-      </p:grpSpPr>
-      <p:sp>
-        <p:nvSpPr>
-          <p:cNvPr id="2" name="Title 1">
-            <a:extLst>
-              <a:ext uri="{FF2B5EF4-FFF2-40B4-BE49-F238E27FC236}">
-                <a16:creationId xmlns:a16="http://schemas.microsoft.com/office/drawing/2014/main" id="{941C00C0-BAF5-9D21-0914-60F749260E32}"/>
-              </a:ext>
-            </a:extLst>
-          </p:cNvPr>
-          <p:cNvSpPr>
-            <a:spLocks noGrp="1"/>
-          </p:cNvSpPr>
-          <p:nvPr>
-            <p:ph type="title"/>
-          </p:nvPr>
-        </p:nvSpPr>
-        <p:spPr/>
-        <p:txBody>
-          <a:bodyPr/>
-          <a:lstStyle/>
-          <a:p>
-            <a:r>
-              <a:rPr lang="en-US" dirty="0"/>
-              <a:t>We can use both RDD and </a:t>
-            </a:r>
-            <a:r>
-              <a:rPr lang="en-US" dirty="0" err="1"/>
-              <a:t>DataFrames</a:t>
-            </a:r>
-            <a:endParaRPr lang="en-US" dirty="0"/>
-          </a:p>
-        </p:txBody>
-      </p:sp>
-      <p:sp>
-        <p:nvSpPr>
-          <p:cNvPr id="3" name="Content Placeholder 2">
-            <a:extLst>
-              <a:ext uri="{FF2B5EF4-FFF2-40B4-BE49-F238E27FC236}">
-                <a16:creationId xmlns:a16="http://schemas.microsoft.com/office/drawing/2014/main" id="{71F2181D-C80B-A29F-D7DE-FE91B0595A01}"/>
-              </a:ext>
-            </a:extLst>
-          </p:cNvPr>
-          <p:cNvSpPr>
-            <a:spLocks noGrp="1"/>
-          </p:cNvSpPr>
-          <p:nvPr>
-            <p:ph idx="1"/>
-          </p:nvPr>
-        </p:nvSpPr>
-        <p:spPr/>
-        <p:txBody>
-          <a:bodyPr/>
-          <a:lstStyle/>
-          <a:p>
-            <a:r>
-              <a:rPr lang="en-US" dirty="0"/>
-              <a:t>RDDs are still around for a reason</a:t>
-            </a:r>
-          </a:p>
-          <a:p>
-            <a:r>
-              <a:rPr lang="en-US" dirty="0"/>
-              <a:t>As you have seen, we can use both </a:t>
-            </a:r>
-            <a:r>
-              <a:rPr lang="en-US" dirty="0" err="1"/>
-              <a:t>DataFrames</a:t>
-            </a:r>
-            <a:r>
-              <a:rPr lang="en-US" dirty="0"/>
-              <a:t> and RDDs for solutions</a:t>
-            </a:r>
-          </a:p>
-          <a:p>
-            <a:r>
-              <a:rPr lang="en-US" dirty="0"/>
-              <a:t>Use the tool best suited for the task</a:t>
-            </a:r>
-          </a:p>
-          <a:p>
-            <a:pPr lvl="1"/>
-            <a:r>
-              <a:rPr lang="en-US" dirty="0"/>
-              <a:t>SQL style problem? </a:t>
-            </a:r>
-            <a:r>
-              <a:rPr lang="en-US" dirty="0" err="1"/>
-              <a:t>DataFrames</a:t>
-            </a:r>
-            <a:endParaRPr lang="en-US" dirty="0"/>
-          </a:p>
-          <a:p>
-            <a:pPr lvl="1"/>
-            <a:r>
-              <a:rPr lang="en-US" dirty="0"/>
-              <a:t>Map or Reduce type operations? RDD</a:t>
-            </a:r>
-          </a:p>
-          <a:p>
-            <a:r>
-              <a:rPr lang="en-US" dirty="0"/>
-              <a:t>We can convert between the two, as we have seen</a:t>
-            </a:r>
-          </a:p>
-        </p:txBody>
-      </p:sp>
-    </p:spTree>
-    <p:extLst>
-      <p:ext uri="{BB962C8B-B14F-4D97-AF65-F5344CB8AC3E}">
-        <p14:creationId xmlns:p14="http://schemas.microsoft.com/office/powerpoint/2010/main" val="130508592"/>
-      </p:ext>
-    </p:extLst>
-  </p:cSld>
-  <p:clrMapOvr>
-    <a:masterClrMapping/>
-  </p:clrMapOvr>
-</p:sld>
-</file>
-
-<file path=ppt/slides/slide58.xml><?xml version="1.0" encoding="utf-8"?>
-<p:sld xmlns:a="http://schemas.openxmlformats.org/drawingml/2006/main" xmlns:r="http://schemas.openxmlformats.org/officeDocument/2006/relationships" xmlns:p="http://schemas.openxmlformats.org/presentationml/2006/main">
-  <p:cSld>
-    <p:spTree>
-      <p:nvGrpSpPr>
-        <p:cNvPr id="1" name=""/>
-        <p:cNvGrpSpPr/>
-        <p:nvPr/>
-      </p:nvGrpSpPr>
-      <p:grpSpPr>
-        <a:xfrm>
-          <a:off x="0" y="0"/>
-          <a:ext cx="0" cy="0"/>
-          <a:chOff x="0" y="0"/>
-          <a:chExt cx="0" cy="0"/>
-        </a:xfrm>
-      </p:grpSpPr>
-      <p:sp>
-        <p:nvSpPr>
-          <p:cNvPr id="2" name="Title 1">
-            <a:extLst>
-              <a:ext uri="{FF2B5EF4-FFF2-40B4-BE49-F238E27FC236}">
-                <a16:creationId xmlns:a16="http://schemas.microsoft.com/office/drawing/2014/main" id="{8BD7D3E7-9741-CEF8-099C-8CCC1D2A1C22}"/>
-              </a:ext>
-            </a:extLst>
-          </p:cNvPr>
-          <p:cNvSpPr>
-            <a:spLocks noGrp="1"/>
-          </p:cNvSpPr>
-          <p:nvPr>
-            <p:ph type="title"/>
-          </p:nvPr>
-        </p:nvSpPr>
-        <p:spPr/>
-        <p:txBody>
-          <a:bodyPr/>
-          <a:lstStyle/>
-          <a:p>
-            <a:r>
-              <a:rPr lang="en-US" dirty="0"/>
-              <a:t>Min temps with </a:t>
-            </a:r>
-            <a:r>
-              <a:rPr lang="en-US" dirty="0" err="1"/>
-              <a:t>dataframes</a:t>
-            </a:r>
-            <a:r>
-              <a:rPr lang="en-US" dirty="0"/>
-              <a:t> &amp; Creating Schemas</a:t>
-            </a:r>
-          </a:p>
-        </p:txBody>
-      </p:sp>
-      <p:pic>
-        <p:nvPicPr>
-          <p:cNvPr id="5" name="Picture 4">
-            <a:extLst>
-              <a:ext uri="{FF2B5EF4-FFF2-40B4-BE49-F238E27FC236}">
-                <a16:creationId xmlns:a16="http://schemas.microsoft.com/office/drawing/2014/main" id="{617B9799-D077-D188-D08D-BCCCF7DEAEA7}"/>
-              </a:ext>
-            </a:extLst>
-          </p:cNvPr>
-          <p:cNvPicPr>
-            <a:picLocks noChangeAspect="1"/>
-          </p:cNvPicPr>
-          <p:nvPr/>
-        </p:nvPicPr>
-        <p:blipFill>
-          <a:blip r:embed="rId2"/>
-          <a:stretch>
-            <a:fillRect/>
-          </a:stretch>
-        </p:blipFill>
-        <p:spPr>
-          <a:xfrm>
-            <a:off x="682829" y="2104448"/>
-            <a:ext cx="7068536" cy="4515480"/>
-          </a:xfrm>
-          <a:prstGeom prst="rect">
-            <a:avLst/>
-          </a:prstGeom>
-        </p:spPr>
-      </p:pic>
-      <p:pic>
-        <p:nvPicPr>
-          <p:cNvPr id="7" name="Picture 6">
-            <a:extLst>
-              <a:ext uri="{FF2B5EF4-FFF2-40B4-BE49-F238E27FC236}">
-                <a16:creationId xmlns:a16="http://schemas.microsoft.com/office/drawing/2014/main" id="{611295C4-1FF8-EE1F-2DCB-40EE6809BA40}"/>
-              </a:ext>
-            </a:extLst>
-          </p:cNvPr>
-          <p:cNvPicPr>
-            <a:picLocks noChangeAspect="1"/>
-          </p:cNvPicPr>
-          <p:nvPr/>
-        </p:nvPicPr>
-        <p:blipFill>
-          <a:blip r:embed="rId3"/>
-          <a:stretch>
-            <a:fillRect/>
-          </a:stretch>
-        </p:blipFill>
-        <p:spPr>
-          <a:xfrm>
-            <a:off x="8384626" y="2577665"/>
-            <a:ext cx="2562583" cy="3105583"/>
-          </a:xfrm>
-          <a:prstGeom prst="rect">
-            <a:avLst/>
-          </a:prstGeom>
-        </p:spPr>
-      </p:pic>
-    </p:spTree>
-    <p:extLst>
-      <p:ext uri="{BB962C8B-B14F-4D97-AF65-F5344CB8AC3E}">
-        <p14:creationId xmlns:p14="http://schemas.microsoft.com/office/powerpoint/2010/main" val="2696853803"/>
-      </p:ext>
-    </p:extLst>
-  </p:cSld>
-  <p:clrMapOvr>
-    <a:masterClrMapping/>
-  </p:clrMapOvr>
-</p:sld>
-</file>
-
-<file path=ppt/slides/slide59.xml><?xml version="1.0" encoding="utf-8"?>
-<p:sld xmlns:a="http://schemas.openxmlformats.org/drawingml/2006/main" xmlns:r="http://schemas.openxmlformats.org/officeDocument/2006/relationships" xmlns:p="http://schemas.openxmlformats.org/presentationml/2006/main">
-  <p:cSld>
-    <p:spTree>
-      <p:nvGrpSpPr>
-        <p:cNvPr id="1" name="">
-          <a:extLst>
-            <a:ext uri="{FF2B5EF4-FFF2-40B4-BE49-F238E27FC236}">
-              <a16:creationId xmlns:a16="http://schemas.microsoft.com/office/drawing/2014/main" id="{25098FA7-9136-2259-23A8-17E40A036B80}"/>
-            </a:ext>
-          </a:extLst>
-        </p:cNvPr>
-        <p:cNvGrpSpPr/>
-        <p:nvPr/>
-      </p:nvGrpSpPr>
-      <p:grpSpPr>
-        <a:xfrm>
-          <a:off x="0" y="0"/>
-          <a:ext cx="0" cy="0"/>
-          <a:chOff x="0" y="0"/>
-          <a:chExt cx="0" cy="0"/>
-        </a:xfrm>
-      </p:grpSpPr>
-      <p:sp>
-        <p:nvSpPr>
-          <p:cNvPr id="2" name="Title 1">
-            <a:extLst>
-              <a:ext uri="{FF2B5EF4-FFF2-40B4-BE49-F238E27FC236}">
-                <a16:creationId xmlns:a16="http://schemas.microsoft.com/office/drawing/2014/main" id="{27E960FB-67D2-73E8-DEA5-91D3838997B1}"/>
-              </a:ext>
-            </a:extLst>
-          </p:cNvPr>
-          <p:cNvSpPr>
-            <a:spLocks noGrp="1"/>
-          </p:cNvSpPr>
-          <p:nvPr>
-            <p:ph type="title"/>
-          </p:nvPr>
-        </p:nvSpPr>
-        <p:spPr/>
-        <p:txBody>
-          <a:bodyPr/>
-          <a:lstStyle/>
-          <a:p>
-            <a:r>
-              <a:rPr lang="en-US" dirty="0"/>
-              <a:t>Challenge – Add up amount spent by customer Id</a:t>
-            </a:r>
-          </a:p>
-        </p:txBody>
-      </p:sp>
-      <p:sp>
-        <p:nvSpPr>
-          <p:cNvPr id="6" name="TextBox 5">
-            <a:extLst>
-              <a:ext uri="{FF2B5EF4-FFF2-40B4-BE49-F238E27FC236}">
-                <a16:creationId xmlns:a16="http://schemas.microsoft.com/office/drawing/2014/main" id="{77C6EFFC-06CB-03B5-6912-FE6B094F0001}"/>
-              </a:ext>
-            </a:extLst>
-          </p:cNvPr>
-          <p:cNvSpPr txBox="1"/>
-          <p:nvPr/>
-        </p:nvSpPr>
-        <p:spPr>
-          <a:xfrm>
-            <a:off x="1678652" y="2581539"/>
-            <a:ext cx="8834695" cy="923330"/>
-          </a:xfrm>
-          <a:prstGeom prst="rect">
-            <a:avLst/>
-          </a:prstGeom>
-          <a:noFill/>
-        </p:spPr>
-        <p:txBody>
-          <a:bodyPr wrap="square" rtlCol="0">
-            <a:spAutoFit/>
-          </a:bodyPr>
-          <a:lstStyle/>
-          <a:p>
-            <a:r>
-              <a:rPr lang="en-US" b="1" dirty="0"/>
-              <a:t>Goal:</a:t>
-            </a:r>
-          </a:p>
-          <a:p>
-            <a:r>
-              <a:rPr lang="en-US" b="1" dirty="0"/>
-              <a:t>Print the id for a customer and the total of all their orders from ‘customer-orders.csv’ in descending order</a:t>
-            </a:r>
-          </a:p>
-        </p:txBody>
-      </p:sp>
-      <p:pic>
-        <p:nvPicPr>
-          <p:cNvPr id="4" name="Picture 3">
-            <a:extLst>
-              <a:ext uri="{FF2B5EF4-FFF2-40B4-BE49-F238E27FC236}">
-                <a16:creationId xmlns:a16="http://schemas.microsoft.com/office/drawing/2014/main" id="{01C9962A-82E8-0604-4D87-F663D0152885}"/>
-              </a:ext>
-            </a:extLst>
-          </p:cNvPr>
-          <p:cNvPicPr>
-            <a:picLocks noChangeAspect="1"/>
-          </p:cNvPicPr>
-          <p:nvPr/>
-        </p:nvPicPr>
-        <p:blipFill>
-          <a:blip r:embed="rId2"/>
-          <a:stretch>
-            <a:fillRect/>
-          </a:stretch>
-        </p:blipFill>
-        <p:spPr>
-          <a:xfrm>
-            <a:off x="2617208" y="4698316"/>
-            <a:ext cx="6744641" cy="1457528"/>
-          </a:xfrm>
-          <a:prstGeom prst="rect">
-            <a:avLst/>
-          </a:prstGeom>
-        </p:spPr>
-      </p:pic>
-      <p:sp>
-        <p:nvSpPr>
-          <p:cNvPr id="5" name="TextBox 4">
-            <a:extLst>
-              <a:ext uri="{FF2B5EF4-FFF2-40B4-BE49-F238E27FC236}">
-                <a16:creationId xmlns:a16="http://schemas.microsoft.com/office/drawing/2014/main" id="{6A47D057-9241-F9E7-E8F2-C5FEF26A7C3D}"/>
-              </a:ext>
-            </a:extLst>
-          </p:cNvPr>
-          <p:cNvSpPr txBox="1"/>
-          <p:nvPr/>
-        </p:nvSpPr>
-        <p:spPr>
-          <a:xfrm>
-            <a:off x="1603331" y="4283901"/>
-            <a:ext cx="3010183" cy="369332"/>
-          </a:xfrm>
-          <a:prstGeom prst="rect">
-            <a:avLst/>
-          </a:prstGeom>
-          <a:noFill/>
-        </p:spPr>
-        <p:txBody>
-          <a:bodyPr wrap="none" rtlCol="0">
-            <a:spAutoFit/>
-          </a:bodyPr>
-          <a:lstStyle/>
-          <a:p>
-            <a:r>
-              <a:rPr lang="en-US" dirty="0" err="1"/>
-              <a:t>CustomerId</a:t>
-            </a:r>
-            <a:r>
-              <a:rPr lang="en-US" dirty="0"/>
-              <a:t>, </a:t>
-            </a:r>
-            <a:r>
-              <a:rPr lang="en-US" dirty="0" err="1"/>
-              <a:t>OrderId</a:t>
-            </a:r>
-            <a:r>
-              <a:rPr lang="en-US" dirty="0"/>
-              <a:t>, Amount</a:t>
-            </a:r>
-          </a:p>
-        </p:txBody>
-      </p:sp>
-      <p:sp>
-        <p:nvSpPr>
-          <p:cNvPr id="7" name="TextBox 6">
-            <a:extLst>
-              <a:ext uri="{FF2B5EF4-FFF2-40B4-BE49-F238E27FC236}">
-                <a16:creationId xmlns:a16="http://schemas.microsoft.com/office/drawing/2014/main" id="{D278448A-CE08-538E-E166-BA2A3E957178}"/>
-              </a:ext>
-            </a:extLst>
-          </p:cNvPr>
-          <p:cNvSpPr txBox="1"/>
-          <p:nvPr/>
-        </p:nvSpPr>
-        <p:spPr>
-          <a:xfrm>
-            <a:off x="6258838" y="4328984"/>
-            <a:ext cx="4959435" cy="369332"/>
-          </a:xfrm>
-          <a:prstGeom prst="rect">
-            <a:avLst/>
-          </a:prstGeom>
-          <a:noFill/>
-        </p:spPr>
-        <p:txBody>
-          <a:bodyPr wrap="none" rtlCol="0">
-            <a:spAutoFit/>
-          </a:bodyPr>
-          <a:lstStyle/>
-          <a:p>
-            <a:r>
-              <a:rPr lang="en-US" dirty="0"/>
-              <a:t>(yeah this isn’t sorted like it’s asking for in the goal)</a:t>
-            </a:r>
-          </a:p>
-        </p:txBody>
-      </p:sp>
-    </p:spTree>
-    <p:extLst>
-      <p:ext uri="{BB962C8B-B14F-4D97-AF65-F5344CB8AC3E}">
-        <p14:creationId xmlns:p14="http://schemas.microsoft.com/office/powerpoint/2010/main" val="1623539309"/>
       </p:ext>
     </p:extLst>
   </p:cSld>
@@ -17291,6 +17662,610 @@
           <p:cNvPr id="2" name="Title 1">
             <a:extLst>
               <a:ext uri="{FF2B5EF4-FFF2-40B4-BE49-F238E27FC236}">
+                <a16:creationId xmlns:a16="http://schemas.microsoft.com/office/drawing/2014/main" id="{87AA6410-08E4-FA57-04A7-79862F40A49C}"/>
+              </a:ext>
+            </a:extLst>
+          </p:cNvPr>
+          <p:cNvSpPr>
+            <a:spLocks noGrp="1"/>
+          </p:cNvSpPr>
+          <p:nvPr>
+            <p:ph type="title"/>
+          </p:nvPr>
+        </p:nvSpPr>
+        <p:spPr/>
+        <p:txBody>
+          <a:bodyPr/>
+          <a:lstStyle/>
+          <a:p>
+            <a:r>
+              <a:rPr lang="en-US" dirty="0"/>
+              <a:t>Word Count With </a:t>
+            </a:r>
+            <a:r>
+              <a:rPr lang="en-US" dirty="0" err="1"/>
+              <a:t>dataframes</a:t>
+            </a:r>
+            <a:endParaRPr lang="en-US" dirty="0"/>
+          </a:p>
+        </p:txBody>
+      </p:sp>
+      <p:pic>
+        <p:nvPicPr>
+          <p:cNvPr id="5" name="Content Placeholder 4">
+            <a:extLst>
+              <a:ext uri="{FF2B5EF4-FFF2-40B4-BE49-F238E27FC236}">
+                <a16:creationId xmlns:a16="http://schemas.microsoft.com/office/drawing/2014/main" id="{B0BFAABC-BFC1-1BA9-9F84-52E48037CE18}"/>
+              </a:ext>
+            </a:extLst>
+          </p:cNvPr>
+          <p:cNvPicPr>
+            <a:picLocks noGrp="1" noChangeAspect="1"/>
+          </p:cNvPicPr>
+          <p:nvPr>
+            <p:ph idx="1"/>
+          </p:nvPr>
+        </p:nvPicPr>
+        <p:blipFill>
+          <a:blip r:embed="rId2"/>
+          <a:stretch>
+            <a:fillRect/>
+          </a:stretch>
+        </p:blipFill>
+        <p:spPr>
+          <a:xfrm>
+            <a:off x="1075374" y="2709625"/>
+            <a:ext cx="6544588" cy="2753109"/>
+          </a:xfrm>
+          <a:prstGeom prst="rect">
+            <a:avLst/>
+          </a:prstGeom>
+        </p:spPr>
+      </p:pic>
+      <p:pic>
+        <p:nvPicPr>
+          <p:cNvPr id="7" name="Picture 6">
+            <a:extLst>
+              <a:ext uri="{FF2B5EF4-FFF2-40B4-BE49-F238E27FC236}">
+                <a16:creationId xmlns:a16="http://schemas.microsoft.com/office/drawing/2014/main" id="{2B006710-9C66-AAF5-DD12-C0E9DA8570D8}"/>
+              </a:ext>
+            </a:extLst>
+          </p:cNvPr>
+          <p:cNvPicPr>
+            <a:picLocks noChangeAspect="1"/>
+          </p:cNvPicPr>
+          <p:nvPr/>
+        </p:nvPicPr>
+        <p:blipFill>
+          <a:blip r:embed="rId3"/>
+          <a:stretch>
+            <a:fillRect/>
+          </a:stretch>
+        </p:blipFill>
+        <p:spPr>
+          <a:xfrm>
+            <a:off x="8456978" y="3194269"/>
+            <a:ext cx="1686160" cy="1581371"/>
+          </a:xfrm>
+          <a:prstGeom prst="rect">
+            <a:avLst/>
+          </a:prstGeom>
+        </p:spPr>
+      </p:pic>
+    </p:spTree>
+    <p:extLst>
+      <p:ext uri="{BB962C8B-B14F-4D97-AF65-F5344CB8AC3E}">
+        <p14:creationId xmlns:p14="http://schemas.microsoft.com/office/powerpoint/2010/main" val="2013019381"/>
+      </p:ext>
+    </p:extLst>
+  </p:cSld>
+  <p:clrMapOvr>
+    <a:masterClrMapping/>
+  </p:clrMapOvr>
+</p:sld>
+</file>
+
+<file path=ppt/slides/slide61.xml><?xml version="1.0" encoding="utf-8"?>
+<p:sld xmlns:a="http://schemas.openxmlformats.org/drawingml/2006/main" xmlns:r="http://schemas.openxmlformats.org/officeDocument/2006/relationships" xmlns:p="http://schemas.openxmlformats.org/presentationml/2006/main">
+  <p:cSld>
+    <p:spTree>
+      <p:nvGrpSpPr>
+        <p:cNvPr id="1" name=""/>
+        <p:cNvGrpSpPr/>
+        <p:nvPr/>
+      </p:nvGrpSpPr>
+      <p:grpSpPr>
+        <a:xfrm>
+          <a:off x="0" y="0"/>
+          <a:ext cx="0" cy="0"/>
+          <a:chOff x="0" y="0"/>
+          <a:chExt cx="0" cy="0"/>
+        </a:xfrm>
+      </p:grpSpPr>
+      <p:sp>
+        <p:nvSpPr>
+          <p:cNvPr id="2" name="Title 1">
+            <a:extLst>
+              <a:ext uri="{FF2B5EF4-FFF2-40B4-BE49-F238E27FC236}">
+                <a16:creationId xmlns:a16="http://schemas.microsoft.com/office/drawing/2014/main" id="{941C00C0-BAF5-9D21-0914-60F749260E32}"/>
+              </a:ext>
+            </a:extLst>
+          </p:cNvPr>
+          <p:cNvSpPr>
+            <a:spLocks noGrp="1"/>
+          </p:cNvSpPr>
+          <p:nvPr>
+            <p:ph type="title"/>
+          </p:nvPr>
+        </p:nvSpPr>
+        <p:spPr/>
+        <p:txBody>
+          <a:bodyPr/>
+          <a:lstStyle/>
+          <a:p>
+            <a:r>
+              <a:rPr lang="en-US" dirty="0"/>
+              <a:t>We can use both RDD and </a:t>
+            </a:r>
+            <a:r>
+              <a:rPr lang="en-US" dirty="0" err="1"/>
+              <a:t>DataFrames</a:t>
+            </a:r>
+            <a:endParaRPr lang="en-US" dirty="0"/>
+          </a:p>
+        </p:txBody>
+      </p:sp>
+      <p:sp>
+        <p:nvSpPr>
+          <p:cNvPr id="3" name="Content Placeholder 2">
+            <a:extLst>
+              <a:ext uri="{FF2B5EF4-FFF2-40B4-BE49-F238E27FC236}">
+                <a16:creationId xmlns:a16="http://schemas.microsoft.com/office/drawing/2014/main" id="{71F2181D-C80B-A29F-D7DE-FE91B0595A01}"/>
+              </a:ext>
+            </a:extLst>
+          </p:cNvPr>
+          <p:cNvSpPr>
+            <a:spLocks noGrp="1"/>
+          </p:cNvSpPr>
+          <p:nvPr>
+            <p:ph idx="1"/>
+          </p:nvPr>
+        </p:nvSpPr>
+        <p:spPr/>
+        <p:txBody>
+          <a:bodyPr/>
+          <a:lstStyle/>
+          <a:p>
+            <a:r>
+              <a:rPr lang="en-US" dirty="0"/>
+              <a:t>RDDs are still around for a reason</a:t>
+            </a:r>
+          </a:p>
+          <a:p>
+            <a:r>
+              <a:rPr lang="en-US" dirty="0"/>
+              <a:t>As you have seen, we can use both </a:t>
+            </a:r>
+            <a:r>
+              <a:rPr lang="en-US" dirty="0" err="1"/>
+              <a:t>DataFrames</a:t>
+            </a:r>
+            <a:r>
+              <a:rPr lang="en-US" dirty="0"/>
+              <a:t> and RDDs for solutions</a:t>
+            </a:r>
+          </a:p>
+          <a:p>
+            <a:r>
+              <a:rPr lang="en-US" dirty="0"/>
+              <a:t>Use the tool best suited for the task</a:t>
+            </a:r>
+          </a:p>
+          <a:p>
+            <a:pPr lvl="1"/>
+            <a:r>
+              <a:rPr lang="en-US" dirty="0"/>
+              <a:t>SQL style problem? </a:t>
+            </a:r>
+            <a:r>
+              <a:rPr lang="en-US" dirty="0" err="1"/>
+              <a:t>DataFrames</a:t>
+            </a:r>
+            <a:endParaRPr lang="en-US" dirty="0"/>
+          </a:p>
+          <a:p>
+            <a:pPr lvl="1"/>
+            <a:r>
+              <a:rPr lang="en-US" dirty="0"/>
+              <a:t>Map or Reduce type operations? RDD</a:t>
+            </a:r>
+          </a:p>
+          <a:p>
+            <a:r>
+              <a:rPr lang="en-US" dirty="0"/>
+              <a:t>We can convert between the two, as we have seen</a:t>
+            </a:r>
+          </a:p>
+        </p:txBody>
+      </p:sp>
+    </p:spTree>
+    <p:extLst>
+      <p:ext uri="{BB962C8B-B14F-4D97-AF65-F5344CB8AC3E}">
+        <p14:creationId xmlns:p14="http://schemas.microsoft.com/office/powerpoint/2010/main" val="130508592"/>
+      </p:ext>
+    </p:extLst>
+  </p:cSld>
+  <p:clrMapOvr>
+    <a:masterClrMapping/>
+  </p:clrMapOvr>
+</p:sld>
+</file>
+
+<file path=ppt/slides/slide62.xml><?xml version="1.0" encoding="utf-8"?>
+<p:sld xmlns:a="http://schemas.openxmlformats.org/drawingml/2006/main" xmlns:r="http://schemas.openxmlformats.org/officeDocument/2006/relationships" xmlns:p="http://schemas.openxmlformats.org/presentationml/2006/main">
+  <p:cSld>
+    <p:spTree>
+      <p:nvGrpSpPr>
+        <p:cNvPr id="1" name=""/>
+        <p:cNvGrpSpPr/>
+        <p:nvPr/>
+      </p:nvGrpSpPr>
+      <p:grpSpPr>
+        <a:xfrm>
+          <a:off x="0" y="0"/>
+          <a:ext cx="0" cy="0"/>
+          <a:chOff x="0" y="0"/>
+          <a:chExt cx="0" cy="0"/>
+        </a:xfrm>
+      </p:grpSpPr>
+      <p:sp>
+        <p:nvSpPr>
+          <p:cNvPr id="2" name="Title 1">
+            <a:extLst>
+              <a:ext uri="{FF2B5EF4-FFF2-40B4-BE49-F238E27FC236}">
+                <a16:creationId xmlns:a16="http://schemas.microsoft.com/office/drawing/2014/main" id="{8BD7D3E7-9741-CEF8-099C-8CCC1D2A1C22}"/>
+              </a:ext>
+            </a:extLst>
+          </p:cNvPr>
+          <p:cNvSpPr>
+            <a:spLocks noGrp="1"/>
+          </p:cNvSpPr>
+          <p:nvPr>
+            <p:ph type="title"/>
+          </p:nvPr>
+        </p:nvSpPr>
+        <p:spPr/>
+        <p:txBody>
+          <a:bodyPr/>
+          <a:lstStyle/>
+          <a:p>
+            <a:r>
+              <a:rPr lang="en-US" dirty="0"/>
+              <a:t>Min temps with </a:t>
+            </a:r>
+            <a:r>
+              <a:rPr lang="en-US" dirty="0" err="1"/>
+              <a:t>dataframes</a:t>
+            </a:r>
+            <a:r>
+              <a:rPr lang="en-US" dirty="0"/>
+              <a:t> &amp; Creating Schemas</a:t>
+            </a:r>
+          </a:p>
+        </p:txBody>
+      </p:sp>
+      <p:pic>
+        <p:nvPicPr>
+          <p:cNvPr id="5" name="Picture 4">
+            <a:extLst>
+              <a:ext uri="{FF2B5EF4-FFF2-40B4-BE49-F238E27FC236}">
+                <a16:creationId xmlns:a16="http://schemas.microsoft.com/office/drawing/2014/main" id="{617B9799-D077-D188-D08D-BCCCF7DEAEA7}"/>
+              </a:ext>
+            </a:extLst>
+          </p:cNvPr>
+          <p:cNvPicPr>
+            <a:picLocks noChangeAspect="1"/>
+          </p:cNvPicPr>
+          <p:nvPr/>
+        </p:nvPicPr>
+        <p:blipFill>
+          <a:blip r:embed="rId2"/>
+          <a:stretch>
+            <a:fillRect/>
+          </a:stretch>
+        </p:blipFill>
+        <p:spPr>
+          <a:xfrm>
+            <a:off x="682829" y="2104448"/>
+            <a:ext cx="7068536" cy="4515480"/>
+          </a:xfrm>
+          <a:prstGeom prst="rect">
+            <a:avLst/>
+          </a:prstGeom>
+        </p:spPr>
+      </p:pic>
+      <p:pic>
+        <p:nvPicPr>
+          <p:cNvPr id="7" name="Picture 6">
+            <a:extLst>
+              <a:ext uri="{FF2B5EF4-FFF2-40B4-BE49-F238E27FC236}">
+                <a16:creationId xmlns:a16="http://schemas.microsoft.com/office/drawing/2014/main" id="{611295C4-1FF8-EE1F-2DCB-40EE6809BA40}"/>
+              </a:ext>
+            </a:extLst>
+          </p:cNvPr>
+          <p:cNvPicPr>
+            <a:picLocks noChangeAspect="1"/>
+          </p:cNvPicPr>
+          <p:nvPr/>
+        </p:nvPicPr>
+        <p:blipFill>
+          <a:blip r:embed="rId3"/>
+          <a:stretch>
+            <a:fillRect/>
+          </a:stretch>
+        </p:blipFill>
+        <p:spPr>
+          <a:xfrm>
+            <a:off x="8384626" y="2577665"/>
+            <a:ext cx="2562583" cy="3105583"/>
+          </a:xfrm>
+          <a:prstGeom prst="rect">
+            <a:avLst/>
+          </a:prstGeom>
+        </p:spPr>
+      </p:pic>
+    </p:spTree>
+    <p:extLst>
+      <p:ext uri="{BB962C8B-B14F-4D97-AF65-F5344CB8AC3E}">
+        <p14:creationId xmlns:p14="http://schemas.microsoft.com/office/powerpoint/2010/main" val="2696853803"/>
+      </p:ext>
+    </p:extLst>
+  </p:cSld>
+  <p:clrMapOvr>
+    <a:masterClrMapping/>
+  </p:clrMapOvr>
+</p:sld>
+</file>
+
+<file path=ppt/slides/slide63.xml><?xml version="1.0" encoding="utf-8"?>
+<p:sld xmlns:a="http://schemas.openxmlformats.org/drawingml/2006/main" xmlns:r="http://schemas.openxmlformats.org/officeDocument/2006/relationships" xmlns:p="http://schemas.openxmlformats.org/presentationml/2006/main">
+  <p:cSld>
+    <p:spTree>
+      <p:nvGrpSpPr>
+        <p:cNvPr id="1" name="">
+          <a:extLst>
+            <a:ext uri="{FF2B5EF4-FFF2-40B4-BE49-F238E27FC236}">
+              <a16:creationId xmlns:a16="http://schemas.microsoft.com/office/drawing/2014/main" id="{25098FA7-9136-2259-23A8-17E40A036B80}"/>
+            </a:ext>
+          </a:extLst>
+        </p:cNvPr>
+        <p:cNvGrpSpPr/>
+        <p:nvPr/>
+      </p:nvGrpSpPr>
+      <p:grpSpPr>
+        <a:xfrm>
+          <a:off x="0" y="0"/>
+          <a:ext cx="0" cy="0"/>
+          <a:chOff x="0" y="0"/>
+          <a:chExt cx="0" cy="0"/>
+        </a:xfrm>
+      </p:grpSpPr>
+      <p:sp>
+        <p:nvSpPr>
+          <p:cNvPr id="2" name="Title 1">
+            <a:extLst>
+              <a:ext uri="{FF2B5EF4-FFF2-40B4-BE49-F238E27FC236}">
+                <a16:creationId xmlns:a16="http://schemas.microsoft.com/office/drawing/2014/main" id="{27E960FB-67D2-73E8-DEA5-91D3838997B1}"/>
+              </a:ext>
+            </a:extLst>
+          </p:cNvPr>
+          <p:cNvSpPr>
+            <a:spLocks noGrp="1"/>
+          </p:cNvSpPr>
+          <p:nvPr>
+            <p:ph type="title"/>
+          </p:nvPr>
+        </p:nvSpPr>
+        <p:spPr/>
+        <p:txBody>
+          <a:bodyPr/>
+          <a:lstStyle/>
+          <a:p>
+            <a:r>
+              <a:rPr lang="en-US" dirty="0"/>
+              <a:t>Challenge – Add up amount spent by customer Id</a:t>
+            </a:r>
+          </a:p>
+        </p:txBody>
+      </p:sp>
+      <p:sp>
+        <p:nvSpPr>
+          <p:cNvPr id="6" name="TextBox 5">
+            <a:extLst>
+              <a:ext uri="{FF2B5EF4-FFF2-40B4-BE49-F238E27FC236}">
+                <a16:creationId xmlns:a16="http://schemas.microsoft.com/office/drawing/2014/main" id="{77C6EFFC-06CB-03B5-6912-FE6B094F0001}"/>
+              </a:ext>
+            </a:extLst>
+          </p:cNvPr>
+          <p:cNvSpPr txBox="1"/>
+          <p:nvPr/>
+        </p:nvSpPr>
+        <p:spPr>
+          <a:xfrm>
+            <a:off x="1678652" y="2581539"/>
+            <a:ext cx="8834695" cy="923330"/>
+          </a:xfrm>
+          <a:prstGeom prst="rect">
+            <a:avLst/>
+          </a:prstGeom>
+          <a:noFill/>
+        </p:spPr>
+        <p:txBody>
+          <a:bodyPr wrap="square" rtlCol="0">
+            <a:spAutoFit/>
+          </a:bodyPr>
+          <a:lstStyle/>
+          <a:p>
+            <a:r>
+              <a:rPr lang="en-US" b="1" dirty="0"/>
+              <a:t>Goal:</a:t>
+            </a:r>
+          </a:p>
+          <a:p>
+            <a:r>
+              <a:rPr lang="en-US" b="1" dirty="0"/>
+              <a:t>Print the id for a customer and the total of all their orders from ‘customer-orders.csv’ in descending order</a:t>
+            </a:r>
+          </a:p>
+        </p:txBody>
+      </p:sp>
+      <p:pic>
+        <p:nvPicPr>
+          <p:cNvPr id="4" name="Picture 3">
+            <a:extLst>
+              <a:ext uri="{FF2B5EF4-FFF2-40B4-BE49-F238E27FC236}">
+                <a16:creationId xmlns:a16="http://schemas.microsoft.com/office/drawing/2014/main" id="{01C9962A-82E8-0604-4D87-F663D0152885}"/>
+              </a:ext>
+            </a:extLst>
+          </p:cNvPr>
+          <p:cNvPicPr>
+            <a:picLocks noChangeAspect="1"/>
+          </p:cNvPicPr>
+          <p:nvPr/>
+        </p:nvPicPr>
+        <p:blipFill>
+          <a:blip r:embed="rId2"/>
+          <a:stretch>
+            <a:fillRect/>
+          </a:stretch>
+        </p:blipFill>
+        <p:spPr>
+          <a:xfrm>
+            <a:off x="2617208" y="4698316"/>
+            <a:ext cx="6744641" cy="1457528"/>
+          </a:xfrm>
+          <a:prstGeom prst="rect">
+            <a:avLst/>
+          </a:prstGeom>
+        </p:spPr>
+      </p:pic>
+      <p:sp>
+        <p:nvSpPr>
+          <p:cNvPr id="5" name="TextBox 4">
+            <a:extLst>
+              <a:ext uri="{FF2B5EF4-FFF2-40B4-BE49-F238E27FC236}">
+                <a16:creationId xmlns:a16="http://schemas.microsoft.com/office/drawing/2014/main" id="{6A47D057-9241-F9E7-E8F2-C5FEF26A7C3D}"/>
+              </a:ext>
+            </a:extLst>
+          </p:cNvPr>
+          <p:cNvSpPr txBox="1"/>
+          <p:nvPr/>
+        </p:nvSpPr>
+        <p:spPr>
+          <a:xfrm>
+            <a:off x="1603331" y="4283901"/>
+            <a:ext cx="3010183" cy="369332"/>
+          </a:xfrm>
+          <a:prstGeom prst="rect">
+            <a:avLst/>
+          </a:prstGeom>
+          <a:noFill/>
+        </p:spPr>
+        <p:txBody>
+          <a:bodyPr wrap="none" rtlCol="0">
+            <a:spAutoFit/>
+          </a:bodyPr>
+          <a:lstStyle/>
+          <a:p>
+            <a:r>
+              <a:rPr lang="en-US" dirty="0" err="1"/>
+              <a:t>CustomerId</a:t>
+            </a:r>
+            <a:r>
+              <a:rPr lang="en-US" dirty="0"/>
+              <a:t>, </a:t>
+            </a:r>
+            <a:r>
+              <a:rPr lang="en-US" dirty="0" err="1"/>
+              <a:t>OrderId</a:t>
+            </a:r>
+            <a:r>
+              <a:rPr lang="en-US" dirty="0"/>
+              <a:t>, Amount</a:t>
+            </a:r>
+          </a:p>
+        </p:txBody>
+      </p:sp>
+      <p:sp>
+        <p:nvSpPr>
+          <p:cNvPr id="7" name="TextBox 6">
+            <a:extLst>
+              <a:ext uri="{FF2B5EF4-FFF2-40B4-BE49-F238E27FC236}">
+                <a16:creationId xmlns:a16="http://schemas.microsoft.com/office/drawing/2014/main" id="{D278448A-CE08-538E-E166-BA2A3E957178}"/>
+              </a:ext>
+            </a:extLst>
+          </p:cNvPr>
+          <p:cNvSpPr txBox="1"/>
+          <p:nvPr/>
+        </p:nvSpPr>
+        <p:spPr>
+          <a:xfrm>
+            <a:off x="6258838" y="4328984"/>
+            <a:ext cx="4959435" cy="369332"/>
+          </a:xfrm>
+          <a:prstGeom prst="rect">
+            <a:avLst/>
+          </a:prstGeom>
+          <a:noFill/>
+        </p:spPr>
+        <p:txBody>
+          <a:bodyPr wrap="none" rtlCol="0">
+            <a:spAutoFit/>
+          </a:bodyPr>
+          <a:lstStyle/>
+          <a:p>
+            <a:r>
+              <a:rPr lang="en-US" dirty="0"/>
+              <a:t>(yeah this isn’t sorted like it’s asking for in the goal)</a:t>
+            </a:r>
+          </a:p>
+        </p:txBody>
+      </p:sp>
+    </p:spTree>
+    <p:extLst>
+      <p:ext uri="{BB962C8B-B14F-4D97-AF65-F5344CB8AC3E}">
+        <p14:creationId xmlns:p14="http://schemas.microsoft.com/office/powerpoint/2010/main" val="1623539309"/>
+      </p:ext>
+    </p:extLst>
+  </p:cSld>
+  <p:clrMapOvr>
+    <a:masterClrMapping/>
+  </p:clrMapOvr>
+</p:sld>
+</file>
+
+<file path=ppt/slides/slide64.xml><?xml version="1.0" encoding="utf-8"?>
+<p:sld xmlns:a="http://schemas.openxmlformats.org/drawingml/2006/main" xmlns:r="http://schemas.openxmlformats.org/officeDocument/2006/relationships" xmlns:p="http://schemas.openxmlformats.org/presentationml/2006/main">
+  <p:cSld>
+    <p:spTree>
+      <p:nvGrpSpPr>
+        <p:cNvPr id="1" name=""/>
+        <p:cNvGrpSpPr/>
+        <p:nvPr/>
+      </p:nvGrpSpPr>
+      <p:grpSpPr>
+        <a:xfrm>
+          <a:off x="0" y="0"/>
+          <a:ext cx="0" cy="0"/>
+          <a:chOff x="0" y="0"/>
+          <a:chExt cx="0" cy="0"/>
+        </a:xfrm>
+      </p:grpSpPr>
+      <p:sp>
+        <p:nvSpPr>
+          <p:cNvPr id="2" name="Title 1">
+            <a:extLst>
+              <a:ext uri="{FF2B5EF4-FFF2-40B4-BE49-F238E27FC236}">
                 <a16:creationId xmlns:a16="http://schemas.microsoft.com/office/drawing/2014/main" id="{4EE4F223-F516-7F84-D057-F63498A6C3E1}"/>
               </a:ext>
             </a:extLst>
@@ -17460,7 +18435,7 @@
 </p:sld>
 </file>
 
-<file path=ppt/slides/slide61.xml><?xml version="1.0" encoding="utf-8"?>
+<file path=ppt/slides/slide65.xml><?xml version="1.0" encoding="utf-8"?>
 <p:sld xmlns:a="http://schemas.openxmlformats.org/drawingml/2006/main" xmlns:r="http://schemas.openxmlformats.org/officeDocument/2006/relationships" xmlns:p="http://schemas.openxmlformats.org/presentationml/2006/main">
   <p:cSld>
     <p:spTree>
@@ -17548,7 +18523,7 @@
 </p:sld>
 </file>
 
-<file path=ppt/slides/slide62.xml><?xml version="1.0" encoding="utf-8"?>
+<file path=ppt/slides/slide66.xml><?xml version="1.0" encoding="utf-8"?>
 <p:sld xmlns:a="http://schemas.openxmlformats.org/drawingml/2006/main" xmlns:r="http://schemas.openxmlformats.org/officeDocument/2006/relationships" xmlns:p="http://schemas.openxmlformats.org/presentationml/2006/main">
   <p:cSld>
     <p:spTree>
@@ -17692,7 +18667,7 @@
 </p:sld>
 </file>
 
-<file path=ppt/slides/slide63.xml><?xml version="1.0" encoding="utf-8"?>
+<file path=ppt/slides/slide67.xml><?xml version="1.0" encoding="utf-8"?>
 <p:sld xmlns:a="http://schemas.openxmlformats.org/drawingml/2006/main" xmlns:r="http://schemas.openxmlformats.org/officeDocument/2006/relationships" xmlns:p="http://schemas.openxmlformats.org/presentationml/2006/main">
   <p:cSld>
     <p:spTree>
@@ -17836,7 +18811,7 @@
 </p:sld>
 </file>
 
-<file path=ppt/slides/slide64.xml><?xml version="1.0" encoding="utf-8"?>
+<file path=ppt/slides/slide68.xml><?xml version="1.0" encoding="utf-8"?>
 <p:sld xmlns:a="http://schemas.openxmlformats.org/drawingml/2006/main" xmlns:r="http://schemas.openxmlformats.org/officeDocument/2006/relationships" xmlns:p="http://schemas.openxmlformats.org/presentationml/2006/main">
   <p:cSld>
     <p:spTree>
@@ -18044,7 +19019,7 @@
 </p:sld>
 </file>
 
-<file path=ppt/slides/slide65.xml><?xml version="1.0" encoding="utf-8"?>
+<file path=ppt/slides/slide69.xml><?xml version="1.0" encoding="utf-8"?>
 <p:sld xmlns:a="http://schemas.openxmlformats.org/drawingml/2006/main" xmlns:r="http://schemas.openxmlformats.org/officeDocument/2006/relationships" xmlns:p="http://schemas.openxmlformats.org/presentationml/2006/main">
   <p:cSld>
     <p:spTree>
@@ -18257,615 +19232,6 @@
     <p:extLst>
       <p:ext uri="{BB962C8B-B14F-4D97-AF65-F5344CB8AC3E}">
         <p14:creationId xmlns:p14="http://schemas.microsoft.com/office/powerpoint/2010/main" val="3915511011"/>
-      </p:ext>
-    </p:extLst>
-  </p:cSld>
-  <p:clrMapOvr>
-    <a:masterClrMapping/>
-  </p:clrMapOvr>
-</p:sld>
-</file>
-
-<file path=ppt/slides/slide66.xml><?xml version="1.0" encoding="utf-8"?>
-<p:sld xmlns:a="http://schemas.openxmlformats.org/drawingml/2006/main" xmlns:r="http://schemas.openxmlformats.org/officeDocument/2006/relationships" xmlns:p="http://schemas.openxmlformats.org/presentationml/2006/main">
-  <p:cSld>
-    <p:spTree>
-      <p:nvGrpSpPr>
-        <p:cNvPr id="1" name="">
-          <a:extLst>
-            <a:ext uri="{FF2B5EF4-FFF2-40B4-BE49-F238E27FC236}">
-              <a16:creationId xmlns:a16="http://schemas.microsoft.com/office/drawing/2014/main" id="{BFA1DFE6-EC41-9B83-3B97-EF0C0A8B9646}"/>
-            </a:ext>
-          </a:extLst>
-        </p:cNvPr>
-        <p:cNvGrpSpPr/>
-        <p:nvPr/>
-      </p:nvGrpSpPr>
-      <p:grpSpPr>
-        <a:xfrm>
-          <a:off x="0" y="0"/>
-          <a:ext cx="0" cy="0"/>
-          <a:chOff x="0" y="0"/>
-          <a:chExt cx="0" cy="0"/>
-        </a:xfrm>
-      </p:grpSpPr>
-      <p:sp>
-        <p:nvSpPr>
-          <p:cNvPr id="2" name="Title 1">
-            <a:extLst>
-              <a:ext uri="{FF2B5EF4-FFF2-40B4-BE49-F238E27FC236}">
-                <a16:creationId xmlns:a16="http://schemas.microsoft.com/office/drawing/2014/main" id="{146194F0-9B57-428A-D045-F0E69F8D58F3}"/>
-              </a:ext>
-            </a:extLst>
-          </p:cNvPr>
-          <p:cNvSpPr>
-            <a:spLocks noGrp="1"/>
-          </p:cNvSpPr>
-          <p:nvPr>
-            <p:ph type="title"/>
-          </p:nvPr>
-        </p:nvSpPr>
-        <p:spPr/>
-        <p:txBody>
-          <a:bodyPr/>
-          <a:lstStyle/>
-          <a:p>
-            <a:r>
-              <a:rPr lang="en-US" dirty="0"/>
-              <a:t>Challenge – Find the most popular movies</a:t>
-            </a:r>
-          </a:p>
-        </p:txBody>
-      </p:sp>
-      <p:sp>
-        <p:nvSpPr>
-          <p:cNvPr id="6" name="TextBox 5">
-            <a:extLst>
-              <a:ext uri="{FF2B5EF4-FFF2-40B4-BE49-F238E27FC236}">
-                <a16:creationId xmlns:a16="http://schemas.microsoft.com/office/drawing/2014/main" id="{C5BC2CF7-6DFC-3ACE-4E19-53D74E1E120E}"/>
-              </a:ext>
-            </a:extLst>
-          </p:cNvPr>
-          <p:cNvSpPr txBox="1"/>
-          <p:nvPr/>
-        </p:nvSpPr>
-        <p:spPr>
-          <a:xfrm>
-            <a:off x="1871902" y="2421383"/>
-            <a:ext cx="7871943" cy="2862322"/>
-          </a:xfrm>
-          <a:prstGeom prst="rect">
-            <a:avLst/>
-          </a:prstGeom>
-          <a:noFill/>
-        </p:spPr>
-        <p:txBody>
-          <a:bodyPr wrap="square" rtlCol="0">
-            <a:spAutoFit/>
-          </a:bodyPr>
-          <a:lstStyle/>
-          <a:p>
-            <a:r>
-              <a:rPr lang="en-US" b="1" dirty="0"/>
-              <a:t>Goal:</a:t>
-            </a:r>
-          </a:p>
-          <a:p>
-            <a:r>
-              <a:rPr lang="en-US" b="1" dirty="0"/>
-              <a:t>Find the top 10 most popular movies in the ML-100k </a:t>
-            </a:r>
-            <a:r>
-              <a:rPr lang="en-US" b="1" dirty="0" err="1"/>
-              <a:t>movielens</a:t>
-            </a:r>
-            <a:r>
-              <a:rPr lang="en-US" b="1" dirty="0"/>
-              <a:t> dataset</a:t>
-            </a:r>
-          </a:p>
-          <a:p>
-            <a:endParaRPr lang="en-US" b="1" dirty="0"/>
-          </a:p>
-          <a:p>
-            <a:endParaRPr lang="en-US" b="1" dirty="0"/>
-          </a:p>
-          <a:p>
-            <a:r>
-              <a:rPr lang="en-US" b="1" dirty="0"/>
-              <a:t>Hint:</a:t>
-            </a:r>
-          </a:p>
-          <a:p>
-            <a:r>
-              <a:rPr lang="en-US" b="1" dirty="0"/>
-              <a:t>You will need a schema, and this file uses ‘Tab’ as separators, so we specify that as an option:</a:t>
-            </a:r>
-          </a:p>
-          <a:p>
-            <a:endParaRPr lang="en-US" b="1" dirty="0"/>
-          </a:p>
-          <a:p>
-            <a:endParaRPr lang="en-US" b="1" dirty="0"/>
-          </a:p>
-          <a:p>
-            <a:r>
-              <a:rPr lang="en-US" b="1" dirty="0"/>
-              <a:t>Only return 10 rows:</a:t>
-            </a:r>
-          </a:p>
-        </p:txBody>
-      </p:sp>
-      <p:pic>
-        <p:nvPicPr>
-          <p:cNvPr id="5" name="Picture 4">
-            <a:extLst>
-              <a:ext uri="{FF2B5EF4-FFF2-40B4-BE49-F238E27FC236}">
-                <a16:creationId xmlns:a16="http://schemas.microsoft.com/office/drawing/2014/main" id="{8E13AD36-802D-8A38-85BB-F389A014304C}"/>
-              </a:ext>
-            </a:extLst>
-          </p:cNvPr>
-          <p:cNvPicPr>
-            <a:picLocks noChangeAspect="1"/>
-          </p:cNvPicPr>
-          <p:nvPr/>
-        </p:nvPicPr>
-        <p:blipFill>
-          <a:blip r:embed="rId2"/>
-          <a:stretch>
-            <a:fillRect/>
-          </a:stretch>
-        </p:blipFill>
-        <p:spPr>
-          <a:xfrm>
-            <a:off x="1871903" y="4564325"/>
-            <a:ext cx="9573961" cy="314369"/>
-          </a:xfrm>
-          <a:prstGeom prst="rect">
-            <a:avLst/>
-          </a:prstGeom>
-        </p:spPr>
-      </p:pic>
-      <p:pic>
-        <p:nvPicPr>
-          <p:cNvPr id="9" name="Picture 8">
-            <a:extLst>
-              <a:ext uri="{FF2B5EF4-FFF2-40B4-BE49-F238E27FC236}">
-                <a16:creationId xmlns:a16="http://schemas.microsoft.com/office/drawing/2014/main" id="{D6FD6F72-A671-1812-6D2E-86993D464D57}"/>
-              </a:ext>
-            </a:extLst>
-          </p:cNvPr>
-          <p:cNvPicPr>
-            <a:picLocks noChangeAspect="1"/>
-          </p:cNvPicPr>
-          <p:nvPr/>
-        </p:nvPicPr>
-        <p:blipFill>
-          <a:blip r:embed="rId3"/>
-          <a:stretch>
-            <a:fillRect/>
-          </a:stretch>
-        </p:blipFill>
-        <p:spPr>
-          <a:xfrm>
-            <a:off x="1871902" y="5381971"/>
-            <a:ext cx="1971950" cy="333422"/>
-          </a:xfrm>
-          <a:prstGeom prst="rect">
-            <a:avLst/>
-          </a:prstGeom>
-        </p:spPr>
-      </p:pic>
-    </p:spTree>
-    <p:extLst>
-      <p:ext uri="{BB962C8B-B14F-4D97-AF65-F5344CB8AC3E}">
-        <p14:creationId xmlns:p14="http://schemas.microsoft.com/office/powerpoint/2010/main" val="3195309807"/>
-      </p:ext>
-    </p:extLst>
-  </p:cSld>
-  <p:clrMapOvr>
-    <a:masterClrMapping/>
-  </p:clrMapOvr>
-</p:sld>
-</file>
-
-<file path=ppt/slides/slide67.xml><?xml version="1.0" encoding="utf-8"?>
-<p:sld xmlns:a="http://schemas.openxmlformats.org/drawingml/2006/main" xmlns:r="http://schemas.openxmlformats.org/officeDocument/2006/relationships" xmlns:p="http://schemas.openxmlformats.org/presentationml/2006/main">
-  <p:cSld>
-    <p:spTree>
-      <p:nvGrpSpPr>
-        <p:cNvPr id="1" name=""/>
-        <p:cNvGrpSpPr/>
-        <p:nvPr/>
-      </p:nvGrpSpPr>
-      <p:grpSpPr>
-        <a:xfrm>
-          <a:off x="0" y="0"/>
-          <a:ext cx="0" cy="0"/>
-          <a:chOff x="0" y="0"/>
-          <a:chExt cx="0" cy="0"/>
-        </a:xfrm>
-      </p:grpSpPr>
-      <p:sp>
-        <p:nvSpPr>
-          <p:cNvPr id="2" name="Title 1">
-            <a:extLst>
-              <a:ext uri="{FF2B5EF4-FFF2-40B4-BE49-F238E27FC236}">
-                <a16:creationId xmlns:a16="http://schemas.microsoft.com/office/drawing/2014/main" id="{5EAC16B0-CD13-31C8-FEAC-821027A00099}"/>
-              </a:ext>
-            </a:extLst>
-          </p:cNvPr>
-          <p:cNvSpPr>
-            <a:spLocks noGrp="1"/>
-          </p:cNvSpPr>
-          <p:nvPr>
-            <p:ph type="title"/>
-          </p:nvPr>
-        </p:nvSpPr>
-        <p:spPr/>
-        <p:txBody>
-          <a:bodyPr/>
-          <a:lstStyle/>
-          <a:p>
-            <a:r>
-              <a:rPr lang="en-US" dirty="0"/>
-              <a:t>Broadcast Variables</a:t>
-            </a:r>
-          </a:p>
-        </p:txBody>
-      </p:sp>
-      <p:sp>
-        <p:nvSpPr>
-          <p:cNvPr id="3" name="Content Placeholder 2">
-            <a:extLst>
-              <a:ext uri="{FF2B5EF4-FFF2-40B4-BE49-F238E27FC236}">
-                <a16:creationId xmlns:a16="http://schemas.microsoft.com/office/drawing/2014/main" id="{D6BCB6FD-3981-3303-51F8-FA29661A6293}"/>
-              </a:ext>
-            </a:extLst>
-          </p:cNvPr>
-          <p:cNvSpPr>
-            <a:spLocks noGrp="1"/>
-          </p:cNvSpPr>
-          <p:nvPr>
-            <p:ph idx="1"/>
-          </p:nvPr>
-        </p:nvSpPr>
-        <p:spPr/>
-        <p:txBody>
-          <a:bodyPr/>
-          <a:lstStyle/>
-          <a:p>
-            <a:r>
-              <a:rPr lang="en-US" dirty="0"/>
-              <a:t>Allows us to broadcast objects to the executors, such that they’re always available</a:t>
-            </a:r>
-          </a:p>
-          <a:p>
-            <a:r>
-              <a:rPr lang="en-US" dirty="0"/>
-              <a:t>Just use </a:t>
-            </a:r>
-            <a:r>
-              <a:rPr lang="en-US" dirty="0" err="1"/>
-              <a:t>sc.broadcast</a:t>
-            </a:r>
-            <a:r>
-              <a:rPr lang="en-US" dirty="0"/>
-              <a:t>() to ship off whatever you want</a:t>
-            </a:r>
-          </a:p>
-          <a:p>
-            <a:r>
-              <a:rPr lang="en-US" dirty="0"/>
-              <a:t>Then use .value() to get the object back</a:t>
-            </a:r>
-          </a:p>
-          <a:p>
-            <a:r>
-              <a:rPr lang="en-US" dirty="0"/>
-              <a:t>Use the broadcasted object however you want – map functions, UDFs, etc. </a:t>
-            </a:r>
-          </a:p>
-        </p:txBody>
-      </p:sp>
-    </p:spTree>
-    <p:extLst>
-      <p:ext uri="{BB962C8B-B14F-4D97-AF65-F5344CB8AC3E}">
-        <p14:creationId xmlns:p14="http://schemas.microsoft.com/office/powerpoint/2010/main" val="1961410614"/>
-      </p:ext>
-    </p:extLst>
-  </p:cSld>
-  <p:clrMapOvr>
-    <a:masterClrMapping/>
-  </p:clrMapOvr>
-</p:sld>
-</file>
-
-<file path=ppt/slides/slide68.xml><?xml version="1.0" encoding="utf-8"?>
-<p:sld xmlns:a="http://schemas.openxmlformats.org/drawingml/2006/main" xmlns:r="http://schemas.openxmlformats.org/officeDocument/2006/relationships" xmlns:p="http://schemas.openxmlformats.org/presentationml/2006/main">
-  <p:cSld>
-    <p:spTree>
-      <p:nvGrpSpPr>
-        <p:cNvPr id="1" name=""/>
-        <p:cNvGrpSpPr/>
-        <p:nvPr/>
-      </p:nvGrpSpPr>
-      <p:grpSpPr>
-        <a:xfrm>
-          <a:off x="0" y="0"/>
-          <a:ext cx="0" cy="0"/>
-          <a:chOff x="0" y="0"/>
-          <a:chExt cx="0" cy="0"/>
-        </a:xfrm>
-      </p:grpSpPr>
-      <p:sp>
-        <p:nvSpPr>
-          <p:cNvPr id="2" name="Title 1">
-            <a:extLst>
-              <a:ext uri="{FF2B5EF4-FFF2-40B4-BE49-F238E27FC236}">
-                <a16:creationId xmlns:a16="http://schemas.microsoft.com/office/drawing/2014/main" id="{01A5672E-9362-A56A-B633-F98F1AE5E0FB}"/>
-              </a:ext>
-            </a:extLst>
-          </p:cNvPr>
-          <p:cNvSpPr>
-            <a:spLocks noGrp="1"/>
-          </p:cNvSpPr>
-          <p:nvPr>
-            <p:ph type="title"/>
-          </p:nvPr>
-        </p:nvSpPr>
-        <p:spPr/>
-        <p:txBody>
-          <a:bodyPr/>
-          <a:lstStyle/>
-          <a:p>
-            <a:r>
-              <a:rPr lang="en-US" dirty="0"/>
-              <a:t>Example – Top 10 movies with title</a:t>
-            </a:r>
-          </a:p>
-        </p:txBody>
-      </p:sp>
-      <p:sp>
-        <p:nvSpPr>
-          <p:cNvPr id="3" name="Content Placeholder 2">
-            <a:extLst>
-              <a:ext uri="{FF2B5EF4-FFF2-40B4-BE49-F238E27FC236}">
-                <a16:creationId xmlns:a16="http://schemas.microsoft.com/office/drawing/2014/main" id="{FC7D2CA0-D080-69E7-F1DF-EB583282AF1D}"/>
-              </a:ext>
-            </a:extLst>
-          </p:cNvPr>
-          <p:cNvSpPr>
-            <a:spLocks noGrp="1"/>
-          </p:cNvSpPr>
-          <p:nvPr>
-            <p:ph idx="1"/>
-          </p:nvPr>
-        </p:nvSpPr>
-        <p:spPr>
-          <a:xfrm>
-            <a:off x="581192" y="2180497"/>
-            <a:ext cx="11029615" cy="1520994"/>
-          </a:xfrm>
-        </p:spPr>
-        <p:txBody>
-          <a:bodyPr>
-            <a:normAutofit lnSpcReduction="10000"/>
-          </a:bodyPr>
-          <a:lstStyle/>
-          <a:p>
-            <a:r>
-              <a:rPr lang="en-US" dirty="0"/>
-              <a:t>Broadcast() – sends a dictionary to all executors</a:t>
-            </a:r>
-          </a:p>
-          <a:p>
-            <a:r>
-              <a:rPr lang="en-US" dirty="0"/>
-              <a:t>.value() – get the dictionary value back</a:t>
-            </a:r>
-          </a:p>
-          <a:p>
-            <a:r>
-              <a:rPr lang="en-US" dirty="0"/>
-              <a:t>See the provided example in our repo: ‘popular-movies-nice-dataframe.py’</a:t>
-            </a:r>
-          </a:p>
-          <a:p>
-            <a:r>
-              <a:rPr lang="en-US" dirty="0"/>
-              <a:t>This example is a bit contrived; we will talk about performance concerns after</a:t>
-            </a:r>
-          </a:p>
-        </p:txBody>
-      </p:sp>
-      <p:pic>
-        <p:nvPicPr>
-          <p:cNvPr id="5" name="Picture 4">
-            <a:extLst>
-              <a:ext uri="{FF2B5EF4-FFF2-40B4-BE49-F238E27FC236}">
-                <a16:creationId xmlns:a16="http://schemas.microsoft.com/office/drawing/2014/main" id="{615A9271-AC3C-E61F-ACEC-DC7E98313E87}"/>
-              </a:ext>
-            </a:extLst>
-          </p:cNvPr>
-          <p:cNvPicPr>
-            <a:picLocks noChangeAspect="1"/>
-          </p:cNvPicPr>
-          <p:nvPr/>
-        </p:nvPicPr>
-        <p:blipFill>
-          <a:blip r:embed="rId2"/>
-          <a:stretch>
-            <a:fillRect/>
-          </a:stretch>
-        </p:blipFill>
-        <p:spPr>
-          <a:xfrm>
-            <a:off x="3528654" y="4092143"/>
-            <a:ext cx="5134692" cy="371527"/>
-          </a:xfrm>
-          <a:prstGeom prst="rect">
-            <a:avLst/>
-          </a:prstGeom>
-        </p:spPr>
-      </p:pic>
-      <p:pic>
-        <p:nvPicPr>
-          <p:cNvPr id="9" name="Picture 8">
-            <a:extLst>
-              <a:ext uri="{FF2B5EF4-FFF2-40B4-BE49-F238E27FC236}">
-                <a16:creationId xmlns:a16="http://schemas.microsoft.com/office/drawing/2014/main" id="{B8D8D659-88B6-3DFE-F918-E4994D40D241}"/>
-              </a:ext>
-            </a:extLst>
-          </p:cNvPr>
-          <p:cNvPicPr>
-            <a:picLocks noChangeAspect="1"/>
-          </p:cNvPicPr>
-          <p:nvPr/>
-        </p:nvPicPr>
-        <p:blipFill>
-          <a:blip r:embed="rId3"/>
-          <a:stretch>
-            <a:fillRect/>
-          </a:stretch>
-        </p:blipFill>
-        <p:spPr>
-          <a:xfrm>
-            <a:off x="3904943" y="5234995"/>
-            <a:ext cx="4382112" cy="685896"/>
-          </a:xfrm>
-          <a:prstGeom prst="rect">
-            <a:avLst/>
-          </a:prstGeom>
-        </p:spPr>
-      </p:pic>
-    </p:spTree>
-    <p:extLst>
-      <p:ext uri="{BB962C8B-B14F-4D97-AF65-F5344CB8AC3E}">
-        <p14:creationId xmlns:p14="http://schemas.microsoft.com/office/powerpoint/2010/main" val="3651910382"/>
-      </p:ext>
-    </p:extLst>
-  </p:cSld>
-  <p:clrMapOvr>
-    <a:masterClrMapping/>
-  </p:clrMapOvr>
-</p:sld>
-</file>
-
-<file path=ppt/slides/slide69.xml><?xml version="1.0" encoding="utf-8"?>
-<p:sld xmlns:a="http://schemas.openxmlformats.org/drawingml/2006/main" xmlns:r="http://schemas.openxmlformats.org/officeDocument/2006/relationships" xmlns:p="http://schemas.openxmlformats.org/presentationml/2006/main">
-  <p:cSld>
-    <p:spTree>
-      <p:nvGrpSpPr>
-        <p:cNvPr id="1" name=""/>
-        <p:cNvGrpSpPr/>
-        <p:nvPr/>
-      </p:nvGrpSpPr>
-      <p:grpSpPr>
-        <a:xfrm>
-          <a:off x="0" y="0"/>
-          <a:ext cx="0" cy="0"/>
-          <a:chOff x="0" y="0"/>
-          <a:chExt cx="0" cy="0"/>
-        </a:xfrm>
-      </p:grpSpPr>
-      <p:sp>
-        <p:nvSpPr>
-          <p:cNvPr id="2" name="Title 1">
-            <a:extLst>
-              <a:ext uri="{FF2B5EF4-FFF2-40B4-BE49-F238E27FC236}">
-                <a16:creationId xmlns:a16="http://schemas.microsoft.com/office/drawing/2014/main" id="{5825FC87-F51A-4BFD-36B5-228FA5DAD3F8}"/>
-              </a:ext>
-            </a:extLst>
-          </p:cNvPr>
-          <p:cNvSpPr>
-            <a:spLocks noGrp="1"/>
-          </p:cNvSpPr>
-          <p:nvPr>
-            <p:ph type="title"/>
-          </p:nvPr>
-        </p:nvSpPr>
-        <p:spPr/>
-        <p:txBody>
-          <a:bodyPr/>
-          <a:lstStyle/>
-          <a:p>
-            <a:r>
-              <a:rPr lang="en-US" dirty="0"/>
-              <a:t>Example – top 10 movies with title (join)</a:t>
-            </a:r>
-          </a:p>
-        </p:txBody>
-      </p:sp>
-      <p:pic>
-        <p:nvPicPr>
-          <p:cNvPr id="5" name="Picture 4">
-            <a:extLst>
-              <a:ext uri="{FF2B5EF4-FFF2-40B4-BE49-F238E27FC236}">
-                <a16:creationId xmlns:a16="http://schemas.microsoft.com/office/drawing/2014/main" id="{8FF6217D-D09E-13F9-09E7-77C0CCFD3FBE}"/>
-              </a:ext>
-            </a:extLst>
-          </p:cNvPr>
-          <p:cNvPicPr>
-            <a:picLocks noChangeAspect="1"/>
-          </p:cNvPicPr>
-          <p:nvPr/>
-        </p:nvPicPr>
-        <p:blipFill>
-          <a:blip r:embed="rId2"/>
-          <a:stretch>
-            <a:fillRect/>
-          </a:stretch>
-        </p:blipFill>
-        <p:spPr>
-          <a:xfrm>
-            <a:off x="1838618" y="2004449"/>
-            <a:ext cx="5852031" cy="4664865"/>
-          </a:xfrm>
-          <a:prstGeom prst="rect">
-            <a:avLst/>
-          </a:prstGeom>
-        </p:spPr>
-      </p:pic>
-      <p:sp>
-        <p:nvSpPr>
-          <p:cNvPr id="6" name="TextBox 5">
-            <a:extLst>
-              <a:ext uri="{FF2B5EF4-FFF2-40B4-BE49-F238E27FC236}">
-                <a16:creationId xmlns:a16="http://schemas.microsoft.com/office/drawing/2014/main" id="{9A0D3B4F-D995-CB47-5AAF-D9602EE53272}"/>
-              </a:ext>
-            </a:extLst>
-          </p:cNvPr>
-          <p:cNvSpPr txBox="1"/>
-          <p:nvPr/>
-        </p:nvSpPr>
-        <p:spPr>
-          <a:xfrm>
-            <a:off x="8046720" y="3781959"/>
-            <a:ext cx="3408883" cy="646331"/>
-          </a:xfrm>
-          <a:prstGeom prst="rect">
-            <a:avLst/>
-          </a:prstGeom>
-          <a:noFill/>
-        </p:spPr>
-        <p:txBody>
-          <a:bodyPr wrap="square" rtlCol="0">
-            <a:spAutoFit/>
-          </a:bodyPr>
-          <a:lstStyle/>
-          <a:p>
-            <a:r>
-              <a:rPr lang="en-US" dirty="0"/>
-              <a:t>This approach would be preferred with larger datasets</a:t>
-            </a:r>
-          </a:p>
-        </p:txBody>
-      </p:sp>
-    </p:spTree>
-    <p:extLst>
-      <p:ext uri="{BB962C8B-B14F-4D97-AF65-F5344CB8AC3E}">
-        <p14:creationId xmlns:p14="http://schemas.microsoft.com/office/powerpoint/2010/main" val="1730508388"/>
       </p:ext>
     </p:extLst>
   </p:cSld>
@@ -19342,6 +19708,615 @@
   <p:cSld>
     <p:spTree>
       <p:nvGrpSpPr>
+        <p:cNvPr id="1" name="">
+          <a:extLst>
+            <a:ext uri="{FF2B5EF4-FFF2-40B4-BE49-F238E27FC236}">
+              <a16:creationId xmlns:a16="http://schemas.microsoft.com/office/drawing/2014/main" id="{BFA1DFE6-EC41-9B83-3B97-EF0C0A8B9646}"/>
+            </a:ext>
+          </a:extLst>
+        </p:cNvPr>
+        <p:cNvGrpSpPr/>
+        <p:nvPr/>
+      </p:nvGrpSpPr>
+      <p:grpSpPr>
+        <a:xfrm>
+          <a:off x="0" y="0"/>
+          <a:ext cx="0" cy="0"/>
+          <a:chOff x="0" y="0"/>
+          <a:chExt cx="0" cy="0"/>
+        </a:xfrm>
+      </p:grpSpPr>
+      <p:sp>
+        <p:nvSpPr>
+          <p:cNvPr id="2" name="Title 1">
+            <a:extLst>
+              <a:ext uri="{FF2B5EF4-FFF2-40B4-BE49-F238E27FC236}">
+                <a16:creationId xmlns:a16="http://schemas.microsoft.com/office/drawing/2014/main" id="{146194F0-9B57-428A-D045-F0E69F8D58F3}"/>
+              </a:ext>
+            </a:extLst>
+          </p:cNvPr>
+          <p:cNvSpPr>
+            <a:spLocks noGrp="1"/>
+          </p:cNvSpPr>
+          <p:nvPr>
+            <p:ph type="title"/>
+          </p:nvPr>
+        </p:nvSpPr>
+        <p:spPr/>
+        <p:txBody>
+          <a:bodyPr/>
+          <a:lstStyle/>
+          <a:p>
+            <a:r>
+              <a:rPr lang="en-US" dirty="0"/>
+              <a:t>Challenge – Find the most popular movies</a:t>
+            </a:r>
+          </a:p>
+        </p:txBody>
+      </p:sp>
+      <p:sp>
+        <p:nvSpPr>
+          <p:cNvPr id="6" name="TextBox 5">
+            <a:extLst>
+              <a:ext uri="{FF2B5EF4-FFF2-40B4-BE49-F238E27FC236}">
+                <a16:creationId xmlns:a16="http://schemas.microsoft.com/office/drawing/2014/main" id="{C5BC2CF7-6DFC-3ACE-4E19-53D74E1E120E}"/>
+              </a:ext>
+            </a:extLst>
+          </p:cNvPr>
+          <p:cNvSpPr txBox="1"/>
+          <p:nvPr/>
+        </p:nvSpPr>
+        <p:spPr>
+          <a:xfrm>
+            <a:off x="1871902" y="2421383"/>
+            <a:ext cx="7871943" cy="2862322"/>
+          </a:xfrm>
+          <a:prstGeom prst="rect">
+            <a:avLst/>
+          </a:prstGeom>
+          <a:noFill/>
+        </p:spPr>
+        <p:txBody>
+          <a:bodyPr wrap="square" rtlCol="0">
+            <a:spAutoFit/>
+          </a:bodyPr>
+          <a:lstStyle/>
+          <a:p>
+            <a:r>
+              <a:rPr lang="en-US" b="1" dirty="0"/>
+              <a:t>Goal:</a:t>
+            </a:r>
+          </a:p>
+          <a:p>
+            <a:r>
+              <a:rPr lang="en-US" b="1" dirty="0"/>
+              <a:t>Find the top 10 most popular movies in the ML-100k </a:t>
+            </a:r>
+            <a:r>
+              <a:rPr lang="en-US" b="1" dirty="0" err="1"/>
+              <a:t>movielens</a:t>
+            </a:r>
+            <a:r>
+              <a:rPr lang="en-US" b="1" dirty="0"/>
+              <a:t> dataset</a:t>
+            </a:r>
+          </a:p>
+          <a:p>
+            <a:endParaRPr lang="en-US" b="1" dirty="0"/>
+          </a:p>
+          <a:p>
+            <a:endParaRPr lang="en-US" b="1" dirty="0"/>
+          </a:p>
+          <a:p>
+            <a:r>
+              <a:rPr lang="en-US" b="1" dirty="0"/>
+              <a:t>Hint:</a:t>
+            </a:r>
+          </a:p>
+          <a:p>
+            <a:r>
+              <a:rPr lang="en-US" b="1" dirty="0"/>
+              <a:t>You will need a schema, and this file uses ‘Tab’ as separators, so we specify that as an option:</a:t>
+            </a:r>
+          </a:p>
+          <a:p>
+            <a:endParaRPr lang="en-US" b="1" dirty="0"/>
+          </a:p>
+          <a:p>
+            <a:endParaRPr lang="en-US" b="1" dirty="0"/>
+          </a:p>
+          <a:p>
+            <a:r>
+              <a:rPr lang="en-US" b="1" dirty="0"/>
+              <a:t>Only return 10 rows:</a:t>
+            </a:r>
+          </a:p>
+        </p:txBody>
+      </p:sp>
+      <p:pic>
+        <p:nvPicPr>
+          <p:cNvPr id="5" name="Picture 4">
+            <a:extLst>
+              <a:ext uri="{FF2B5EF4-FFF2-40B4-BE49-F238E27FC236}">
+                <a16:creationId xmlns:a16="http://schemas.microsoft.com/office/drawing/2014/main" id="{8E13AD36-802D-8A38-85BB-F389A014304C}"/>
+              </a:ext>
+            </a:extLst>
+          </p:cNvPr>
+          <p:cNvPicPr>
+            <a:picLocks noChangeAspect="1"/>
+          </p:cNvPicPr>
+          <p:nvPr/>
+        </p:nvPicPr>
+        <p:blipFill>
+          <a:blip r:embed="rId2"/>
+          <a:stretch>
+            <a:fillRect/>
+          </a:stretch>
+        </p:blipFill>
+        <p:spPr>
+          <a:xfrm>
+            <a:off x="1871903" y="4564325"/>
+            <a:ext cx="9573961" cy="314369"/>
+          </a:xfrm>
+          <a:prstGeom prst="rect">
+            <a:avLst/>
+          </a:prstGeom>
+        </p:spPr>
+      </p:pic>
+      <p:pic>
+        <p:nvPicPr>
+          <p:cNvPr id="9" name="Picture 8">
+            <a:extLst>
+              <a:ext uri="{FF2B5EF4-FFF2-40B4-BE49-F238E27FC236}">
+                <a16:creationId xmlns:a16="http://schemas.microsoft.com/office/drawing/2014/main" id="{D6FD6F72-A671-1812-6D2E-86993D464D57}"/>
+              </a:ext>
+            </a:extLst>
+          </p:cNvPr>
+          <p:cNvPicPr>
+            <a:picLocks noChangeAspect="1"/>
+          </p:cNvPicPr>
+          <p:nvPr/>
+        </p:nvPicPr>
+        <p:blipFill>
+          <a:blip r:embed="rId3"/>
+          <a:stretch>
+            <a:fillRect/>
+          </a:stretch>
+        </p:blipFill>
+        <p:spPr>
+          <a:xfrm>
+            <a:off x="1871902" y="5381971"/>
+            <a:ext cx="1971950" cy="333422"/>
+          </a:xfrm>
+          <a:prstGeom prst="rect">
+            <a:avLst/>
+          </a:prstGeom>
+        </p:spPr>
+      </p:pic>
+    </p:spTree>
+    <p:extLst>
+      <p:ext uri="{BB962C8B-B14F-4D97-AF65-F5344CB8AC3E}">
+        <p14:creationId xmlns:p14="http://schemas.microsoft.com/office/powerpoint/2010/main" val="3195309807"/>
+      </p:ext>
+    </p:extLst>
+  </p:cSld>
+  <p:clrMapOvr>
+    <a:masterClrMapping/>
+  </p:clrMapOvr>
+</p:sld>
+</file>
+
+<file path=ppt/slides/slide71.xml><?xml version="1.0" encoding="utf-8"?>
+<p:sld xmlns:a="http://schemas.openxmlformats.org/drawingml/2006/main" xmlns:r="http://schemas.openxmlformats.org/officeDocument/2006/relationships" xmlns:p="http://schemas.openxmlformats.org/presentationml/2006/main">
+  <p:cSld>
+    <p:spTree>
+      <p:nvGrpSpPr>
+        <p:cNvPr id="1" name=""/>
+        <p:cNvGrpSpPr/>
+        <p:nvPr/>
+      </p:nvGrpSpPr>
+      <p:grpSpPr>
+        <a:xfrm>
+          <a:off x="0" y="0"/>
+          <a:ext cx="0" cy="0"/>
+          <a:chOff x="0" y="0"/>
+          <a:chExt cx="0" cy="0"/>
+        </a:xfrm>
+      </p:grpSpPr>
+      <p:sp>
+        <p:nvSpPr>
+          <p:cNvPr id="2" name="Title 1">
+            <a:extLst>
+              <a:ext uri="{FF2B5EF4-FFF2-40B4-BE49-F238E27FC236}">
+                <a16:creationId xmlns:a16="http://schemas.microsoft.com/office/drawing/2014/main" id="{5EAC16B0-CD13-31C8-FEAC-821027A00099}"/>
+              </a:ext>
+            </a:extLst>
+          </p:cNvPr>
+          <p:cNvSpPr>
+            <a:spLocks noGrp="1"/>
+          </p:cNvSpPr>
+          <p:nvPr>
+            <p:ph type="title"/>
+          </p:nvPr>
+        </p:nvSpPr>
+        <p:spPr/>
+        <p:txBody>
+          <a:bodyPr/>
+          <a:lstStyle/>
+          <a:p>
+            <a:r>
+              <a:rPr lang="en-US" dirty="0"/>
+              <a:t>Broadcast Variables</a:t>
+            </a:r>
+          </a:p>
+        </p:txBody>
+      </p:sp>
+      <p:sp>
+        <p:nvSpPr>
+          <p:cNvPr id="3" name="Content Placeholder 2">
+            <a:extLst>
+              <a:ext uri="{FF2B5EF4-FFF2-40B4-BE49-F238E27FC236}">
+                <a16:creationId xmlns:a16="http://schemas.microsoft.com/office/drawing/2014/main" id="{D6BCB6FD-3981-3303-51F8-FA29661A6293}"/>
+              </a:ext>
+            </a:extLst>
+          </p:cNvPr>
+          <p:cNvSpPr>
+            <a:spLocks noGrp="1"/>
+          </p:cNvSpPr>
+          <p:nvPr>
+            <p:ph idx="1"/>
+          </p:nvPr>
+        </p:nvSpPr>
+        <p:spPr/>
+        <p:txBody>
+          <a:bodyPr/>
+          <a:lstStyle/>
+          <a:p>
+            <a:r>
+              <a:rPr lang="en-US" dirty="0"/>
+              <a:t>Allows us to broadcast objects to the executors, such that they’re always available</a:t>
+            </a:r>
+          </a:p>
+          <a:p>
+            <a:r>
+              <a:rPr lang="en-US" dirty="0"/>
+              <a:t>Just use </a:t>
+            </a:r>
+            <a:r>
+              <a:rPr lang="en-US" dirty="0" err="1"/>
+              <a:t>sc.broadcast</a:t>
+            </a:r>
+            <a:r>
+              <a:rPr lang="en-US" dirty="0"/>
+              <a:t>() to ship off whatever you want</a:t>
+            </a:r>
+          </a:p>
+          <a:p>
+            <a:r>
+              <a:rPr lang="en-US" dirty="0"/>
+              <a:t>Then use .value() to get the object back</a:t>
+            </a:r>
+          </a:p>
+          <a:p>
+            <a:r>
+              <a:rPr lang="en-US" dirty="0"/>
+              <a:t>Use the broadcasted object however you want – map functions, UDFs, etc. </a:t>
+            </a:r>
+          </a:p>
+        </p:txBody>
+      </p:sp>
+    </p:spTree>
+    <p:extLst>
+      <p:ext uri="{BB962C8B-B14F-4D97-AF65-F5344CB8AC3E}">
+        <p14:creationId xmlns:p14="http://schemas.microsoft.com/office/powerpoint/2010/main" val="1961410614"/>
+      </p:ext>
+    </p:extLst>
+  </p:cSld>
+  <p:clrMapOvr>
+    <a:masterClrMapping/>
+  </p:clrMapOvr>
+</p:sld>
+</file>
+
+<file path=ppt/slides/slide72.xml><?xml version="1.0" encoding="utf-8"?>
+<p:sld xmlns:a="http://schemas.openxmlformats.org/drawingml/2006/main" xmlns:r="http://schemas.openxmlformats.org/officeDocument/2006/relationships" xmlns:p="http://schemas.openxmlformats.org/presentationml/2006/main">
+  <p:cSld>
+    <p:spTree>
+      <p:nvGrpSpPr>
+        <p:cNvPr id="1" name=""/>
+        <p:cNvGrpSpPr/>
+        <p:nvPr/>
+      </p:nvGrpSpPr>
+      <p:grpSpPr>
+        <a:xfrm>
+          <a:off x="0" y="0"/>
+          <a:ext cx="0" cy="0"/>
+          <a:chOff x="0" y="0"/>
+          <a:chExt cx="0" cy="0"/>
+        </a:xfrm>
+      </p:grpSpPr>
+      <p:sp>
+        <p:nvSpPr>
+          <p:cNvPr id="2" name="Title 1">
+            <a:extLst>
+              <a:ext uri="{FF2B5EF4-FFF2-40B4-BE49-F238E27FC236}">
+                <a16:creationId xmlns:a16="http://schemas.microsoft.com/office/drawing/2014/main" id="{01A5672E-9362-A56A-B633-F98F1AE5E0FB}"/>
+              </a:ext>
+            </a:extLst>
+          </p:cNvPr>
+          <p:cNvSpPr>
+            <a:spLocks noGrp="1"/>
+          </p:cNvSpPr>
+          <p:nvPr>
+            <p:ph type="title"/>
+          </p:nvPr>
+        </p:nvSpPr>
+        <p:spPr/>
+        <p:txBody>
+          <a:bodyPr/>
+          <a:lstStyle/>
+          <a:p>
+            <a:r>
+              <a:rPr lang="en-US" dirty="0"/>
+              <a:t>Example – Top 10 movies with title</a:t>
+            </a:r>
+          </a:p>
+        </p:txBody>
+      </p:sp>
+      <p:sp>
+        <p:nvSpPr>
+          <p:cNvPr id="3" name="Content Placeholder 2">
+            <a:extLst>
+              <a:ext uri="{FF2B5EF4-FFF2-40B4-BE49-F238E27FC236}">
+                <a16:creationId xmlns:a16="http://schemas.microsoft.com/office/drawing/2014/main" id="{FC7D2CA0-D080-69E7-F1DF-EB583282AF1D}"/>
+              </a:ext>
+            </a:extLst>
+          </p:cNvPr>
+          <p:cNvSpPr>
+            <a:spLocks noGrp="1"/>
+          </p:cNvSpPr>
+          <p:nvPr>
+            <p:ph idx="1"/>
+          </p:nvPr>
+        </p:nvSpPr>
+        <p:spPr>
+          <a:xfrm>
+            <a:off x="581192" y="2180497"/>
+            <a:ext cx="11029615" cy="1520994"/>
+          </a:xfrm>
+        </p:spPr>
+        <p:txBody>
+          <a:bodyPr>
+            <a:normAutofit lnSpcReduction="10000"/>
+          </a:bodyPr>
+          <a:lstStyle/>
+          <a:p>
+            <a:r>
+              <a:rPr lang="en-US" dirty="0"/>
+              <a:t>Broadcast() – sends a dictionary to all executors</a:t>
+            </a:r>
+          </a:p>
+          <a:p>
+            <a:r>
+              <a:rPr lang="en-US" dirty="0"/>
+              <a:t>.value() – get the dictionary value back</a:t>
+            </a:r>
+          </a:p>
+          <a:p>
+            <a:r>
+              <a:rPr lang="en-US" dirty="0"/>
+              <a:t>See the provided example in our repo: ‘popular-movies-nice-dataframe.py’</a:t>
+            </a:r>
+          </a:p>
+          <a:p>
+            <a:r>
+              <a:rPr lang="en-US" dirty="0"/>
+              <a:t>This example is a bit contrived; we will talk about performance concerns after</a:t>
+            </a:r>
+          </a:p>
+        </p:txBody>
+      </p:sp>
+      <p:pic>
+        <p:nvPicPr>
+          <p:cNvPr id="5" name="Picture 4">
+            <a:extLst>
+              <a:ext uri="{FF2B5EF4-FFF2-40B4-BE49-F238E27FC236}">
+                <a16:creationId xmlns:a16="http://schemas.microsoft.com/office/drawing/2014/main" id="{615A9271-AC3C-E61F-ACEC-DC7E98313E87}"/>
+              </a:ext>
+            </a:extLst>
+          </p:cNvPr>
+          <p:cNvPicPr>
+            <a:picLocks noChangeAspect="1"/>
+          </p:cNvPicPr>
+          <p:nvPr/>
+        </p:nvPicPr>
+        <p:blipFill>
+          <a:blip r:embed="rId2"/>
+          <a:stretch>
+            <a:fillRect/>
+          </a:stretch>
+        </p:blipFill>
+        <p:spPr>
+          <a:xfrm>
+            <a:off x="3528654" y="4092143"/>
+            <a:ext cx="5134692" cy="371527"/>
+          </a:xfrm>
+          <a:prstGeom prst="rect">
+            <a:avLst/>
+          </a:prstGeom>
+        </p:spPr>
+      </p:pic>
+      <p:pic>
+        <p:nvPicPr>
+          <p:cNvPr id="9" name="Picture 8">
+            <a:extLst>
+              <a:ext uri="{FF2B5EF4-FFF2-40B4-BE49-F238E27FC236}">
+                <a16:creationId xmlns:a16="http://schemas.microsoft.com/office/drawing/2014/main" id="{B8D8D659-88B6-3DFE-F918-E4994D40D241}"/>
+              </a:ext>
+            </a:extLst>
+          </p:cNvPr>
+          <p:cNvPicPr>
+            <a:picLocks noChangeAspect="1"/>
+          </p:cNvPicPr>
+          <p:nvPr/>
+        </p:nvPicPr>
+        <p:blipFill>
+          <a:blip r:embed="rId3"/>
+          <a:stretch>
+            <a:fillRect/>
+          </a:stretch>
+        </p:blipFill>
+        <p:spPr>
+          <a:xfrm>
+            <a:off x="3904943" y="5234995"/>
+            <a:ext cx="4382112" cy="685896"/>
+          </a:xfrm>
+          <a:prstGeom prst="rect">
+            <a:avLst/>
+          </a:prstGeom>
+        </p:spPr>
+      </p:pic>
+    </p:spTree>
+    <p:extLst>
+      <p:ext uri="{BB962C8B-B14F-4D97-AF65-F5344CB8AC3E}">
+        <p14:creationId xmlns:p14="http://schemas.microsoft.com/office/powerpoint/2010/main" val="3651910382"/>
+      </p:ext>
+    </p:extLst>
+  </p:cSld>
+  <p:clrMapOvr>
+    <a:masterClrMapping/>
+  </p:clrMapOvr>
+</p:sld>
+</file>
+
+<file path=ppt/slides/slide73.xml><?xml version="1.0" encoding="utf-8"?>
+<p:sld xmlns:a="http://schemas.openxmlformats.org/drawingml/2006/main" xmlns:r="http://schemas.openxmlformats.org/officeDocument/2006/relationships" xmlns:p="http://schemas.openxmlformats.org/presentationml/2006/main">
+  <p:cSld>
+    <p:spTree>
+      <p:nvGrpSpPr>
+        <p:cNvPr id="1" name=""/>
+        <p:cNvGrpSpPr/>
+        <p:nvPr/>
+      </p:nvGrpSpPr>
+      <p:grpSpPr>
+        <a:xfrm>
+          <a:off x="0" y="0"/>
+          <a:ext cx="0" cy="0"/>
+          <a:chOff x="0" y="0"/>
+          <a:chExt cx="0" cy="0"/>
+        </a:xfrm>
+      </p:grpSpPr>
+      <p:sp>
+        <p:nvSpPr>
+          <p:cNvPr id="2" name="Title 1">
+            <a:extLst>
+              <a:ext uri="{FF2B5EF4-FFF2-40B4-BE49-F238E27FC236}">
+                <a16:creationId xmlns:a16="http://schemas.microsoft.com/office/drawing/2014/main" id="{5825FC87-F51A-4BFD-36B5-228FA5DAD3F8}"/>
+              </a:ext>
+            </a:extLst>
+          </p:cNvPr>
+          <p:cNvSpPr>
+            <a:spLocks noGrp="1"/>
+          </p:cNvSpPr>
+          <p:nvPr>
+            <p:ph type="title"/>
+          </p:nvPr>
+        </p:nvSpPr>
+        <p:spPr/>
+        <p:txBody>
+          <a:bodyPr/>
+          <a:lstStyle/>
+          <a:p>
+            <a:r>
+              <a:rPr lang="en-US" dirty="0"/>
+              <a:t>Example – top 10 movies with title (join)</a:t>
+            </a:r>
+          </a:p>
+        </p:txBody>
+      </p:sp>
+      <p:pic>
+        <p:nvPicPr>
+          <p:cNvPr id="5" name="Picture 4">
+            <a:extLst>
+              <a:ext uri="{FF2B5EF4-FFF2-40B4-BE49-F238E27FC236}">
+                <a16:creationId xmlns:a16="http://schemas.microsoft.com/office/drawing/2014/main" id="{8FF6217D-D09E-13F9-09E7-77C0CCFD3FBE}"/>
+              </a:ext>
+            </a:extLst>
+          </p:cNvPr>
+          <p:cNvPicPr>
+            <a:picLocks noChangeAspect="1"/>
+          </p:cNvPicPr>
+          <p:nvPr/>
+        </p:nvPicPr>
+        <p:blipFill>
+          <a:blip r:embed="rId2"/>
+          <a:stretch>
+            <a:fillRect/>
+          </a:stretch>
+        </p:blipFill>
+        <p:spPr>
+          <a:xfrm>
+            <a:off x="1838618" y="2004449"/>
+            <a:ext cx="5852031" cy="4664865"/>
+          </a:xfrm>
+          <a:prstGeom prst="rect">
+            <a:avLst/>
+          </a:prstGeom>
+        </p:spPr>
+      </p:pic>
+      <p:sp>
+        <p:nvSpPr>
+          <p:cNvPr id="6" name="TextBox 5">
+            <a:extLst>
+              <a:ext uri="{FF2B5EF4-FFF2-40B4-BE49-F238E27FC236}">
+                <a16:creationId xmlns:a16="http://schemas.microsoft.com/office/drawing/2014/main" id="{9A0D3B4F-D995-CB47-5AAF-D9602EE53272}"/>
+              </a:ext>
+            </a:extLst>
+          </p:cNvPr>
+          <p:cNvSpPr txBox="1"/>
+          <p:nvPr/>
+        </p:nvSpPr>
+        <p:spPr>
+          <a:xfrm>
+            <a:off x="8046720" y="3781959"/>
+            <a:ext cx="3408883" cy="646331"/>
+          </a:xfrm>
+          <a:prstGeom prst="rect">
+            <a:avLst/>
+          </a:prstGeom>
+          <a:noFill/>
+        </p:spPr>
+        <p:txBody>
+          <a:bodyPr wrap="square" rtlCol="0">
+            <a:spAutoFit/>
+          </a:bodyPr>
+          <a:lstStyle/>
+          <a:p>
+            <a:r>
+              <a:rPr lang="en-US" dirty="0"/>
+              <a:t>This approach would be preferred with larger datasets</a:t>
+            </a:r>
+          </a:p>
+        </p:txBody>
+      </p:sp>
+    </p:spTree>
+    <p:extLst>
+      <p:ext uri="{BB962C8B-B14F-4D97-AF65-F5344CB8AC3E}">
+        <p14:creationId xmlns:p14="http://schemas.microsoft.com/office/powerpoint/2010/main" val="1730508388"/>
+      </p:ext>
+    </p:extLst>
+  </p:cSld>
+  <p:clrMapOvr>
+    <a:masterClrMapping/>
+  </p:clrMapOvr>
+</p:sld>
+</file>
+
+<file path=ppt/slides/slide74.xml><?xml version="1.0" encoding="utf-8"?>
+<p:sld xmlns:a="http://schemas.openxmlformats.org/drawingml/2006/main" xmlns:r="http://schemas.openxmlformats.org/officeDocument/2006/relationships" xmlns:p="http://schemas.openxmlformats.org/presentationml/2006/main">
+  <p:cSld>
+    <p:spTree>
+      <p:nvGrpSpPr>
         <p:cNvPr id="1" name=""/>
         <p:cNvGrpSpPr/>
         <p:nvPr/>
@@ -19508,7 +20483,7 @@
 </p:sld>
 </file>
 
-<file path=ppt/slides/slide71.xml><?xml version="1.0" encoding="utf-8"?>
+<file path=ppt/slides/slide75.xml><?xml version="1.0" encoding="utf-8"?>
 <p:sld xmlns:a="http://schemas.openxmlformats.org/drawingml/2006/main" xmlns:r="http://schemas.openxmlformats.org/officeDocument/2006/relationships" xmlns:p="http://schemas.openxmlformats.org/presentationml/2006/main">
   <p:cSld>
     <p:spTree>
@@ -19598,7 +20573,7 @@
 </p:sld>
 </file>
 
-<file path=ppt/slides/slide72.xml><?xml version="1.0" encoding="utf-8"?>
+<file path=ppt/slides/slide76.xml><?xml version="1.0" encoding="utf-8"?>
 <p:sld xmlns:a="http://schemas.openxmlformats.org/drawingml/2006/main" xmlns:r="http://schemas.openxmlformats.org/officeDocument/2006/relationships" xmlns:p="http://schemas.openxmlformats.org/presentationml/2006/main">
   <p:cSld>
     <p:spTree>
@@ -19810,7 +20785,7 @@
 </p:sld>
 </file>
 
-<file path=ppt/slides/slide73.xml><?xml version="1.0" encoding="utf-8"?>
+<file path=ppt/slides/slide77.xml><?xml version="1.0" encoding="utf-8"?>
 <p:sld xmlns:a="http://schemas.openxmlformats.org/drawingml/2006/main" xmlns:r="http://schemas.openxmlformats.org/officeDocument/2006/relationships" xmlns:p="http://schemas.openxmlformats.org/presentationml/2006/main">
   <p:cSld>
     <p:spTree>
@@ -19961,7 +20936,7 @@
 </p:sld>
 </file>
 
-<file path=ppt/slides/slide74.xml><?xml version="1.0" encoding="utf-8"?>
+<file path=ppt/slides/slide78.xml><?xml version="1.0" encoding="utf-8"?>
 <p:sld xmlns:a="http://schemas.openxmlformats.org/drawingml/2006/main" xmlns:r="http://schemas.openxmlformats.org/officeDocument/2006/relationships" xmlns:p="http://schemas.openxmlformats.org/presentationml/2006/main">
   <p:cSld>
     <p:spTree>
@@ -20086,7 +21061,7 @@
 </p:sld>
 </file>
 
-<file path=ppt/slides/slide75.xml><?xml version="1.0" encoding="utf-8"?>
+<file path=ppt/slides/slide79.xml><?xml version="1.0" encoding="utf-8"?>
 <p:sld xmlns:a="http://schemas.openxmlformats.org/drawingml/2006/main" xmlns:r="http://schemas.openxmlformats.org/officeDocument/2006/relationships" xmlns:p="http://schemas.openxmlformats.org/presentationml/2006/main">
   <p:cSld>
     <p:spTree>
@@ -20175,716 +21150,6 @@
     <p:extLst>
       <p:ext uri="{BB962C8B-B14F-4D97-AF65-F5344CB8AC3E}">
         <p14:creationId xmlns:p14="http://schemas.microsoft.com/office/powerpoint/2010/main" val="3695064072"/>
-      </p:ext>
-    </p:extLst>
-  </p:cSld>
-  <p:clrMapOvr>
-    <a:masterClrMapping/>
-  </p:clrMapOvr>
-</p:sld>
-</file>
-
-<file path=ppt/slides/slide76.xml><?xml version="1.0" encoding="utf-8"?>
-<p:sld xmlns:a="http://schemas.openxmlformats.org/drawingml/2006/main" xmlns:r="http://schemas.openxmlformats.org/officeDocument/2006/relationships" xmlns:p="http://schemas.openxmlformats.org/presentationml/2006/main">
-  <p:cSld>
-    <p:spTree>
-      <p:nvGrpSpPr>
-        <p:cNvPr id="1" name=""/>
-        <p:cNvGrpSpPr/>
-        <p:nvPr/>
-      </p:nvGrpSpPr>
-      <p:grpSpPr>
-        <a:xfrm>
-          <a:off x="0" y="0"/>
-          <a:ext cx="0" cy="0"/>
-          <a:chOff x="0" y="0"/>
-          <a:chExt cx="0" cy="0"/>
-        </a:xfrm>
-      </p:grpSpPr>
-      <p:sp>
-        <p:nvSpPr>
-          <p:cNvPr id="2" name="Title 1">
-            <a:extLst>
-              <a:ext uri="{FF2B5EF4-FFF2-40B4-BE49-F238E27FC236}">
-                <a16:creationId xmlns:a16="http://schemas.microsoft.com/office/drawing/2014/main" id="{E7F091AB-3E17-AC0C-07AA-2F0DA5A7F7D3}"/>
-              </a:ext>
-            </a:extLst>
-          </p:cNvPr>
-          <p:cNvSpPr>
-            <a:spLocks noGrp="1"/>
-          </p:cNvSpPr>
-          <p:nvPr>
-            <p:ph type="title"/>
-          </p:nvPr>
-        </p:nvSpPr>
-        <p:spPr/>
-        <p:txBody>
-          <a:bodyPr/>
-          <a:lstStyle/>
-          <a:p>
-            <a:r>
-              <a:rPr lang="en-US" dirty="0"/>
-              <a:t>BFS in action</a:t>
-            </a:r>
-          </a:p>
-        </p:txBody>
-      </p:sp>
-      <p:pic>
-        <p:nvPicPr>
-          <p:cNvPr id="5" name="Content Placeholder 4">
-            <a:extLst>
-              <a:ext uri="{FF2B5EF4-FFF2-40B4-BE49-F238E27FC236}">
-                <a16:creationId xmlns:a16="http://schemas.microsoft.com/office/drawing/2014/main" id="{284F72FF-4BE3-6550-4952-D7C51C02F61C}"/>
-              </a:ext>
-            </a:extLst>
-          </p:cNvPr>
-          <p:cNvPicPr>
-            <a:picLocks noGrp="1" noChangeAspect="1"/>
-          </p:cNvPicPr>
-          <p:nvPr>
-            <p:ph idx="1"/>
-          </p:nvPr>
-        </p:nvPicPr>
-        <p:blipFill>
-          <a:blip r:embed="rId2"/>
-          <a:stretch>
-            <a:fillRect/>
-          </a:stretch>
-        </p:blipFill>
-        <p:spPr>
-          <a:xfrm>
-            <a:off x="1168814" y="2426022"/>
-            <a:ext cx="4743821" cy="2130328"/>
-          </a:xfrm>
-          <a:prstGeom prst="rect">
-            <a:avLst/>
-          </a:prstGeom>
-        </p:spPr>
-      </p:pic>
-      <p:pic>
-        <p:nvPicPr>
-          <p:cNvPr id="7" name="Picture 6">
-            <a:extLst>
-              <a:ext uri="{FF2B5EF4-FFF2-40B4-BE49-F238E27FC236}">
-                <a16:creationId xmlns:a16="http://schemas.microsoft.com/office/drawing/2014/main" id="{B21C43D9-DF9D-8B7A-D694-1818B0C9BF34}"/>
-              </a:ext>
-            </a:extLst>
-          </p:cNvPr>
-          <p:cNvPicPr>
-            <a:picLocks noChangeAspect="1"/>
-          </p:cNvPicPr>
-          <p:nvPr/>
-        </p:nvPicPr>
-        <p:blipFill>
-          <a:blip r:embed="rId3"/>
-          <a:stretch>
-            <a:fillRect/>
-          </a:stretch>
-        </p:blipFill>
-        <p:spPr>
-          <a:xfrm>
-            <a:off x="6279364" y="2458843"/>
-            <a:ext cx="4828792" cy="2097507"/>
-          </a:xfrm>
-          <a:prstGeom prst="rect">
-            <a:avLst/>
-          </a:prstGeom>
-        </p:spPr>
-      </p:pic>
-      <p:pic>
-        <p:nvPicPr>
-          <p:cNvPr id="9" name="Picture 8">
-            <a:extLst>
-              <a:ext uri="{FF2B5EF4-FFF2-40B4-BE49-F238E27FC236}">
-                <a16:creationId xmlns:a16="http://schemas.microsoft.com/office/drawing/2014/main" id="{AE228B0F-894E-F941-4FC0-01B88AA12951}"/>
-              </a:ext>
-            </a:extLst>
-          </p:cNvPr>
-          <p:cNvPicPr>
-            <a:picLocks noChangeAspect="1"/>
-          </p:cNvPicPr>
-          <p:nvPr/>
-        </p:nvPicPr>
-        <p:blipFill>
-          <a:blip r:embed="rId4"/>
-          <a:stretch>
-            <a:fillRect/>
-          </a:stretch>
-        </p:blipFill>
-        <p:spPr>
-          <a:xfrm>
-            <a:off x="1168814" y="4660716"/>
-            <a:ext cx="4743821" cy="2097507"/>
-          </a:xfrm>
-          <a:prstGeom prst="rect">
-            <a:avLst/>
-          </a:prstGeom>
-        </p:spPr>
-      </p:pic>
-      <p:pic>
-        <p:nvPicPr>
-          <p:cNvPr id="11" name="Picture 10">
-            <a:extLst>
-              <a:ext uri="{FF2B5EF4-FFF2-40B4-BE49-F238E27FC236}">
-                <a16:creationId xmlns:a16="http://schemas.microsoft.com/office/drawing/2014/main" id="{FE5E5902-56ED-D36E-500C-CE95C373A94E}"/>
-              </a:ext>
-            </a:extLst>
-          </p:cNvPr>
-          <p:cNvPicPr>
-            <a:picLocks noChangeAspect="1"/>
-          </p:cNvPicPr>
-          <p:nvPr/>
-        </p:nvPicPr>
-        <p:blipFill>
-          <a:blip r:embed="rId5"/>
-          <a:stretch>
-            <a:fillRect/>
-          </a:stretch>
-        </p:blipFill>
-        <p:spPr>
-          <a:xfrm>
-            <a:off x="6279364" y="4659564"/>
-            <a:ext cx="4669365" cy="2097507"/>
-          </a:xfrm>
-          <a:prstGeom prst="rect">
-            <a:avLst/>
-          </a:prstGeom>
-        </p:spPr>
-      </p:pic>
-      <p:sp>
-        <p:nvSpPr>
-          <p:cNvPr id="12" name="TextBox 11">
-            <a:extLst>
-              <a:ext uri="{FF2B5EF4-FFF2-40B4-BE49-F238E27FC236}">
-                <a16:creationId xmlns:a16="http://schemas.microsoft.com/office/drawing/2014/main" id="{509904F9-4458-89AE-0003-EFEC7114D6B6}"/>
-              </a:ext>
-            </a:extLst>
-          </p:cNvPr>
-          <p:cNvSpPr txBox="1"/>
-          <p:nvPr/>
-        </p:nvSpPr>
-        <p:spPr>
-          <a:xfrm>
-            <a:off x="2851971" y="1952324"/>
-            <a:ext cx="6488058" cy="369332"/>
-          </a:xfrm>
-          <a:prstGeom prst="rect">
-            <a:avLst/>
-          </a:prstGeom>
-          <a:noFill/>
-        </p:spPr>
-        <p:txBody>
-          <a:bodyPr wrap="none" rtlCol="0">
-            <a:spAutoFit/>
-          </a:bodyPr>
-          <a:lstStyle/>
-          <a:p>
-            <a:r>
-              <a:rPr lang="en-US" dirty="0"/>
-              <a:t>See ‘degrees-of-separation.py’ in provided materials for full example</a:t>
-            </a:r>
-          </a:p>
-        </p:txBody>
-      </p:sp>
-    </p:spTree>
-    <p:extLst>
-      <p:ext uri="{BB962C8B-B14F-4D97-AF65-F5344CB8AC3E}">
-        <p14:creationId xmlns:p14="http://schemas.microsoft.com/office/powerpoint/2010/main" val="1573303015"/>
-      </p:ext>
-    </p:extLst>
-  </p:cSld>
-  <p:clrMapOvr>
-    <a:masterClrMapping/>
-  </p:clrMapOvr>
-</p:sld>
-</file>
-
-<file path=ppt/slides/slide77.xml><?xml version="1.0" encoding="utf-8"?>
-<p:sld xmlns:a="http://schemas.openxmlformats.org/drawingml/2006/main" xmlns:r="http://schemas.openxmlformats.org/officeDocument/2006/relationships" xmlns:p="http://schemas.openxmlformats.org/presentationml/2006/main">
-  <p:cSld>
-    <p:spTree>
-      <p:nvGrpSpPr>
-        <p:cNvPr id="1" name=""/>
-        <p:cNvGrpSpPr/>
-        <p:nvPr/>
-      </p:nvGrpSpPr>
-      <p:grpSpPr>
-        <a:xfrm>
-          <a:off x="0" y="0"/>
-          <a:ext cx="0" cy="0"/>
-          <a:chOff x="0" y="0"/>
-          <a:chExt cx="0" cy="0"/>
-        </a:xfrm>
-      </p:grpSpPr>
-      <p:sp>
-        <p:nvSpPr>
-          <p:cNvPr id="2" name="Title 1">
-            <a:extLst>
-              <a:ext uri="{FF2B5EF4-FFF2-40B4-BE49-F238E27FC236}">
-                <a16:creationId xmlns:a16="http://schemas.microsoft.com/office/drawing/2014/main" id="{963D8542-5DB6-E33F-0071-2813D5777D97}"/>
-              </a:ext>
-            </a:extLst>
-          </p:cNvPr>
-          <p:cNvSpPr>
-            <a:spLocks noGrp="1"/>
-          </p:cNvSpPr>
-          <p:nvPr>
-            <p:ph type="title"/>
-          </p:nvPr>
-        </p:nvSpPr>
-        <p:spPr/>
-        <p:txBody>
-          <a:bodyPr/>
-          <a:lstStyle/>
-          <a:p>
-            <a:r>
-              <a:rPr lang="en-US" dirty="0"/>
-              <a:t>Item-Based collaborative filtering</a:t>
-            </a:r>
-          </a:p>
-        </p:txBody>
-      </p:sp>
-      <p:sp>
-        <p:nvSpPr>
-          <p:cNvPr id="3" name="Content Placeholder 2">
-            <a:extLst>
-              <a:ext uri="{FF2B5EF4-FFF2-40B4-BE49-F238E27FC236}">
-                <a16:creationId xmlns:a16="http://schemas.microsoft.com/office/drawing/2014/main" id="{4A297374-C2DF-71E0-A34D-DB525FCF5333}"/>
-              </a:ext>
-            </a:extLst>
-          </p:cNvPr>
-          <p:cNvSpPr>
-            <a:spLocks noGrp="1"/>
-          </p:cNvSpPr>
-          <p:nvPr>
-            <p:ph idx="1"/>
-          </p:nvPr>
-        </p:nvSpPr>
-        <p:spPr>
-          <a:xfrm>
-            <a:off x="581192" y="2180496"/>
-            <a:ext cx="5334745" cy="3678303"/>
-          </a:xfrm>
-        </p:spPr>
-        <p:txBody>
-          <a:bodyPr/>
-          <a:lstStyle/>
-          <a:p>
-            <a:r>
-              <a:rPr lang="en-US" dirty="0"/>
-              <a:t>Simple recommendation pattern; If sally and joe like both star wars movies, then John, only having seen the second one, will probably like the first one too</a:t>
-            </a:r>
-          </a:p>
-          <a:p>
-            <a:r>
-              <a:rPr lang="en-US" dirty="0"/>
-              <a:t>Find every pair of movies that were watched by the same person</a:t>
-            </a:r>
-          </a:p>
-          <a:p>
-            <a:r>
-              <a:rPr lang="en-US" dirty="0"/>
-              <a:t>Measure the similarity of their ratings across all users who watched both</a:t>
-            </a:r>
-          </a:p>
-          <a:p>
-            <a:r>
-              <a:rPr lang="en-US" dirty="0"/>
-              <a:t>Sort by movie, then by similarity strength</a:t>
-            </a:r>
-          </a:p>
-          <a:p>
-            <a:r>
-              <a:rPr lang="en-US" dirty="0"/>
-              <a:t>This is just one design pattern for making recommendations, there are many </a:t>
-            </a:r>
-          </a:p>
-        </p:txBody>
-      </p:sp>
-      <p:pic>
-        <p:nvPicPr>
-          <p:cNvPr id="5" name="Picture 4">
-            <a:extLst>
-              <a:ext uri="{FF2B5EF4-FFF2-40B4-BE49-F238E27FC236}">
-                <a16:creationId xmlns:a16="http://schemas.microsoft.com/office/drawing/2014/main" id="{09D1D014-05EA-C55E-313C-49E92421760A}"/>
-              </a:ext>
-            </a:extLst>
-          </p:cNvPr>
-          <p:cNvPicPr>
-            <a:picLocks noChangeAspect="1"/>
-          </p:cNvPicPr>
-          <p:nvPr/>
-        </p:nvPicPr>
-        <p:blipFill>
-          <a:blip r:embed="rId2"/>
-          <a:stretch>
-            <a:fillRect/>
-          </a:stretch>
-        </p:blipFill>
-        <p:spPr>
-          <a:xfrm>
-            <a:off x="6276063" y="2295571"/>
-            <a:ext cx="5334744" cy="3715268"/>
-          </a:xfrm>
-          <a:prstGeom prst="rect">
-            <a:avLst/>
-          </a:prstGeom>
-        </p:spPr>
-      </p:pic>
-    </p:spTree>
-    <p:extLst>
-      <p:ext uri="{BB962C8B-B14F-4D97-AF65-F5344CB8AC3E}">
-        <p14:creationId xmlns:p14="http://schemas.microsoft.com/office/powerpoint/2010/main" val="1395020203"/>
-      </p:ext>
-    </p:extLst>
-  </p:cSld>
-  <p:clrMapOvr>
-    <a:masterClrMapping/>
-  </p:clrMapOvr>
-</p:sld>
-</file>
-
-<file path=ppt/slides/slide78.xml><?xml version="1.0" encoding="utf-8"?>
-<p:sld xmlns:a="http://schemas.openxmlformats.org/drawingml/2006/main" xmlns:r="http://schemas.openxmlformats.org/officeDocument/2006/relationships" xmlns:p="http://schemas.openxmlformats.org/presentationml/2006/main">
-  <p:cSld>
-    <p:spTree>
-      <p:nvGrpSpPr>
-        <p:cNvPr id="1" name=""/>
-        <p:cNvGrpSpPr/>
-        <p:nvPr/>
-      </p:nvGrpSpPr>
-      <p:grpSpPr>
-        <a:xfrm>
-          <a:off x="0" y="0"/>
-          <a:ext cx="0" cy="0"/>
-          <a:chOff x="0" y="0"/>
-          <a:chExt cx="0" cy="0"/>
-        </a:xfrm>
-      </p:grpSpPr>
-      <p:sp>
-        <p:nvSpPr>
-          <p:cNvPr id="2" name="Title 1">
-            <a:extLst>
-              <a:ext uri="{FF2B5EF4-FFF2-40B4-BE49-F238E27FC236}">
-                <a16:creationId xmlns:a16="http://schemas.microsoft.com/office/drawing/2014/main" id="{B3A70807-D1EE-30ED-D4C1-0D0B822F0FD2}"/>
-              </a:ext>
-            </a:extLst>
-          </p:cNvPr>
-          <p:cNvSpPr>
-            <a:spLocks noGrp="1"/>
-          </p:cNvSpPr>
-          <p:nvPr>
-            <p:ph type="title"/>
-          </p:nvPr>
-        </p:nvSpPr>
-        <p:spPr/>
-        <p:txBody>
-          <a:bodyPr/>
-          <a:lstStyle/>
-          <a:p>
-            <a:r>
-              <a:rPr lang="en-US" dirty="0"/>
-              <a:t>Making it a spark problem</a:t>
-            </a:r>
-          </a:p>
-        </p:txBody>
-      </p:sp>
-      <p:sp>
-        <p:nvSpPr>
-          <p:cNvPr id="3" name="Content Placeholder 2">
-            <a:extLst>
-              <a:ext uri="{FF2B5EF4-FFF2-40B4-BE49-F238E27FC236}">
-                <a16:creationId xmlns:a16="http://schemas.microsoft.com/office/drawing/2014/main" id="{F1C0FBFF-8428-A5C3-2FED-3C60C1C49630}"/>
-              </a:ext>
-            </a:extLst>
-          </p:cNvPr>
-          <p:cNvSpPr>
-            <a:spLocks noGrp="1"/>
-          </p:cNvSpPr>
-          <p:nvPr>
-            <p:ph idx="1"/>
-          </p:nvPr>
-        </p:nvSpPr>
-        <p:spPr>
-          <a:xfrm>
-            <a:off x="406420" y="2332536"/>
-            <a:ext cx="5957804" cy="3678303"/>
-          </a:xfrm>
-        </p:spPr>
-        <p:txBody>
-          <a:bodyPr>
-            <a:normAutofit fontScale="92500" lnSpcReduction="10000"/>
-          </a:bodyPr>
-          <a:lstStyle/>
-          <a:p>
-            <a:r>
-              <a:rPr lang="en-US" dirty="0"/>
-              <a:t>Select </a:t>
-            </a:r>
-            <a:r>
-              <a:rPr lang="en-US" dirty="0" err="1"/>
-              <a:t>userID</a:t>
-            </a:r>
-            <a:r>
-              <a:rPr lang="en-US" dirty="0"/>
-              <a:t>, </a:t>
-            </a:r>
-            <a:r>
-              <a:rPr lang="en-US" dirty="0" err="1"/>
-              <a:t>movieID</a:t>
-            </a:r>
-            <a:r>
-              <a:rPr lang="en-US" dirty="0"/>
-              <a:t>, and rating columns</a:t>
-            </a:r>
-          </a:p>
-          <a:p>
-            <a:r>
-              <a:rPr lang="en-US" dirty="0"/>
-              <a:t>Find every movie pair rated by the same user</a:t>
-            </a:r>
-          </a:p>
-          <a:p>
-            <a:pPr lvl="1"/>
-            <a:r>
-              <a:rPr lang="en-US" dirty="0"/>
-              <a:t>This can be done with a ‘self-join’ operation</a:t>
-            </a:r>
-          </a:p>
-          <a:p>
-            <a:pPr lvl="1"/>
-            <a:r>
-              <a:rPr lang="en-US" dirty="0"/>
-              <a:t>At the point we have movie1, movie2, rating1, rating2</a:t>
-            </a:r>
-          </a:p>
-          <a:p>
-            <a:pPr lvl="1"/>
-            <a:r>
-              <a:rPr lang="en-US" dirty="0"/>
-              <a:t>Filter out duplicate pairs (movie1, movie2) is same as (movie2, movie1)</a:t>
-            </a:r>
-          </a:p>
-          <a:p>
-            <a:r>
-              <a:rPr lang="en-US" dirty="0"/>
-              <a:t>Compute cosine similarity scores for every pair</a:t>
-            </a:r>
-          </a:p>
-          <a:p>
-            <a:pPr lvl="1"/>
-            <a:r>
-              <a:rPr lang="en-US" dirty="0"/>
-              <a:t>Add x^2, y^2, </a:t>
-            </a:r>
-            <a:r>
-              <a:rPr lang="en-US" dirty="0" err="1"/>
-              <a:t>xy</a:t>
-            </a:r>
-            <a:r>
-              <a:rPr lang="en-US" dirty="0"/>
-              <a:t> columns</a:t>
-            </a:r>
-          </a:p>
-          <a:p>
-            <a:pPr lvl="1"/>
-            <a:r>
-              <a:rPr lang="en-US" dirty="0"/>
-              <a:t>Group by (movie1, movie2) pairs</a:t>
-            </a:r>
-          </a:p>
-          <a:p>
-            <a:pPr lvl="1"/>
-            <a:r>
-              <a:rPr lang="en-US" dirty="0"/>
-              <a:t>Compute similarity score for each aggregated pair</a:t>
-            </a:r>
-          </a:p>
-          <a:p>
-            <a:r>
-              <a:rPr lang="en-US" dirty="0"/>
-              <a:t>Filter, sort, and display results</a:t>
-            </a:r>
-          </a:p>
-        </p:txBody>
-      </p:sp>
-      <p:pic>
-        <p:nvPicPr>
-          <p:cNvPr id="4" name="Picture 3">
-            <a:extLst>
-              <a:ext uri="{FF2B5EF4-FFF2-40B4-BE49-F238E27FC236}">
-                <a16:creationId xmlns:a16="http://schemas.microsoft.com/office/drawing/2014/main" id="{7A2B99C4-506D-79CC-9A37-2438E4115486}"/>
-              </a:ext>
-            </a:extLst>
-          </p:cNvPr>
-          <p:cNvPicPr>
-            <a:picLocks noChangeAspect="1"/>
-          </p:cNvPicPr>
-          <p:nvPr/>
-        </p:nvPicPr>
-        <p:blipFill>
-          <a:blip r:embed="rId2"/>
-          <a:stretch>
-            <a:fillRect/>
-          </a:stretch>
-        </p:blipFill>
-        <p:spPr>
-          <a:xfrm>
-            <a:off x="6364224" y="2229734"/>
-            <a:ext cx="5334744" cy="3715268"/>
-          </a:xfrm>
-          <a:prstGeom prst="rect">
-            <a:avLst/>
-          </a:prstGeom>
-        </p:spPr>
-      </p:pic>
-    </p:spTree>
-    <p:extLst>
-      <p:ext uri="{BB962C8B-B14F-4D97-AF65-F5344CB8AC3E}">
-        <p14:creationId xmlns:p14="http://schemas.microsoft.com/office/powerpoint/2010/main" val="3740426926"/>
-      </p:ext>
-    </p:extLst>
-  </p:cSld>
-  <p:clrMapOvr>
-    <a:masterClrMapping/>
-  </p:clrMapOvr>
-</p:sld>
-</file>
-
-<file path=ppt/slides/slide79.xml><?xml version="1.0" encoding="utf-8"?>
-<p:sld xmlns:a="http://schemas.openxmlformats.org/drawingml/2006/main" xmlns:r="http://schemas.openxmlformats.org/officeDocument/2006/relationships" xmlns:p="http://schemas.openxmlformats.org/presentationml/2006/main">
-  <p:cSld>
-    <p:spTree>
-      <p:nvGrpSpPr>
-        <p:cNvPr id="1" name=""/>
-        <p:cNvGrpSpPr/>
-        <p:nvPr/>
-      </p:nvGrpSpPr>
-      <p:grpSpPr>
-        <a:xfrm>
-          <a:off x="0" y="0"/>
-          <a:ext cx="0" cy="0"/>
-          <a:chOff x="0" y="0"/>
-          <a:chExt cx="0" cy="0"/>
-        </a:xfrm>
-      </p:grpSpPr>
-      <p:sp>
-        <p:nvSpPr>
-          <p:cNvPr id="2" name="Title 1">
-            <a:extLst>
-              <a:ext uri="{FF2B5EF4-FFF2-40B4-BE49-F238E27FC236}">
-                <a16:creationId xmlns:a16="http://schemas.microsoft.com/office/drawing/2014/main" id="{A3500E01-C229-DCE8-5FE0-29B7EB16326F}"/>
-              </a:ext>
-            </a:extLst>
-          </p:cNvPr>
-          <p:cNvSpPr>
-            <a:spLocks noGrp="1"/>
-          </p:cNvSpPr>
-          <p:nvPr>
-            <p:ph type="title"/>
-          </p:nvPr>
-        </p:nvSpPr>
-        <p:spPr/>
-        <p:txBody>
-          <a:bodyPr/>
-          <a:lstStyle/>
-          <a:p>
-            <a:r>
-              <a:rPr lang="en-US" dirty="0"/>
-              <a:t>Caching datasets</a:t>
-            </a:r>
-          </a:p>
-        </p:txBody>
-      </p:sp>
-      <p:sp>
-        <p:nvSpPr>
-          <p:cNvPr id="3" name="Content Placeholder 2">
-            <a:extLst>
-              <a:ext uri="{FF2B5EF4-FFF2-40B4-BE49-F238E27FC236}">
-                <a16:creationId xmlns:a16="http://schemas.microsoft.com/office/drawing/2014/main" id="{A97B78A7-2BF1-E14E-8DAB-0CBA8F26ABBB}"/>
-              </a:ext>
-            </a:extLst>
-          </p:cNvPr>
-          <p:cNvSpPr>
-            <a:spLocks noGrp="1"/>
-          </p:cNvSpPr>
-          <p:nvPr>
-            <p:ph idx="1"/>
-          </p:nvPr>
-        </p:nvSpPr>
-        <p:spPr/>
-        <p:txBody>
-          <a:bodyPr/>
-          <a:lstStyle/>
-          <a:p>
-            <a:r>
-              <a:rPr lang="en-US" dirty="0"/>
-              <a:t>In this example, we’ll query the final dataset of movie similarities a couple of times</a:t>
-            </a:r>
-          </a:p>
-          <a:p>
-            <a:r>
-              <a:rPr lang="en-US" dirty="0"/>
-              <a:t>Any time you will perform more than one action on a </a:t>
-            </a:r>
-            <a:r>
-              <a:rPr lang="en-US" dirty="0" err="1"/>
-              <a:t>dataframe</a:t>
-            </a:r>
-            <a:r>
-              <a:rPr lang="en-US" dirty="0"/>
-              <a:t>, you should cache it!</a:t>
-            </a:r>
-          </a:p>
-          <a:p>
-            <a:pPr lvl="1"/>
-            <a:r>
-              <a:rPr lang="en-US" dirty="0"/>
-              <a:t>Otherwise, spark may re-evaluate the entire </a:t>
-            </a:r>
-            <a:r>
-              <a:rPr lang="en-US" dirty="0" err="1"/>
-              <a:t>dataframe</a:t>
-            </a:r>
-            <a:r>
-              <a:rPr lang="en-US" dirty="0"/>
-              <a:t> all over again</a:t>
-            </a:r>
-          </a:p>
-          <a:p>
-            <a:r>
-              <a:rPr lang="en-US" dirty="0"/>
-              <a:t>Use .</a:t>
-            </a:r>
-            <a:r>
-              <a:rPr lang="en-US" dirty="0" err="1"/>
-              <a:t>cahce</a:t>
-            </a:r>
-            <a:r>
-              <a:rPr lang="en-US" dirty="0"/>
-              <a:t>() or .persist() </a:t>
-            </a:r>
-          </a:p>
-          <a:p>
-            <a:pPr lvl="1"/>
-            <a:r>
-              <a:rPr lang="en-US" dirty="0"/>
-              <a:t>What’s the difference?</a:t>
-            </a:r>
-          </a:p>
-          <a:p>
-            <a:pPr lvl="1"/>
-            <a:r>
-              <a:rPr lang="en-US" dirty="0"/>
-              <a:t>Persist() optionally lets you cache it to disk instead of just memory, just in case a node fails </a:t>
-            </a:r>
-          </a:p>
-        </p:txBody>
-      </p:sp>
-    </p:spTree>
-    <p:extLst>
-      <p:ext uri="{BB962C8B-B14F-4D97-AF65-F5344CB8AC3E}">
-        <p14:creationId xmlns:p14="http://schemas.microsoft.com/office/powerpoint/2010/main" val="556539515"/>
       </p:ext>
     </p:extLst>
   </p:cSld>
@@ -21659,6 +21924,716 @@
           <p:cNvPr id="2" name="Title 1">
             <a:extLst>
               <a:ext uri="{FF2B5EF4-FFF2-40B4-BE49-F238E27FC236}">
+                <a16:creationId xmlns:a16="http://schemas.microsoft.com/office/drawing/2014/main" id="{E7F091AB-3E17-AC0C-07AA-2F0DA5A7F7D3}"/>
+              </a:ext>
+            </a:extLst>
+          </p:cNvPr>
+          <p:cNvSpPr>
+            <a:spLocks noGrp="1"/>
+          </p:cNvSpPr>
+          <p:nvPr>
+            <p:ph type="title"/>
+          </p:nvPr>
+        </p:nvSpPr>
+        <p:spPr/>
+        <p:txBody>
+          <a:bodyPr/>
+          <a:lstStyle/>
+          <a:p>
+            <a:r>
+              <a:rPr lang="en-US" dirty="0"/>
+              <a:t>BFS in action</a:t>
+            </a:r>
+          </a:p>
+        </p:txBody>
+      </p:sp>
+      <p:pic>
+        <p:nvPicPr>
+          <p:cNvPr id="5" name="Content Placeholder 4">
+            <a:extLst>
+              <a:ext uri="{FF2B5EF4-FFF2-40B4-BE49-F238E27FC236}">
+                <a16:creationId xmlns:a16="http://schemas.microsoft.com/office/drawing/2014/main" id="{284F72FF-4BE3-6550-4952-D7C51C02F61C}"/>
+              </a:ext>
+            </a:extLst>
+          </p:cNvPr>
+          <p:cNvPicPr>
+            <a:picLocks noGrp="1" noChangeAspect="1"/>
+          </p:cNvPicPr>
+          <p:nvPr>
+            <p:ph idx="1"/>
+          </p:nvPr>
+        </p:nvPicPr>
+        <p:blipFill>
+          <a:blip r:embed="rId2"/>
+          <a:stretch>
+            <a:fillRect/>
+          </a:stretch>
+        </p:blipFill>
+        <p:spPr>
+          <a:xfrm>
+            <a:off x="1168814" y="2426022"/>
+            <a:ext cx="4743821" cy="2130328"/>
+          </a:xfrm>
+          <a:prstGeom prst="rect">
+            <a:avLst/>
+          </a:prstGeom>
+        </p:spPr>
+      </p:pic>
+      <p:pic>
+        <p:nvPicPr>
+          <p:cNvPr id="7" name="Picture 6">
+            <a:extLst>
+              <a:ext uri="{FF2B5EF4-FFF2-40B4-BE49-F238E27FC236}">
+                <a16:creationId xmlns:a16="http://schemas.microsoft.com/office/drawing/2014/main" id="{B21C43D9-DF9D-8B7A-D694-1818B0C9BF34}"/>
+              </a:ext>
+            </a:extLst>
+          </p:cNvPr>
+          <p:cNvPicPr>
+            <a:picLocks noChangeAspect="1"/>
+          </p:cNvPicPr>
+          <p:nvPr/>
+        </p:nvPicPr>
+        <p:blipFill>
+          <a:blip r:embed="rId3"/>
+          <a:stretch>
+            <a:fillRect/>
+          </a:stretch>
+        </p:blipFill>
+        <p:spPr>
+          <a:xfrm>
+            <a:off x="6279364" y="2458843"/>
+            <a:ext cx="4828792" cy="2097507"/>
+          </a:xfrm>
+          <a:prstGeom prst="rect">
+            <a:avLst/>
+          </a:prstGeom>
+        </p:spPr>
+      </p:pic>
+      <p:pic>
+        <p:nvPicPr>
+          <p:cNvPr id="9" name="Picture 8">
+            <a:extLst>
+              <a:ext uri="{FF2B5EF4-FFF2-40B4-BE49-F238E27FC236}">
+                <a16:creationId xmlns:a16="http://schemas.microsoft.com/office/drawing/2014/main" id="{AE228B0F-894E-F941-4FC0-01B88AA12951}"/>
+              </a:ext>
+            </a:extLst>
+          </p:cNvPr>
+          <p:cNvPicPr>
+            <a:picLocks noChangeAspect="1"/>
+          </p:cNvPicPr>
+          <p:nvPr/>
+        </p:nvPicPr>
+        <p:blipFill>
+          <a:blip r:embed="rId4"/>
+          <a:stretch>
+            <a:fillRect/>
+          </a:stretch>
+        </p:blipFill>
+        <p:spPr>
+          <a:xfrm>
+            <a:off x="1168814" y="4660716"/>
+            <a:ext cx="4743821" cy="2097507"/>
+          </a:xfrm>
+          <a:prstGeom prst="rect">
+            <a:avLst/>
+          </a:prstGeom>
+        </p:spPr>
+      </p:pic>
+      <p:pic>
+        <p:nvPicPr>
+          <p:cNvPr id="11" name="Picture 10">
+            <a:extLst>
+              <a:ext uri="{FF2B5EF4-FFF2-40B4-BE49-F238E27FC236}">
+                <a16:creationId xmlns:a16="http://schemas.microsoft.com/office/drawing/2014/main" id="{FE5E5902-56ED-D36E-500C-CE95C373A94E}"/>
+              </a:ext>
+            </a:extLst>
+          </p:cNvPr>
+          <p:cNvPicPr>
+            <a:picLocks noChangeAspect="1"/>
+          </p:cNvPicPr>
+          <p:nvPr/>
+        </p:nvPicPr>
+        <p:blipFill>
+          <a:blip r:embed="rId5"/>
+          <a:stretch>
+            <a:fillRect/>
+          </a:stretch>
+        </p:blipFill>
+        <p:spPr>
+          <a:xfrm>
+            <a:off x="6279364" y="4659564"/>
+            <a:ext cx="4669365" cy="2097507"/>
+          </a:xfrm>
+          <a:prstGeom prst="rect">
+            <a:avLst/>
+          </a:prstGeom>
+        </p:spPr>
+      </p:pic>
+      <p:sp>
+        <p:nvSpPr>
+          <p:cNvPr id="12" name="TextBox 11">
+            <a:extLst>
+              <a:ext uri="{FF2B5EF4-FFF2-40B4-BE49-F238E27FC236}">
+                <a16:creationId xmlns:a16="http://schemas.microsoft.com/office/drawing/2014/main" id="{509904F9-4458-89AE-0003-EFEC7114D6B6}"/>
+              </a:ext>
+            </a:extLst>
+          </p:cNvPr>
+          <p:cNvSpPr txBox="1"/>
+          <p:nvPr/>
+        </p:nvSpPr>
+        <p:spPr>
+          <a:xfrm>
+            <a:off x="2851971" y="1952324"/>
+            <a:ext cx="6488058" cy="369332"/>
+          </a:xfrm>
+          <a:prstGeom prst="rect">
+            <a:avLst/>
+          </a:prstGeom>
+          <a:noFill/>
+        </p:spPr>
+        <p:txBody>
+          <a:bodyPr wrap="none" rtlCol="0">
+            <a:spAutoFit/>
+          </a:bodyPr>
+          <a:lstStyle/>
+          <a:p>
+            <a:r>
+              <a:rPr lang="en-US" dirty="0"/>
+              <a:t>See ‘degrees-of-separation.py’ in provided materials for full example</a:t>
+            </a:r>
+          </a:p>
+        </p:txBody>
+      </p:sp>
+    </p:spTree>
+    <p:extLst>
+      <p:ext uri="{BB962C8B-B14F-4D97-AF65-F5344CB8AC3E}">
+        <p14:creationId xmlns:p14="http://schemas.microsoft.com/office/powerpoint/2010/main" val="1573303015"/>
+      </p:ext>
+    </p:extLst>
+  </p:cSld>
+  <p:clrMapOvr>
+    <a:masterClrMapping/>
+  </p:clrMapOvr>
+</p:sld>
+</file>
+
+<file path=ppt/slides/slide81.xml><?xml version="1.0" encoding="utf-8"?>
+<p:sld xmlns:a="http://schemas.openxmlformats.org/drawingml/2006/main" xmlns:r="http://schemas.openxmlformats.org/officeDocument/2006/relationships" xmlns:p="http://schemas.openxmlformats.org/presentationml/2006/main">
+  <p:cSld>
+    <p:spTree>
+      <p:nvGrpSpPr>
+        <p:cNvPr id="1" name=""/>
+        <p:cNvGrpSpPr/>
+        <p:nvPr/>
+      </p:nvGrpSpPr>
+      <p:grpSpPr>
+        <a:xfrm>
+          <a:off x="0" y="0"/>
+          <a:ext cx="0" cy="0"/>
+          <a:chOff x="0" y="0"/>
+          <a:chExt cx="0" cy="0"/>
+        </a:xfrm>
+      </p:grpSpPr>
+      <p:sp>
+        <p:nvSpPr>
+          <p:cNvPr id="2" name="Title 1">
+            <a:extLst>
+              <a:ext uri="{FF2B5EF4-FFF2-40B4-BE49-F238E27FC236}">
+                <a16:creationId xmlns:a16="http://schemas.microsoft.com/office/drawing/2014/main" id="{963D8542-5DB6-E33F-0071-2813D5777D97}"/>
+              </a:ext>
+            </a:extLst>
+          </p:cNvPr>
+          <p:cNvSpPr>
+            <a:spLocks noGrp="1"/>
+          </p:cNvSpPr>
+          <p:nvPr>
+            <p:ph type="title"/>
+          </p:nvPr>
+        </p:nvSpPr>
+        <p:spPr/>
+        <p:txBody>
+          <a:bodyPr/>
+          <a:lstStyle/>
+          <a:p>
+            <a:r>
+              <a:rPr lang="en-US" dirty="0"/>
+              <a:t>Item-Based collaborative filtering</a:t>
+            </a:r>
+          </a:p>
+        </p:txBody>
+      </p:sp>
+      <p:sp>
+        <p:nvSpPr>
+          <p:cNvPr id="3" name="Content Placeholder 2">
+            <a:extLst>
+              <a:ext uri="{FF2B5EF4-FFF2-40B4-BE49-F238E27FC236}">
+                <a16:creationId xmlns:a16="http://schemas.microsoft.com/office/drawing/2014/main" id="{4A297374-C2DF-71E0-A34D-DB525FCF5333}"/>
+              </a:ext>
+            </a:extLst>
+          </p:cNvPr>
+          <p:cNvSpPr>
+            <a:spLocks noGrp="1"/>
+          </p:cNvSpPr>
+          <p:nvPr>
+            <p:ph idx="1"/>
+          </p:nvPr>
+        </p:nvSpPr>
+        <p:spPr>
+          <a:xfrm>
+            <a:off x="581192" y="2180496"/>
+            <a:ext cx="5334745" cy="3678303"/>
+          </a:xfrm>
+        </p:spPr>
+        <p:txBody>
+          <a:bodyPr/>
+          <a:lstStyle/>
+          <a:p>
+            <a:r>
+              <a:rPr lang="en-US" dirty="0"/>
+              <a:t>Simple recommendation pattern; If sally and joe like both star wars movies, then John, only having seen the second one, will probably like the first one too</a:t>
+            </a:r>
+          </a:p>
+          <a:p>
+            <a:r>
+              <a:rPr lang="en-US" dirty="0"/>
+              <a:t>Find every pair of movies that were watched by the same person</a:t>
+            </a:r>
+          </a:p>
+          <a:p>
+            <a:r>
+              <a:rPr lang="en-US" dirty="0"/>
+              <a:t>Measure the similarity of their ratings across all users who watched both</a:t>
+            </a:r>
+          </a:p>
+          <a:p>
+            <a:r>
+              <a:rPr lang="en-US" dirty="0"/>
+              <a:t>Sort by movie, then by similarity strength</a:t>
+            </a:r>
+          </a:p>
+          <a:p>
+            <a:r>
+              <a:rPr lang="en-US" dirty="0"/>
+              <a:t>This is just one design pattern for making recommendations, there are many </a:t>
+            </a:r>
+          </a:p>
+        </p:txBody>
+      </p:sp>
+      <p:pic>
+        <p:nvPicPr>
+          <p:cNvPr id="5" name="Picture 4">
+            <a:extLst>
+              <a:ext uri="{FF2B5EF4-FFF2-40B4-BE49-F238E27FC236}">
+                <a16:creationId xmlns:a16="http://schemas.microsoft.com/office/drawing/2014/main" id="{09D1D014-05EA-C55E-313C-49E92421760A}"/>
+              </a:ext>
+            </a:extLst>
+          </p:cNvPr>
+          <p:cNvPicPr>
+            <a:picLocks noChangeAspect="1"/>
+          </p:cNvPicPr>
+          <p:nvPr/>
+        </p:nvPicPr>
+        <p:blipFill>
+          <a:blip r:embed="rId2"/>
+          <a:stretch>
+            <a:fillRect/>
+          </a:stretch>
+        </p:blipFill>
+        <p:spPr>
+          <a:xfrm>
+            <a:off x="6276063" y="2295571"/>
+            <a:ext cx="5334744" cy="3715268"/>
+          </a:xfrm>
+          <a:prstGeom prst="rect">
+            <a:avLst/>
+          </a:prstGeom>
+        </p:spPr>
+      </p:pic>
+    </p:spTree>
+    <p:extLst>
+      <p:ext uri="{BB962C8B-B14F-4D97-AF65-F5344CB8AC3E}">
+        <p14:creationId xmlns:p14="http://schemas.microsoft.com/office/powerpoint/2010/main" val="1395020203"/>
+      </p:ext>
+    </p:extLst>
+  </p:cSld>
+  <p:clrMapOvr>
+    <a:masterClrMapping/>
+  </p:clrMapOvr>
+</p:sld>
+</file>
+
+<file path=ppt/slides/slide82.xml><?xml version="1.0" encoding="utf-8"?>
+<p:sld xmlns:a="http://schemas.openxmlformats.org/drawingml/2006/main" xmlns:r="http://schemas.openxmlformats.org/officeDocument/2006/relationships" xmlns:p="http://schemas.openxmlformats.org/presentationml/2006/main">
+  <p:cSld>
+    <p:spTree>
+      <p:nvGrpSpPr>
+        <p:cNvPr id="1" name=""/>
+        <p:cNvGrpSpPr/>
+        <p:nvPr/>
+      </p:nvGrpSpPr>
+      <p:grpSpPr>
+        <a:xfrm>
+          <a:off x="0" y="0"/>
+          <a:ext cx="0" cy="0"/>
+          <a:chOff x="0" y="0"/>
+          <a:chExt cx="0" cy="0"/>
+        </a:xfrm>
+      </p:grpSpPr>
+      <p:sp>
+        <p:nvSpPr>
+          <p:cNvPr id="2" name="Title 1">
+            <a:extLst>
+              <a:ext uri="{FF2B5EF4-FFF2-40B4-BE49-F238E27FC236}">
+                <a16:creationId xmlns:a16="http://schemas.microsoft.com/office/drawing/2014/main" id="{B3A70807-D1EE-30ED-D4C1-0D0B822F0FD2}"/>
+              </a:ext>
+            </a:extLst>
+          </p:cNvPr>
+          <p:cNvSpPr>
+            <a:spLocks noGrp="1"/>
+          </p:cNvSpPr>
+          <p:nvPr>
+            <p:ph type="title"/>
+          </p:nvPr>
+        </p:nvSpPr>
+        <p:spPr/>
+        <p:txBody>
+          <a:bodyPr/>
+          <a:lstStyle/>
+          <a:p>
+            <a:r>
+              <a:rPr lang="en-US" dirty="0"/>
+              <a:t>Making it a spark problem</a:t>
+            </a:r>
+          </a:p>
+        </p:txBody>
+      </p:sp>
+      <p:sp>
+        <p:nvSpPr>
+          <p:cNvPr id="3" name="Content Placeholder 2">
+            <a:extLst>
+              <a:ext uri="{FF2B5EF4-FFF2-40B4-BE49-F238E27FC236}">
+                <a16:creationId xmlns:a16="http://schemas.microsoft.com/office/drawing/2014/main" id="{F1C0FBFF-8428-A5C3-2FED-3C60C1C49630}"/>
+              </a:ext>
+            </a:extLst>
+          </p:cNvPr>
+          <p:cNvSpPr>
+            <a:spLocks noGrp="1"/>
+          </p:cNvSpPr>
+          <p:nvPr>
+            <p:ph idx="1"/>
+          </p:nvPr>
+        </p:nvSpPr>
+        <p:spPr>
+          <a:xfrm>
+            <a:off x="406420" y="2332536"/>
+            <a:ext cx="5957804" cy="3678303"/>
+          </a:xfrm>
+        </p:spPr>
+        <p:txBody>
+          <a:bodyPr>
+            <a:normAutofit fontScale="92500" lnSpcReduction="10000"/>
+          </a:bodyPr>
+          <a:lstStyle/>
+          <a:p>
+            <a:r>
+              <a:rPr lang="en-US" dirty="0"/>
+              <a:t>Select </a:t>
+            </a:r>
+            <a:r>
+              <a:rPr lang="en-US" dirty="0" err="1"/>
+              <a:t>userID</a:t>
+            </a:r>
+            <a:r>
+              <a:rPr lang="en-US" dirty="0"/>
+              <a:t>, </a:t>
+            </a:r>
+            <a:r>
+              <a:rPr lang="en-US" dirty="0" err="1"/>
+              <a:t>movieID</a:t>
+            </a:r>
+            <a:r>
+              <a:rPr lang="en-US" dirty="0"/>
+              <a:t>, and rating columns</a:t>
+            </a:r>
+          </a:p>
+          <a:p>
+            <a:r>
+              <a:rPr lang="en-US" dirty="0"/>
+              <a:t>Find every movie pair rated by the same user</a:t>
+            </a:r>
+          </a:p>
+          <a:p>
+            <a:pPr lvl="1"/>
+            <a:r>
+              <a:rPr lang="en-US" dirty="0"/>
+              <a:t>This can be done with a ‘self-join’ operation</a:t>
+            </a:r>
+          </a:p>
+          <a:p>
+            <a:pPr lvl="1"/>
+            <a:r>
+              <a:rPr lang="en-US" dirty="0"/>
+              <a:t>At the point we have movie1, movie2, rating1, rating2</a:t>
+            </a:r>
+          </a:p>
+          <a:p>
+            <a:pPr lvl="1"/>
+            <a:r>
+              <a:rPr lang="en-US" dirty="0"/>
+              <a:t>Filter out duplicate pairs (movie1, movie2) is same as (movie2, movie1)</a:t>
+            </a:r>
+          </a:p>
+          <a:p>
+            <a:r>
+              <a:rPr lang="en-US" dirty="0"/>
+              <a:t>Compute cosine similarity scores for every pair</a:t>
+            </a:r>
+          </a:p>
+          <a:p>
+            <a:pPr lvl="1"/>
+            <a:r>
+              <a:rPr lang="en-US" dirty="0"/>
+              <a:t>Add x^2, y^2, </a:t>
+            </a:r>
+            <a:r>
+              <a:rPr lang="en-US" dirty="0" err="1"/>
+              <a:t>xy</a:t>
+            </a:r>
+            <a:r>
+              <a:rPr lang="en-US" dirty="0"/>
+              <a:t> columns</a:t>
+            </a:r>
+          </a:p>
+          <a:p>
+            <a:pPr lvl="1"/>
+            <a:r>
+              <a:rPr lang="en-US" dirty="0"/>
+              <a:t>Group by (movie1, movie2) pairs</a:t>
+            </a:r>
+          </a:p>
+          <a:p>
+            <a:pPr lvl="1"/>
+            <a:r>
+              <a:rPr lang="en-US" dirty="0"/>
+              <a:t>Compute similarity score for each aggregated pair</a:t>
+            </a:r>
+          </a:p>
+          <a:p>
+            <a:r>
+              <a:rPr lang="en-US" dirty="0"/>
+              <a:t>Filter, sort, and display results</a:t>
+            </a:r>
+          </a:p>
+        </p:txBody>
+      </p:sp>
+      <p:pic>
+        <p:nvPicPr>
+          <p:cNvPr id="4" name="Picture 3">
+            <a:extLst>
+              <a:ext uri="{FF2B5EF4-FFF2-40B4-BE49-F238E27FC236}">
+                <a16:creationId xmlns:a16="http://schemas.microsoft.com/office/drawing/2014/main" id="{7A2B99C4-506D-79CC-9A37-2438E4115486}"/>
+              </a:ext>
+            </a:extLst>
+          </p:cNvPr>
+          <p:cNvPicPr>
+            <a:picLocks noChangeAspect="1"/>
+          </p:cNvPicPr>
+          <p:nvPr/>
+        </p:nvPicPr>
+        <p:blipFill>
+          <a:blip r:embed="rId2"/>
+          <a:stretch>
+            <a:fillRect/>
+          </a:stretch>
+        </p:blipFill>
+        <p:spPr>
+          <a:xfrm>
+            <a:off x="6364224" y="2229734"/>
+            <a:ext cx="5334744" cy="3715268"/>
+          </a:xfrm>
+          <a:prstGeom prst="rect">
+            <a:avLst/>
+          </a:prstGeom>
+        </p:spPr>
+      </p:pic>
+    </p:spTree>
+    <p:extLst>
+      <p:ext uri="{BB962C8B-B14F-4D97-AF65-F5344CB8AC3E}">
+        <p14:creationId xmlns:p14="http://schemas.microsoft.com/office/powerpoint/2010/main" val="3740426926"/>
+      </p:ext>
+    </p:extLst>
+  </p:cSld>
+  <p:clrMapOvr>
+    <a:masterClrMapping/>
+  </p:clrMapOvr>
+</p:sld>
+</file>
+
+<file path=ppt/slides/slide83.xml><?xml version="1.0" encoding="utf-8"?>
+<p:sld xmlns:a="http://schemas.openxmlformats.org/drawingml/2006/main" xmlns:r="http://schemas.openxmlformats.org/officeDocument/2006/relationships" xmlns:p="http://schemas.openxmlformats.org/presentationml/2006/main">
+  <p:cSld>
+    <p:spTree>
+      <p:nvGrpSpPr>
+        <p:cNvPr id="1" name=""/>
+        <p:cNvGrpSpPr/>
+        <p:nvPr/>
+      </p:nvGrpSpPr>
+      <p:grpSpPr>
+        <a:xfrm>
+          <a:off x="0" y="0"/>
+          <a:ext cx="0" cy="0"/>
+          <a:chOff x="0" y="0"/>
+          <a:chExt cx="0" cy="0"/>
+        </a:xfrm>
+      </p:grpSpPr>
+      <p:sp>
+        <p:nvSpPr>
+          <p:cNvPr id="2" name="Title 1">
+            <a:extLst>
+              <a:ext uri="{FF2B5EF4-FFF2-40B4-BE49-F238E27FC236}">
+                <a16:creationId xmlns:a16="http://schemas.microsoft.com/office/drawing/2014/main" id="{A3500E01-C229-DCE8-5FE0-29B7EB16326F}"/>
+              </a:ext>
+            </a:extLst>
+          </p:cNvPr>
+          <p:cNvSpPr>
+            <a:spLocks noGrp="1"/>
+          </p:cNvSpPr>
+          <p:nvPr>
+            <p:ph type="title"/>
+          </p:nvPr>
+        </p:nvSpPr>
+        <p:spPr/>
+        <p:txBody>
+          <a:bodyPr/>
+          <a:lstStyle/>
+          <a:p>
+            <a:r>
+              <a:rPr lang="en-US" dirty="0"/>
+              <a:t>Caching datasets</a:t>
+            </a:r>
+          </a:p>
+        </p:txBody>
+      </p:sp>
+      <p:sp>
+        <p:nvSpPr>
+          <p:cNvPr id="3" name="Content Placeholder 2">
+            <a:extLst>
+              <a:ext uri="{FF2B5EF4-FFF2-40B4-BE49-F238E27FC236}">
+                <a16:creationId xmlns:a16="http://schemas.microsoft.com/office/drawing/2014/main" id="{A97B78A7-2BF1-E14E-8DAB-0CBA8F26ABBB}"/>
+              </a:ext>
+            </a:extLst>
+          </p:cNvPr>
+          <p:cNvSpPr>
+            <a:spLocks noGrp="1"/>
+          </p:cNvSpPr>
+          <p:nvPr>
+            <p:ph idx="1"/>
+          </p:nvPr>
+        </p:nvSpPr>
+        <p:spPr/>
+        <p:txBody>
+          <a:bodyPr/>
+          <a:lstStyle/>
+          <a:p>
+            <a:r>
+              <a:rPr lang="en-US" dirty="0"/>
+              <a:t>In this example, we’ll query the final dataset of movie similarities a couple of times</a:t>
+            </a:r>
+          </a:p>
+          <a:p>
+            <a:r>
+              <a:rPr lang="en-US" dirty="0"/>
+              <a:t>Any time you will perform more than one action on a </a:t>
+            </a:r>
+            <a:r>
+              <a:rPr lang="en-US" dirty="0" err="1"/>
+              <a:t>dataframe</a:t>
+            </a:r>
+            <a:r>
+              <a:rPr lang="en-US" dirty="0"/>
+              <a:t>, you should cache it!</a:t>
+            </a:r>
+          </a:p>
+          <a:p>
+            <a:pPr lvl="1"/>
+            <a:r>
+              <a:rPr lang="en-US" dirty="0"/>
+              <a:t>Otherwise, spark may re-evaluate the entire </a:t>
+            </a:r>
+            <a:r>
+              <a:rPr lang="en-US" dirty="0" err="1"/>
+              <a:t>dataframe</a:t>
+            </a:r>
+            <a:r>
+              <a:rPr lang="en-US" dirty="0"/>
+              <a:t> all over again</a:t>
+            </a:r>
+          </a:p>
+          <a:p>
+            <a:r>
+              <a:rPr lang="en-US" dirty="0"/>
+              <a:t>Use .</a:t>
+            </a:r>
+            <a:r>
+              <a:rPr lang="en-US" dirty="0" err="1"/>
+              <a:t>cahce</a:t>
+            </a:r>
+            <a:r>
+              <a:rPr lang="en-US" dirty="0"/>
+              <a:t>() or .persist() </a:t>
+            </a:r>
+          </a:p>
+          <a:p>
+            <a:pPr lvl="1"/>
+            <a:r>
+              <a:rPr lang="en-US" dirty="0"/>
+              <a:t>What’s the difference?</a:t>
+            </a:r>
+          </a:p>
+          <a:p>
+            <a:pPr lvl="1"/>
+            <a:r>
+              <a:rPr lang="en-US" dirty="0"/>
+              <a:t>Persist() optionally lets you cache it to disk instead of just memory, just in case a node fails </a:t>
+            </a:r>
+          </a:p>
+        </p:txBody>
+      </p:sp>
+    </p:spTree>
+    <p:extLst>
+      <p:ext uri="{BB962C8B-B14F-4D97-AF65-F5344CB8AC3E}">
+        <p14:creationId xmlns:p14="http://schemas.microsoft.com/office/powerpoint/2010/main" val="556539515"/>
+      </p:ext>
+    </p:extLst>
+  </p:cSld>
+  <p:clrMapOvr>
+    <a:masterClrMapping/>
+  </p:clrMapOvr>
+</p:sld>
+</file>
+
+<file path=ppt/slides/slide84.xml><?xml version="1.0" encoding="utf-8"?>
+<p:sld xmlns:a="http://schemas.openxmlformats.org/drawingml/2006/main" xmlns:r="http://schemas.openxmlformats.org/officeDocument/2006/relationships" xmlns:p="http://schemas.openxmlformats.org/presentationml/2006/main">
+  <p:cSld>
+    <p:spTree>
+      <p:nvGrpSpPr>
+        <p:cNvPr id="1" name=""/>
+        <p:cNvGrpSpPr/>
+        <p:nvPr/>
+      </p:nvGrpSpPr>
+      <p:grpSpPr>
+        <a:xfrm>
+          <a:off x="0" y="0"/>
+          <a:ext cx="0" cy="0"/>
+          <a:chOff x="0" y="0"/>
+          <a:chExt cx="0" cy="0"/>
+        </a:xfrm>
+      </p:grpSpPr>
+      <p:sp>
+        <p:nvSpPr>
+          <p:cNvPr id="2" name="Title 1">
+            <a:extLst>
+              <a:ext uri="{FF2B5EF4-FFF2-40B4-BE49-F238E27FC236}">
                 <a16:creationId xmlns:a16="http://schemas.microsoft.com/office/drawing/2014/main" id="{13FD209A-F9B4-1093-DE6B-8420F1E02F70}"/>
               </a:ext>
             </a:extLst>
@@ -21723,7 +22698,7 @@
 </p:sld>
 </file>
 
-<file path=ppt/slides/slide81.xml><?xml version="1.0" encoding="utf-8"?>
+<file path=ppt/slides/slide85.xml><?xml version="1.0" encoding="utf-8"?>
 <p:sld xmlns:a="http://schemas.openxmlformats.org/drawingml/2006/main" xmlns:r="http://schemas.openxmlformats.org/officeDocument/2006/relationships" xmlns:p="http://schemas.openxmlformats.org/presentationml/2006/main">
   <p:cSld>
     <p:spTree>
@@ -21931,7 +22906,7 @@
 </p:sld>
 </file>
 
-<file path=ppt/slides/slide82.xml><?xml version="1.0" encoding="utf-8"?>
+<file path=ppt/slides/slide86.xml><?xml version="1.0" encoding="utf-8"?>
 <p:sld xmlns:a="http://schemas.openxmlformats.org/drawingml/2006/main" xmlns:r="http://schemas.openxmlformats.org/officeDocument/2006/relationships" xmlns:p="http://schemas.openxmlformats.org/presentationml/2006/main">
   <p:cSld>
     <p:spTree>
@@ -22054,7 +23029,7 @@
 </p:sld>
 </file>
 
-<file path=ppt/slides/slide83.xml><?xml version="1.0" encoding="utf-8"?>
+<file path=ppt/slides/slide87.xml><?xml version="1.0" encoding="utf-8"?>
 <p:sld xmlns:a="http://schemas.openxmlformats.org/drawingml/2006/main" xmlns:r="http://schemas.openxmlformats.org/officeDocument/2006/relationships" xmlns:p="http://schemas.openxmlformats.org/presentationml/2006/main">
   <p:cSld>
     <p:spTree>
@@ -22257,7 +23232,7 @@
 </p:sld>
 </file>
 
-<file path=ppt/slides/slide84.xml><?xml version="1.0" encoding="utf-8"?>
+<file path=ppt/slides/slide88.xml><?xml version="1.0" encoding="utf-8"?>
 <p:sld xmlns:a="http://schemas.openxmlformats.org/drawingml/2006/main" xmlns:r="http://schemas.openxmlformats.org/officeDocument/2006/relationships" xmlns:p="http://schemas.openxmlformats.org/presentationml/2006/main">
   <p:cSld>
     <p:spTree>
@@ -22394,7 +23369,7 @@
 </p:sld>
 </file>
 
-<file path=ppt/slides/slide85.xml><?xml version="1.0" encoding="utf-8"?>
+<file path=ppt/slides/slide89.xml><?xml version="1.0" encoding="utf-8"?>
 <p:sld xmlns:a="http://schemas.openxmlformats.org/drawingml/2006/main" xmlns:r="http://schemas.openxmlformats.org/officeDocument/2006/relationships" xmlns:p="http://schemas.openxmlformats.org/presentationml/2006/main">
   <p:cSld>
     <p:spTree>
@@ -22465,776 +23440,6 @@
     <p:extLst>
       <p:ext uri="{BB962C8B-B14F-4D97-AF65-F5344CB8AC3E}">
         <p14:creationId xmlns:p14="http://schemas.microsoft.com/office/powerpoint/2010/main" val="1090181903"/>
-      </p:ext>
-    </p:extLst>
-  </p:cSld>
-  <p:clrMapOvr>
-    <a:masterClrMapping/>
-  </p:clrMapOvr>
-</p:sld>
-</file>
-
-<file path=ppt/slides/slide86.xml><?xml version="1.0" encoding="utf-8"?>
-<p:sld xmlns:a="http://schemas.openxmlformats.org/drawingml/2006/main" xmlns:r="http://schemas.openxmlformats.org/officeDocument/2006/relationships" xmlns:p="http://schemas.openxmlformats.org/presentationml/2006/main" show="0">
-  <p:cSld>
-    <p:spTree>
-      <p:nvGrpSpPr>
-        <p:cNvPr id="1" name=""/>
-        <p:cNvGrpSpPr/>
-        <p:nvPr/>
-      </p:nvGrpSpPr>
-      <p:grpSpPr>
-        <a:xfrm>
-          <a:off x="0" y="0"/>
-          <a:ext cx="0" cy="0"/>
-          <a:chOff x="0" y="0"/>
-          <a:chExt cx="0" cy="0"/>
-        </a:xfrm>
-      </p:grpSpPr>
-      <p:sp>
-        <p:nvSpPr>
-          <p:cNvPr id="2" name="Title 1">
-            <a:extLst>
-              <a:ext uri="{FF2B5EF4-FFF2-40B4-BE49-F238E27FC236}">
-                <a16:creationId xmlns:a16="http://schemas.microsoft.com/office/drawing/2014/main" id="{AC2C488F-53EE-158B-83F1-79F64C7EB47E}"/>
-              </a:ext>
-            </a:extLst>
-          </p:cNvPr>
-          <p:cNvSpPr>
-            <a:spLocks noGrp="1"/>
-          </p:cNvSpPr>
-          <p:nvPr>
-            <p:ph type="title"/>
-          </p:nvPr>
-        </p:nvSpPr>
-        <p:spPr/>
-        <p:txBody>
-          <a:bodyPr/>
-          <a:lstStyle/>
-          <a:p>
-            <a:r>
-              <a:rPr lang="en-US" dirty="0"/>
-              <a:t>Overview</a:t>
-            </a:r>
-          </a:p>
-        </p:txBody>
-      </p:sp>
-      <p:graphicFrame>
-        <p:nvGraphicFramePr>
-          <p:cNvPr id="5" name="Content Placeholder 2">
-            <a:extLst>
-              <a:ext uri="{FF2B5EF4-FFF2-40B4-BE49-F238E27FC236}">
-                <a16:creationId xmlns:a16="http://schemas.microsoft.com/office/drawing/2014/main" id="{DBCF0C0D-391B-0915-F0DA-93E9EAB33EAA}"/>
-              </a:ext>
-            </a:extLst>
-          </p:cNvPr>
-          <p:cNvGraphicFramePr>
-            <a:graphicFrameLocks noGrp="1"/>
-          </p:cNvGraphicFramePr>
-          <p:nvPr>
-            <p:ph idx="1"/>
-          </p:nvPr>
-        </p:nvGraphicFramePr>
-        <p:xfrm>
-          <a:off x="581192" y="2180496"/>
-          <a:ext cx="11029615" cy="3678303"/>
-        </p:xfrm>
-        <a:graphic>
-          <a:graphicData uri="http://schemas.openxmlformats.org/drawingml/2006/diagram">
-            <dgm:relIds xmlns:dgm="http://schemas.openxmlformats.org/drawingml/2006/diagram" xmlns:r="http://schemas.openxmlformats.org/officeDocument/2006/relationships" r:dm="rId2" r:lo="rId3" r:qs="rId4" r:cs="rId5"/>
-          </a:graphicData>
-        </a:graphic>
-      </p:graphicFrame>
-    </p:spTree>
-    <p:extLst>
-      <p:ext uri="{BB962C8B-B14F-4D97-AF65-F5344CB8AC3E}">
-        <p14:creationId xmlns:p14="http://schemas.microsoft.com/office/powerpoint/2010/main" val="3663456343"/>
-      </p:ext>
-    </p:extLst>
-  </p:cSld>
-  <p:clrMapOvr>
-    <a:masterClrMapping/>
-  </p:clrMapOvr>
-</p:sld>
-</file>
-
-<file path=ppt/slides/slide87.xml><?xml version="1.0" encoding="utf-8"?>
-<p:sld xmlns:a="http://schemas.openxmlformats.org/drawingml/2006/main" xmlns:r="http://schemas.openxmlformats.org/officeDocument/2006/relationships" xmlns:p="http://schemas.openxmlformats.org/presentationml/2006/main" show="0">
-  <p:cSld>
-    <p:spTree>
-      <p:nvGrpSpPr>
-        <p:cNvPr id="1" name=""/>
-        <p:cNvGrpSpPr/>
-        <p:nvPr/>
-      </p:nvGrpSpPr>
-      <p:grpSpPr>
-        <a:xfrm>
-          <a:off x="0" y="0"/>
-          <a:ext cx="0" cy="0"/>
-          <a:chOff x="0" y="0"/>
-          <a:chExt cx="0" cy="0"/>
-        </a:xfrm>
-      </p:grpSpPr>
-      <p:sp>
-        <p:nvSpPr>
-          <p:cNvPr id="2" name="Title 1">
-            <a:extLst>
-              <a:ext uri="{FF2B5EF4-FFF2-40B4-BE49-F238E27FC236}">
-                <a16:creationId xmlns:a16="http://schemas.microsoft.com/office/drawing/2014/main" id="{1DD3C9AD-CEB2-5802-6F5E-C97C9360809F}"/>
-              </a:ext>
-            </a:extLst>
-          </p:cNvPr>
-          <p:cNvSpPr>
-            <a:spLocks noGrp="1"/>
-          </p:cNvSpPr>
-          <p:nvPr>
-            <p:ph type="title"/>
-          </p:nvPr>
-        </p:nvSpPr>
-        <p:spPr/>
-        <p:txBody>
-          <a:bodyPr/>
-          <a:lstStyle/>
-          <a:p>
-            <a:r>
-              <a:rPr lang="en-US" dirty="0"/>
-              <a:t>Introductions</a:t>
-            </a:r>
-          </a:p>
-        </p:txBody>
-      </p:sp>
-      <p:sp>
-        <p:nvSpPr>
-          <p:cNvPr id="3" name="Content Placeholder 2">
-            <a:extLst>
-              <a:ext uri="{FF2B5EF4-FFF2-40B4-BE49-F238E27FC236}">
-                <a16:creationId xmlns:a16="http://schemas.microsoft.com/office/drawing/2014/main" id="{67C6C32F-873A-1EB8-6503-0C374A94874A}"/>
-              </a:ext>
-            </a:extLst>
-          </p:cNvPr>
-          <p:cNvSpPr>
-            <a:spLocks noGrp="1"/>
-          </p:cNvSpPr>
-          <p:nvPr>
-            <p:ph idx="1"/>
-          </p:nvPr>
-        </p:nvSpPr>
-        <p:spPr>
-          <a:xfrm>
-            <a:off x="581192" y="2180496"/>
-            <a:ext cx="11029615" cy="3972217"/>
-          </a:xfrm>
-        </p:spPr>
-        <p:txBody>
-          <a:bodyPr>
-            <a:normAutofit/>
-          </a:bodyPr>
-          <a:lstStyle/>
-          <a:p>
-            <a:pPr marL="305435" indent="-305435"/>
-            <a:r>
-              <a:rPr lang="en-US" dirty="0">
-                <a:latin typeface="Gill Sans MT"/>
-                <a:cs typeface="Segoe UI"/>
-              </a:rPr>
-              <a:t>I’ve been at Revature 4 years</a:t>
-            </a:r>
-          </a:p>
-          <a:p>
-            <a:pPr marL="305435" indent="-305435"/>
-            <a:r>
-              <a:rPr lang="en-US" dirty="0">
-                <a:latin typeface="Gill Sans MT"/>
-                <a:cs typeface="Segoe UI"/>
-              </a:rPr>
-              <a:t>I teach Salesforce, ServiceNow, &amp; .NET</a:t>
-            </a:r>
-          </a:p>
-          <a:p>
-            <a:pPr marL="305435" indent="-305435"/>
-            <a:r>
-              <a:rPr lang="en-US" dirty="0">
-                <a:latin typeface="Gill Sans MT"/>
-                <a:cs typeface="Segoe UI"/>
-              </a:rPr>
-              <a:t>Currently hold the CSA certification</a:t>
-            </a:r>
-          </a:p>
-          <a:p>
-            <a:pPr marL="305435" indent="-305435"/>
-            <a:r>
-              <a:rPr lang="en-US" dirty="0">
-                <a:latin typeface="Gill Sans MT"/>
-                <a:cs typeface="Segoe UI"/>
-              </a:rPr>
-              <a:t>Current favorite game: WoW </a:t>
-            </a:r>
-          </a:p>
-        </p:txBody>
-      </p:sp>
-      <p:pic>
-        <p:nvPicPr>
-          <p:cNvPr id="5" name="Picture 4" descr="A person in a suit&#10;&#10;AI-generated content may be incorrect.">
-            <a:extLst>
-              <a:ext uri="{FF2B5EF4-FFF2-40B4-BE49-F238E27FC236}">
-                <a16:creationId xmlns:a16="http://schemas.microsoft.com/office/drawing/2014/main" id="{CC025A48-B339-8A17-FC35-75E691CF8E32}"/>
-              </a:ext>
-            </a:extLst>
-          </p:cNvPr>
-          <p:cNvPicPr>
-            <a:picLocks noChangeAspect="1"/>
-          </p:cNvPicPr>
-          <p:nvPr/>
-        </p:nvPicPr>
-        <p:blipFill>
-          <a:blip r:embed="rId2">
-            <a:extLst>
-              <a:ext uri="{28A0092B-C50C-407E-A947-70E740481C1C}">
-                <a14:useLocalDpi xmlns:a14="http://schemas.microsoft.com/office/drawing/2010/main" val="0"/>
-              </a:ext>
-            </a:extLst>
-          </a:blip>
-          <a:stretch>
-            <a:fillRect/>
-          </a:stretch>
-        </p:blipFill>
-        <p:spPr>
-          <a:xfrm>
-            <a:off x="6800850" y="2737854"/>
-            <a:ext cx="2857500" cy="2857500"/>
-          </a:xfrm>
-          <a:prstGeom prst="rect">
-            <a:avLst/>
-          </a:prstGeom>
-        </p:spPr>
-      </p:pic>
-    </p:spTree>
-    <p:extLst>
-      <p:ext uri="{BB962C8B-B14F-4D97-AF65-F5344CB8AC3E}">
-        <p14:creationId xmlns:p14="http://schemas.microsoft.com/office/powerpoint/2010/main" val="487246811"/>
-      </p:ext>
-    </p:extLst>
-  </p:cSld>
-  <p:clrMapOvr>
-    <a:masterClrMapping/>
-  </p:clrMapOvr>
-</p:sld>
-</file>
-
-<file path=ppt/slides/slide88.xml><?xml version="1.0" encoding="utf-8"?>
-<p:sld xmlns:a="http://schemas.openxmlformats.org/drawingml/2006/main" xmlns:r="http://schemas.openxmlformats.org/officeDocument/2006/relationships" xmlns:p="http://schemas.openxmlformats.org/presentationml/2006/main" show="0">
-  <p:cSld>
-    <p:bg>
-      <p:bgPr>
-        <a:solidFill>
-          <a:schemeClr val="bg1"/>
-        </a:solidFill>
-        <a:effectLst/>
-      </p:bgPr>
-    </p:bg>
-    <p:spTree>
-      <p:nvGrpSpPr>
-        <p:cNvPr id="1" name=""/>
-        <p:cNvGrpSpPr/>
-        <p:nvPr/>
-      </p:nvGrpSpPr>
-      <p:grpSpPr>
-        <a:xfrm>
-          <a:off x="0" y="0"/>
-          <a:ext cx="0" cy="0"/>
-          <a:chOff x="0" y="0"/>
-          <a:chExt cx="0" cy="0"/>
-        </a:xfrm>
-      </p:grpSpPr>
-      <p:sp>
-        <p:nvSpPr>
-          <p:cNvPr id="2" name="Title 1">
-            <a:extLst>
-              <a:ext uri="{FF2B5EF4-FFF2-40B4-BE49-F238E27FC236}">
-                <a16:creationId xmlns:a16="http://schemas.microsoft.com/office/drawing/2014/main" id="{8E398399-EA03-424C-8D31-C6B6817F6EA9}"/>
-              </a:ext>
-            </a:extLst>
-          </p:cNvPr>
-          <p:cNvSpPr>
-            <a:spLocks noGrp="1"/>
-          </p:cNvSpPr>
-          <p:nvPr>
-            <p:ph type="title"/>
-          </p:nvPr>
-        </p:nvSpPr>
-        <p:spPr>
-          <a:xfrm>
-            <a:off x="581192" y="702156"/>
-            <a:ext cx="11029616" cy="1013800"/>
-          </a:xfrm>
-        </p:spPr>
-        <p:txBody>
-          <a:bodyPr>
-            <a:normAutofit/>
-          </a:bodyPr>
-          <a:lstStyle/>
-          <a:p>
-            <a:r>
-              <a:rPr lang="en-US" dirty="0"/>
-              <a:t>What to Expect</a:t>
-            </a:r>
-          </a:p>
-        </p:txBody>
-      </p:sp>
-      <p:sp>
-        <p:nvSpPr>
-          <p:cNvPr id="11" name="Rectangle 10">
-            <a:extLst>
-              <a:ext uri="{FF2B5EF4-FFF2-40B4-BE49-F238E27FC236}">
-                <a16:creationId xmlns:a16="http://schemas.microsoft.com/office/drawing/2014/main" id="{9AE5ECF4-F003-4F1C-B9D1-DBB1C70A8F2D}"/>
-              </a:ext>
-              <a:ext uri="{C183D7F6-B498-43B3-948B-1728B52AA6E4}">
-                <adec:decorative xmlns:adec="http://schemas.microsoft.com/office/drawing/2017/decorative" val="1"/>
-              </a:ext>
-            </a:extLst>
-          </p:cNvPr>
-          <p:cNvSpPr>
-            <a:spLocks noGrp="1" noRot="1" noChangeAspect="1" noMove="1" noResize="1" noEditPoints="1" noAdjustHandles="1" noChangeArrowheads="1" noChangeShapeType="1" noTextEdit="1"/>
-          </p:cNvSpPr>
-          <p:nvPr>
-            <p:extLst>
-              <p:ext uri="{386F3935-93C4-4BCD-93E2-E3B085C9AB24}">
-                <p16:designElem xmlns:p16="http://schemas.microsoft.com/office/powerpoint/2015/main" val="1"/>
-              </p:ext>
-            </p:extLst>
-          </p:nvPr>
-        </p:nvSpPr>
-        <p:spPr>
-          <a:xfrm>
-            <a:off x="446534" y="2180496"/>
-            <a:ext cx="3703320" cy="4045683"/>
-          </a:xfrm>
-          <a:prstGeom prst="rect">
-            <a:avLst/>
-          </a:prstGeom>
-          <a:solidFill>
-            <a:schemeClr val="bg1"/>
-          </a:solidFill>
-          <a:ln w="38100">
-            <a:solidFill>
-              <a:schemeClr val="accent1"/>
-            </a:solidFill>
-          </a:ln>
-        </p:spPr>
-        <p:style>
-          <a:lnRef idx="2">
-            <a:schemeClr val="accent1">
-              <a:shade val="50000"/>
-            </a:schemeClr>
-          </a:lnRef>
-          <a:fillRef idx="1">
-            <a:schemeClr val="accent1"/>
-          </a:fillRef>
-          <a:effectRef idx="0">
-            <a:schemeClr val="accent1"/>
-          </a:effectRef>
-          <a:fontRef idx="minor">
-            <a:schemeClr val="lt1"/>
-          </a:fontRef>
-        </p:style>
-        <p:txBody>
-          <a:bodyPr rtlCol="0" anchor="ctr"/>
-          <a:lstStyle/>
-          <a:p>
-            <a:pPr algn="ctr"/>
-            <a:endParaRPr lang="en-US"/>
-          </a:p>
-        </p:txBody>
-      </p:sp>
-      <p:pic>
-        <p:nvPicPr>
-          <p:cNvPr id="6" name="Picture 5" descr="A logo of a coffee cup&#10;&#10;AI-generated content may be incorrect.">
-            <a:extLst>
-              <a:ext uri="{FF2B5EF4-FFF2-40B4-BE49-F238E27FC236}">
-                <a16:creationId xmlns:a16="http://schemas.microsoft.com/office/drawing/2014/main" id="{1443CB83-FEC9-7C45-7E5D-605CF7E416A7}"/>
-              </a:ext>
-            </a:extLst>
-          </p:cNvPr>
-          <p:cNvPicPr>
-            <a:picLocks noChangeAspect="1"/>
-          </p:cNvPicPr>
-          <p:nvPr/>
-        </p:nvPicPr>
-        <p:blipFill>
-          <a:blip r:embed="rId2" cstate="print">
-            <a:extLst>
-              <a:ext uri="{28A0092B-C50C-407E-A947-70E740481C1C}">
-                <a14:useLocalDpi xmlns:a14="http://schemas.microsoft.com/office/drawing/2010/main" val="0"/>
-              </a:ext>
-            </a:extLst>
-          </a:blip>
-          <a:stretch>
-            <a:fillRect/>
-          </a:stretch>
-        </p:blipFill>
-        <p:spPr>
-          <a:xfrm>
-            <a:off x="887110" y="2361057"/>
-            <a:ext cx="2845404" cy="1778378"/>
-          </a:xfrm>
-          <a:prstGeom prst="rect">
-            <a:avLst/>
-          </a:prstGeom>
-        </p:spPr>
-      </p:pic>
-      <p:pic>
-        <p:nvPicPr>
-          <p:cNvPr id="4" name="Picture 3" descr="ServiceNow logo transparent PNG - StickPNG">
-            <a:extLst>
-              <a:ext uri="{FF2B5EF4-FFF2-40B4-BE49-F238E27FC236}">
-                <a16:creationId xmlns:a16="http://schemas.microsoft.com/office/drawing/2014/main" id="{9720925D-B793-4C31-82D2-B813C1DC8C88}"/>
-              </a:ext>
-            </a:extLst>
-          </p:cNvPr>
-          <p:cNvPicPr>
-            <a:picLocks noChangeAspect="1"/>
-          </p:cNvPicPr>
-          <p:nvPr/>
-        </p:nvPicPr>
-        <p:blipFill>
-          <a:blip r:embed="rId3"/>
-          <a:stretch>
-            <a:fillRect/>
-          </a:stretch>
-        </p:blipFill>
-        <p:spPr>
-          <a:xfrm>
-            <a:off x="657225" y="4836014"/>
-            <a:ext cx="3305175" cy="570142"/>
-          </a:xfrm>
-          <a:prstGeom prst="rect">
-            <a:avLst/>
-          </a:prstGeom>
-        </p:spPr>
-      </p:pic>
-      <p:sp>
-        <p:nvSpPr>
-          <p:cNvPr id="3" name="Content Placeholder 2">
-            <a:extLst>
-              <a:ext uri="{FF2B5EF4-FFF2-40B4-BE49-F238E27FC236}">
-                <a16:creationId xmlns:a16="http://schemas.microsoft.com/office/drawing/2014/main" id="{F6826B51-4938-4211-37F2-2A081C5D1792}"/>
-              </a:ext>
-            </a:extLst>
-          </p:cNvPr>
-          <p:cNvSpPr>
-            <a:spLocks noGrp="1"/>
-          </p:cNvSpPr>
-          <p:nvPr>
-            <p:ph idx="1"/>
-          </p:nvPr>
-        </p:nvSpPr>
-        <p:spPr>
-          <a:xfrm>
-            <a:off x="4505325" y="2180496"/>
-            <a:ext cx="7105481" cy="4045683"/>
-          </a:xfrm>
-        </p:spPr>
-        <p:txBody>
-          <a:bodyPr>
-            <a:normAutofit/>
-          </a:bodyPr>
-          <a:lstStyle/>
-          <a:p>
-            <a:pPr marL="305435" indent="-305435"/>
-            <a:r>
-              <a:rPr lang="en-US" dirty="0"/>
-              <a:t>13-week course</a:t>
-            </a:r>
-          </a:p>
-          <a:p>
-            <a:pPr marL="629435" lvl="1" indent="-305435"/>
-            <a:r>
-              <a:rPr lang="en-US" dirty="0"/>
-              <a:t>First 8 weeks is ServiceNow</a:t>
-            </a:r>
-          </a:p>
-          <a:p>
-            <a:pPr marL="629435" lvl="1" indent="-305435"/>
-            <a:r>
-              <a:rPr lang="en-US" dirty="0"/>
-              <a:t>Remaining 5 weeks will focus on Java</a:t>
-            </a:r>
-          </a:p>
-          <a:p>
-            <a:pPr marL="305435" indent="-305435"/>
-            <a:r>
-              <a:rPr lang="en-US" dirty="0"/>
-              <a:t>Various Assessment Types</a:t>
-            </a:r>
-          </a:p>
-          <a:p>
-            <a:pPr marL="629435" lvl="1" indent="-305435"/>
-            <a:r>
-              <a:rPr lang="en-US" dirty="0"/>
-              <a:t>Exams – Multiple Choice, Multiple Select, Short Answers</a:t>
-            </a:r>
-          </a:p>
-          <a:p>
-            <a:pPr marL="629435" lvl="1" indent="-305435"/>
-            <a:r>
-              <a:rPr lang="en-US" dirty="0"/>
-              <a:t>QC – Panel-Type Live Interviews</a:t>
-            </a:r>
-          </a:p>
-          <a:p>
-            <a:pPr marL="629435" lvl="1" indent="-305435"/>
-            <a:r>
-              <a:rPr lang="en-US" dirty="0"/>
-              <a:t>1-on-1s – Evaluations completed by the trainer (Loom or face-to-face)</a:t>
-            </a:r>
-          </a:p>
-          <a:p>
-            <a:pPr marL="629435" lvl="1" indent="-305435"/>
-            <a:r>
-              <a:rPr lang="en-US" dirty="0"/>
-              <a:t>Projects – Assigned project work that covers discussed topics (keep up day-to-day and you won’t be behind)</a:t>
-            </a:r>
-          </a:p>
-        </p:txBody>
-      </p:sp>
-    </p:spTree>
-    <p:extLst>
-      <p:ext uri="{BB962C8B-B14F-4D97-AF65-F5344CB8AC3E}">
-        <p14:creationId xmlns:p14="http://schemas.microsoft.com/office/powerpoint/2010/main" val="2540692116"/>
-      </p:ext>
-    </p:extLst>
-  </p:cSld>
-  <p:clrMapOvr>
-    <a:masterClrMapping/>
-  </p:clrMapOvr>
-</p:sld>
-</file>
-
-<file path=ppt/slides/slide89.xml><?xml version="1.0" encoding="utf-8"?>
-<p:sld xmlns:a="http://schemas.openxmlformats.org/drawingml/2006/main" xmlns:r="http://schemas.openxmlformats.org/officeDocument/2006/relationships" xmlns:p="http://schemas.openxmlformats.org/presentationml/2006/main" show="0">
-  <p:cSld>
-    <p:spTree>
-      <p:nvGrpSpPr>
-        <p:cNvPr id="1" name=""/>
-        <p:cNvGrpSpPr/>
-        <p:nvPr/>
-      </p:nvGrpSpPr>
-      <p:grpSpPr>
-        <a:xfrm>
-          <a:off x="0" y="0"/>
-          <a:ext cx="0" cy="0"/>
-          <a:chOff x="0" y="0"/>
-          <a:chExt cx="0" cy="0"/>
-        </a:xfrm>
-      </p:grpSpPr>
-      <p:sp>
-        <p:nvSpPr>
-          <p:cNvPr id="2" name="Title 1">
-            <a:extLst>
-              <a:ext uri="{FF2B5EF4-FFF2-40B4-BE49-F238E27FC236}">
-                <a16:creationId xmlns:a16="http://schemas.microsoft.com/office/drawing/2014/main" id="{04992356-009E-B671-396C-A5A470486D9E}"/>
-              </a:ext>
-            </a:extLst>
-          </p:cNvPr>
-          <p:cNvSpPr>
-            <a:spLocks noGrp="1"/>
-          </p:cNvSpPr>
-          <p:nvPr>
-            <p:ph type="title"/>
-          </p:nvPr>
-        </p:nvSpPr>
-        <p:spPr/>
-        <p:txBody>
-          <a:bodyPr/>
-          <a:lstStyle/>
-          <a:p>
-            <a:r>
-              <a:rPr lang="en-US" dirty="0"/>
-              <a:t>How to Excel in this Course</a:t>
-            </a:r>
-          </a:p>
-        </p:txBody>
-      </p:sp>
-      <p:sp>
-        <p:nvSpPr>
-          <p:cNvPr id="3" name="Content Placeholder 2">
-            <a:extLst>
-              <a:ext uri="{FF2B5EF4-FFF2-40B4-BE49-F238E27FC236}">
-                <a16:creationId xmlns:a16="http://schemas.microsoft.com/office/drawing/2014/main" id="{429EFB58-5DAE-C3C2-2D49-7AE40E75910D}"/>
-              </a:ext>
-            </a:extLst>
-          </p:cNvPr>
-          <p:cNvSpPr>
-            <a:spLocks noGrp="1"/>
-          </p:cNvSpPr>
-          <p:nvPr>
-            <p:ph idx="1"/>
-          </p:nvPr>
-        </p:nvSpPr>
-        <p:spPr>
-          <a:xfrm>
-            <a:off x="581191" y="2052918"/>
-            <a:ext cx="11029615" cy="1681246"/>
-          </a:xfrm>
-        </p:spPr>
-        <p:txBody>
-          <a:bodyPr/>
-          <a:lstStyle/>
-          <a:p>
-            <a:r>
-              <a:rPr lang="en-US" dirty="0"/>
-              <a:t>We will use slide decks throughout the course. </a:t>
-            </a:r>
-          </a:p>
-          <a:p>
-            <a:r>
-              <a:rPr lang="en-US" dirty="0"/>
-              <a:t>If it is on the slide deck, it is important, and you should consider writing it down. </a:t>
-            </a:r>
-          </a:p>
-          <a:p>
-            <a:r>
-              <a:rPr lang="en-US" dirty="0"/>
-              <a:t>Sometimes, you may see a definition, like this:</a:t>
-            </a:r>
-          </a:p>
-          <a:p>
-            <a:endParaRPr lang="en-US" dirty="0"/>
-          </a:p>
-        </p:txBody>
-      </p:sp>
-      <p:sp>
-        <p:nvSpPr>
-          <p:cNvPr id="4" name="TextBox 3">
-            <a:extLst>
-              <a:ext uri="{FF2B5EF4-FFF2-40B4-BE49-F238E27FC236}">
-                <a16:creationId xmlns:a16="http://schemas.microsoft.com/office/drawing/2014/main" id="{0352E508-0D10-9772-84C7-FCC523BB1A8A}"/>
-              </a:ext>
-            </a:extLst>
-          </p:cNvPr>
-          <p:cNvSpPr txBox="1"/>
-          <p:nvPr/>
-        </p:nvSpPr>
-        <p:spPr>
-          <a:xfrm>
-            <a:off x="1739151" y="3429000"/>
-            <a:ext cx="8713694" cy="646331"/>
-          </a:xfrm>
-          <a:prstGeom prst="rect">
-            <a:avLst/>
-          </a:prstGeom>
-          <a:noFill/>
-        </p:spPr>
-        <p:txBody>
-          <a:bodyPr wrap="square" rtlCol="0">
-            <a:spAutoFit/>
-          </a:bodyPr>
-          <a:lstStyle/>
-          <a:p>
-            <a:r>
-              <a:rPr lang="en-US" dirty="0"/>
-              <a:t>Definition: </a:t>
-            </a:r>
-            <a:r>
-              <a:rPr lang="en-US" dirty="0">
-                <a:solidFill>
-                  <a:srgbClr val="00B050"/>
-                </a:solidFill>
-              </a:rPr>
-              <a:t>ServiceNow</a:t>
-            </a:r>
-            <a:r>
-              <a:rPr lang="en-US" dirty="0"/>
-              <a:t> – A cloud-based, ITSM platform that helps organizations manage and automate their work processes across IT, HR, Customer Service, and more. </a:t>
-            </a:r>
-          </a:p>
-        </p:txBody>
-      </p:sp>
-      <p:sp>
-        <p:nvSpPr>
-          <p:cNvPr id="5" name="TextBox 4">
-            <a:extLst>
-              <a:ext uri="{FF2B5EF4-FFF2-40B4-BE49-F238E27FC236}">
-                <a16:creationId xmlns:a16="http://schemas.microsoft.com/office/drawing/2014/main" id="{A54BB974-FD75-0303-8FBE-56D4DFC4209D}"/>
-              </a:ext>
-            </a:extLst>
-          </p:cNvPr>
-          <p:cNvSpPr txBox="1"/>
-          <p:nvPr/>
-        </p:nvSpPr>
-        <p:spPr>
-          <a:xfrm>
-            <a:off x="581190" y="4361691"/>
-            <a:ext cx="8858645" cy="1477328"/>
-          </a:xfrm>
-          <a:prstGeom prst="rect">
-            <a:avLst/>
-          </a:prstGeom>
-          <a:noFill/>
-        </p:spPr>
-        <p:txBody>
-          <a:bodyPr wrap="square" rtlCol="0">
-            <a:spAutoFit/>
-          </a:bodyPr>
-          <a:lstStyle/>
-          <a:p>
-            <a:pPr marL="285750" indent="-285750">
-              <a:buClr>
-                <a:schemeClr val="accent2"/>
-              </a:buClr>
-              <a:buFont typeface="Wingdings" panose="05000000000000000000" pitchFamily="2" charset="2"/>
-              <a:buChar char="§"/>
-            </a:pPr>
-            <a:r>
-              <a:rPr lang="en-US" dirty="0"/>
-              <a:t>If you see a definition:</a:t>
-            </a:r>
-          </a:p>
-          <a:p>
-            <a:pPr marL="742950" lvl="1" indent="-285750">
-              <a:buClr>
-                <a:schemeClr val="accent2"/>
-              </a:buClr>
-              <a:buFont typeface="Wingdings" panose="05000000000000000000" pitchFamily="2" charset="2"/>
-              <a:buChar char="§"/>
-            </a:pPr>
-            <a:r>
-              <a:rPr lang="en-US" dirty="0"/>
-              <a:t>Write it down</a:t>
-            </a:r>
-          </a:p>
-          <a:p>
-            <a:pPr marL="742950" lvl="1" indent="-285750">
-              <a:buClr>
-                <a:schemeClr val="accent2"/>
-              </a:buClr>
-              <a:buFont typeface="Wingdings" panose="05000000000000000000" pitchFamily="2" charset="2"/>
-              <a:buChar char="§"/>
-            </a:pPr>
-            <a:r>
-              <a:rPr lang="en-US" dirty="0"/>
-              <a:t>Write down what its context is in the larger scope</a:t>
-            </a:r>
-          </a:p>
-          <a:p>
-            <a:pPr marL="742950" lvl="1" indent="-285750">
-              <a:buClr>
-                <a:schemeClr val="accent2"/>
-              </a:buClr>
-              <a:buFont typeface="Wingdings" panose="05000000000000000000" pitchFamily="2" charset="2"/>
-              <a:buChar char="§"/>
-            </a:pPr>
-            <a:r>
-              <a:rPr lang="en-US" dirty="0"/>
-              <a:t>E.G. ServiceNow is often just one piece in an enterprise system.  An organization may have many off-the-shelf software products that may integrate with ServiceNow.</a:t>
-            </a:r>
-          </a:p>
-        </p:txBody>
-      </p:sp>
-    </p:spTree>
-    <p:extLst>
-      <p:ext uri="{BB962C8B-B14F-4D97-AF65-F5344CB8AC3E}">
-        <p14:creationId xmlns:p14="http://schemas.microsoft.com/office/powerpoint/2010/main" val="3870370440"/>
       </p:ext>
     </p:extLst>
   </p:cSld>
@@ -23751,6 +23956,776 @@
 </file>
 
 <file path=ppt/slides/slide90.xml><?xml version="1.0" encoding="utf-8"?>
+<p:sld xmlns:a="http://schemas.openxmlformats.org/drawingml/2006/main" xmlns:r="http://schemas.openxmlformats.org/officeDocument/2006/relationships" xmlns:p="http://schemas.openxmlformats.org/presentationml/2006/main" show="0">
+  <p:cSld>
+    <p:spTree>
+      <p:nvGrpSpPr>
+        <p:cNvPr id="1" name=""/>
+        <p:cNvGrpSpPr/>
+        <p:nvPr/>
+      </p:nvGrpSpPr>
+      <p:grpSpPr>
+        <a:xfrm>
+          <a:off x="0" y="0"/>
+          <a:ext cx="0" cy="0"/>
+          <a:chOff x="0" y="0"/>
+          <a:chExt cx="0" cy="0"/>
+        </a:xfrm>
+      </p:grpSpPr>
+      <p:sp>
+        <p:nvSpPr>
+          <p:cNvPr id="2" name="Title 1">
+            <a:extLst>
+              <a:ext uri="{FF2B5EF4-FFF2-40B4-BE49-F238E27FC236}">
+                <a16:creationId xmlns:a16="http://schemas.microsoft.com/office/drawing/2014/main" id="{AC2C488F-53EE-158B-83F1-79F64C7EB47E}"/>
+              </a:ext>
+            </a:extLst>
+          </p:cNvPr>
+          <p:cNvSpPr>
+            <a:spLocks noGrp="1"/>
+          </p:cNvSpPr>
+          <p:nvPr>
+            <p:ph type="title"/>
+          </p:nvPr>
+        </p:nvSpPr>
+        <p:spPr/>
+        <p:txBody>
+          <a:bodyPr/>
+          <a:lstStyle/>
+          <a:p>
+            <a:r>
+              <a:rPr lang="en-US" dirty="0"/>
+              <a:t>Overview</a:t>
+            </a:r>
+          </a:p>
+        </p:txBody>
+      </p:sp>
+      <p:graphicFrame>
+        <p:nvGraphicFramePr>
+          <p:cNvPr id="5" name="Content Placeholder 2">
+            <a:extLst>
+              <a:ext uri="{FF2B5EF4-FFF2-40B4-BE49-F238E27FC236}">
+                <a16:creationId xmlns:a16="http://schemas.microsoft.com/office/drawing/2014/main" id="{DBCF0C0D-391B-0915-F0DA-93E9EAB33EAA}"/>
+              </a:ext>
+            </a:extLst>
+          </p:cNvPr>
+          <p:cNvGraphicFramePr>
+            <a:graphicFrameLocks noGrp="1"/>
+          </p:cNvGraphicFramePr>
+          <p:nvPr>
+            <p:ph idx="1"/>
+          </p:nvPr>
+        </p:nvGraphicFramePr>
+        <p:xfrm>
+          <a:off x="581192" y="2180496"/>
+          <a:ext cx="11029615" cy="3678303"/>
+        </p:xfrm>
+        <a:graphic>
+          <a:graphicData uri="http://schemas.openxmlformats.org/drawingml/2006/diagram">
+            <dgm:relIds xmlns:dgm="http://schemas.openxmlformats.org/drawingml/2006/diagram" xmlns:r="http://schemas.openxmlformats.org/officeDocument/2006/relationships" r:dm="rId2" r:lo="rId3" r:qs="rId4" r:cs="rId5"/>
+          </a:graphicData>
+        </a:graphic>
+      </p:graphicFrame>
+    </p:spTree>
+    <p:extLst>
+      <p:ext uri="{BB962C8B-B14F-4D97-AF65-F5344CB8AC3E}">
+        <p14:creationId xmlns:p14="http://schemas.microsoft.com/office/powerpoint/2010/main" val="3663456343"/>
+      </p:ext>
+    </p:extLst>
+  </p:cSld>
+  <p:clrMapOvr>
+    <a:masterClrMapping/>
+  </p:clrMapOvr>
+</p:sld>
+</file>
+
+<file path=ppt/slides/slide91.xml><?xml version="1.0" encoding="utf-8"?>
+<p:sld xmlns:a="http://schemas.openxmlformats.org/drawingml/2006/main" xmlns:r="http://schemas.openxmlformats.org/officeDocument/2006/relationships" xmlns:p="http://schemas.openxmlformats.org/presentationml/2006/main" show="0">
+  <p:cSld>
+    <p:spTree>
+      <p:nvGrpSpPr>
+        <p:cNvPr id="1" name=""/>
+        <p:cNvGrpSpPr/>
+        <p:nvPr/>
+      </p:nvGrpSpPr>
+      <p:grpSpPr>
+        <a:xfrm>
+          <a:off x="0" y="0"/>
+          <a:ext cx="0" cy="0"/>
+          <a:chOff x="0" y="0"/>
+          <a:chExt cx="0" cy="0"/>
+        </a:xfrm>
+      </p:grpSpPr>
+      <p:sp>
+        <p:nvSpPr>
+          <p:cNvPr id="2" name="Title 1">
+            <a:extLst>
+              <a:ext uri="{FF2B5EF4-FFF2-40B4-BE49-F238E27FC236}">
+                <a16:creationId xmlns:a16="http://schemas.microsoft.com/office/drawing/2014/main" id="{1DD3C9AD-CEB2-5802-6F5E-C97C9360809F}"/>
+              </a:ext>
+            </a:extLst>
+          </p:cNvPr>
+          <p:cNvSpPr>
+            <a:spLocks noGrp="1"/>
+          </p:cNvSpPr>
+          <p:nvPr>
+            <p:ph type="title"/>
+          </p:nvPr>
+        </p:nvSpPr>
+        <p:spPr/>
+        <p:txBody>
+          <a:bodyPr/>
+          <a:lstStyle/>
+          <a:p>
+            <a:r>
+              <a:rPr lang="en-US" dirty="0"/>
+              <a:t>Introductions</a:t>
+            </a:r>
+          </a:p>
+        </p:txBody>
+      </p:sp>
+      <p:sp>
+        <p:nvSpPr>
+          <p:cNvPr id="3" name="Content Placeholder 2">
+            <a:extLst>
+              <a:ext uri="{FF2B5EF4-FFF2-40B4-BE49-F238E27FC236}">
+                <a16:creationId xmlns:a16="http://schemas.microsoft.com/office/drawing/2014/main" id="{67C6C32F-873A-1EB8-6503-0C374A94874A}"/>
+              </a:ext>
+            </a:extLst>
+          </p:cNvPr>
+          <p:cNvSpPr>
+            <a:spLocks noGrp="1"/>
+          </p:cNvSpPr>
+          <p:nvPr>
+            <p:ph idx="1"/>
+          </p:nvPr>
+        </p:nvSpPr>
+        <p:spPr>
+          <a:xfrm>
+            <a:off x="581192" y="2180496"/>
+            <a:ext cx="11029615" cy="3972217"/>
+          </a:xfrm>
+        </p:spPr>
+        <p:txBody>
+          <a:bodyPr>
+            <a:normAutofit/>
+          </a:bodyPr>
+          <a:lstStyle/>
+          <a:p>
+            <a:pPr marL="305435" indent="-305435"/>
+            <a:r>
+              <a:rPr lang="en-US" dirty="0">
+                <a:latin typeface="Gill Sans MT"/>
+                <a:cs typeface="Segoe UI"/>
+              </a:rPr>
+              <a:t>I’ve been at Revature 4 years</a:t>
+            </a:r>
+          </a:p>
+          <a:p>
+            <a:pPr marL="305435" indent="-305435"/>
+            <a:r>
+              <a:rPr lang="en-US" dirty="0">
+                <a:latin typeface="Gill Sans MT"/>
+                <a:cs typeface="Segoe UI"/>
+              </a:rPr>
+              <a:t>I teach Salesforce, ServiceNow, &amp; .NET</a:t>
+            </a:r>
+          </a:p>
+          <a:p>
+            <a:pPr marL="305435" indent="-305435"/>
+            <a:r>
+              <a:rPr lang="en-US" dirty="0">
+                <a:latin typeface="Gill Sans MT"/>
+                <a:cs typeface="Segoe UI"/>
+              </a:rPr>
+              <a:t>Currently hold the CSA certification</a:t>
+            </a:r>
+          </a:p>
+          <a:p>
+            <a:pPr marL="305435" indent="-305435"/>
+            <a:r>
+              <a:rPr lang="en-US" dirty="0">
+                <a:latin typeface="Gill Sans MT"/>
+                <a:cs typeface="Segoe UI"/>
+              </a:rPr>
+              <a:t>Current favorite game: WoW </a:t>
+            </a:r>
+          </a:p>
+        </p:txBody>
+      </p:sp>
+      <p:pic>
+        <p:nvPicPr>
+          <p:cNvPr id="5" name="Picture 4" descr="A person in a suit&#10;&#10;AI-generated content may be incorrect.">
+            <a:extLst>
+              <a:ext uri="{FF2B5EF4-FFF2-40B4-BE49-F238E27FC236}">
+                <a16:creationId xmlns:a16="http://schemas.microsoft.com/office/drawing/2014/main" id="{CC025A48-B339-8A17-FC35-75E691CF8E32}"/>
+              </a:ext>
+            </a:extLst>
+          </p:cNvPr>
+          <p:cNvPicPr>
+            <a:picLocks noChangeAspect="1"/>
+          </p:cNvPicPr>
+          <p:nvPr/>
+        </p:nvPicPr>
+        <p:blipFill>
+          <a:blip r:embed="rId2">
+            <a:extLst>
+              <a:ext uri="{28A0092B-C50C-407E-A947-70E740481C1C}">
+                <a14:useLocalDpi xmlns:a14="http://schemas.microsoft.com/office/drawing/2010/main" val="0"/>
+              </a:ext>
+            </a:extLst>
+          </a:blip>
+          <a:stretch>
+            <a:fillRect/>
+          </a:stretch>
+        </p:blipFill>
+        <p:spPr>
+          <a:xfrm>
+            <a:off x="6800850" y="2737854"/>
+            <a:ext cx="2857500" cy="2857500"/>
+          </a:xfrm>
+          <a:prstGeom prst="rect">
+            <a:avLst/>
+          </a:prstGeom>
+        </p:spPr>
+      </p:pic>
+    </p:spTree>
+    <p:extLst>
+      <p:ext uri="{BB962C8B-B14F-4D97-AF65-F5344CB8AC3E}">
+        <p14:creationId xmlns:p14="http://schemas.microsoft.com/office/powerpoint/2010/main" val="487246811"/>
+      </p:ext>
+    </p:extLst>
+  </p:cSld>
+  <p:clrMapOvr>
+    <a:masterClrMapping/>
+  </p:clrMapOvr>
+</p:sld>
+</file>
+
+<file path=ppt/slides/slide92.xml><?xml version="1.0" encoding="utf-8"?>
+<p:sld xmlns:a="http://schemas.openxmlformats.org/drawingml/2006/main" xmlns:r="http://schemas.openxmlformats.org/officeDocument/2006/relationships" xmlns:p="http://schemas.openxmlformats.org/presentationml/2006/main" show="0">
+  <p:cSld>
+    <p:bg>
+      <p:bgPr>
+        <a:solidFill>
+          <a:schemeClr val="bg1"/>
+        </a:solidFill>
+        <a:effectLst/>
+      </p:bgPr>
+    </p:bg>
+    <p:spTree>
+      <p:nvGrpSpPr>
+        <p:cNvPr id="1" name=""/>
+        <p:cNvGrpSpPr/>
+        <p:nvPr/>
+      </p:nvGrpSpPr>
+      <p:grpSpPr>
+        <a:xfrm>
+          <a:off x="0" y="0"/>
+          <a:ext cx="0" cy="0"/>
+          <a:chOff x="0" y="0"/>
+          <a:chExt cx="0" cy="0"/>
+        </a:xfrm>
+      </p:grpSpPr>
+      <p:sp>
+        <p:nvSpPr>
+          <p:cNvPr id="2" name="Title 1">
+            <a:extLst>
+              <a:ext uri="{FF2B5EF4-FFF2-40B4-BE49-F238E27FC236}">
+                <a16:creationId xmlns:a16="http://schemas.microsoft.com/office/drawing/2014/main" id="{8E398399-EA03-424C-8D31-C6B6817F6EA9}"/>
+              </a:ext>
+            </a:extLst>
+          </p:cNvPr>
+          <p:cNvSpPr>
+            <a:spLocks noGrp="1"/>
+          </p:cNvSpPr>
+          <p:nvPr>
+            <p:ph type="title"/>
+          </p:nvPr>
+        </p:nvSpPr>
+        <p:spPr>
+          <a:xfrm>
+            <a:off x="581192" y="702156"/>
+            <a:ext cx="11029616" cy="1013800"/>
+          </a:xfrm>
+        </p:spPr>
+        <p:txBody>
+          <a:bodyPr>
+            <a:normAutofit/>
+          </a:bodyPr>
+          <a:lstStyle/>
+          <a:p>
+            <a:r>
+              <a:rPr lang="en-US" dirty="0"/>
+              <a:t>What to Expect</a:t>
+            </a:r>
+          </a:p>
+        </p:txBody>
+      </p:sp>
+      <p:sp>
+        <p:nvSpPr>
+          <p:cNvPr id="11" name="Rectangle 10">
+            <a:extLst>
+              <a:ext uri="{FF2B5EF4-FFF2-40B4-BE49-F238E27FC236}">
+                <a16:creationId xmlns:a16="http://schemas.microsoft.com/office/drawing/2014/main" id="{9AE5ECF4-F003-4F1C-B9D1-DBB1C70A8F2D}"/>
+              </a:ext>
+              <a:ext uri="{C183D7F6-B498-43B3-948B-1728B52AA6E4}">
+                <adec:decorative xmlns:adec="http://schemas.microsoft.com/office/drawing/2017/decorative" val="1"/>
+              </a:ext>
+            </a:extLst>
+          </p:cNvPr>
+          <p:cNvSpPr>
+            <a:spLocks noGrp="1" noRot="1" noChangeAspect="1" noMove="1" noResize="1" noEditPoints="1" noAdjustHandles="1" noChangeArrowheads="1" noChangeShapeType="1" noTextEdit="1"/>
+          </p:cNvSpPr>
+          <p:nvPr>
+            <p:extLst>
+              <p:ext uri="{386F3935-93C4-4BCD-93E2-E3B085C9AB24}">
+                <p16:designElem xmlns:p16="http://schemas.microsoft.com/office/powerpoint/2015/main" val="1"/>
+              </p:ext>
+            </p:extLst>
+          </p:nvPr>
+        </p:nvSpPr>
+        <p:spPr>
+          <a:xfrm>
+            <a:off x="446534" y="2180496"/>
+            <a:ext cx="3703320" cy="4045683"/>
+          </a:xfrm>
+          <a:prstGeom prst="rect">
+            <a:avLst/>
+          </a:prstGeom>
+          <a:solidFill>
+            <a:schemeClr val="bg1"/>
+          </a:solidFill>
+          <a:ln w="38100">
+            <a:solidFill>
+              <a:schemeClr val="accent1"/>
+            </a:solidFill>
+          </a:ln>
+        </p:spPr>
+        <p:style>
+          <a:lnRef idx="2">
+            <a:schemeClr val="accent1">
+              <a:shade val="50000"/>
+            </a:schemeClr>
+          </a:lnRef>
+          <a:fillRef idx="1">
+            <a:schemeClr val="accent1"/>
+          </a:fillRef>
+          <a:effectRef idx="0">
+            <a:schemeClr val="accent1"/>
+          </a:effectRef>
+          <a:fontRef idx="minor">
+            <a:schemeClr val="lt1"/>
+          </a:fontRef>
+        </p:style>
+        <p:txBody>
+          <a:bodyPr rtlCol="0" anchor="ctr"/>
+          <a:lstStyle/>
+          <a:p>
+            <a:pPr algn="ctr"/>
+            <a:endParaRPr lang="en-US"/>
+          </a:p>
+        </p:txBody>
+      </p:sp>
+      <p:pic>
+        <p:nvPicPr>
+          <p:cNvPr id="6" name="Picture 5" descr="A logo of a coffee cup&#10;&#10;AI-generated content may be incorrect.">
+            <a:extLst>
+              <a:ext uri="{FF2B5EF4-FFF2-40B4-BE49-F238E27FC236}">
+                <a16:creationId xmlns:a16="http://schemas.microsoft.com/office/drawing/2014/main" id="{1443CB83-FEC9-7C45-7E5D-605CF7E416A7}"/>
+              </a:ext>
+            </a:extLst>
+          </p:cNvPr>
+          <p:cNvPicPr>
+            <a:picLocks noChangeAspect="1"/>
+          </p:cNvPicPr>
+          <p:nvPr/>
+        </p:nvPicPr>
+        <p:blipFill>
+          <a:blip r:embed="rId2" cstate="print">
+            <a:extLst>
+              <a:ext uri="{28A0092B-C50C-407E-A947-70E740481C1C}">
+                <a14:useLocalDpi xmlns:a14="http://schemas.microsoft.com/office/drawing/2010/main" val="0"/>
+              </a:ext>
+            </a:extLst>
+          </a:blip>
+          <a:stretch>
+            <a:fillRect/>
+          </a:stretch>
+        </p:blipFill>
+        <p:spPr>
+          <a:xfrm>
+            <a:off x="887110" y="2361057"/>
+            <a:ext cx="2845404" cy="1778378"/>
+          </a:xfrm>
+          <a:prstGeom prst="rect">
+            <a:avLst/>
+          </a:prstGeom>
+        </p:spPr>
+      </p:pic>
+      <p:pic>
+        <p:nvPicPr>
+          <p:cNvPr id="4" name="Picture 3" descr="ServiceNow logo transparent PNG - StickPNG">
+            <a:extLst>
+              <a:ext uri="{FF2B5EF4-FFF2-40B4-BE49-F238E27FC236}">
+                <a16:creationId xmlns:a16="http://schemas.microsoft.com/office/drawing/2014/main" id="{9720925D-B793-4C31-82D2-B813C1DC8C88}"/>
+              </a:ext>
+            </a:extLst>
+          </p:cNvPr>
+          <p:cNvPicPr>
+            <a:picLocks noChangeAspect="1"/>
+          </p:cNvPicPr>
+          <p:nvPr/>
+        </p:nvPicPr>
+        <p:blipFill>
+          <a:blip r:embed="rId3"/>
+          <a:stretch>
+            <a:fillRect/>
+          </a:stretch>
+        </p:blipFill>
+        <p:spPr>
+          <a:xfrm>
+            <a:off x="657225" y="4836014"/>
+            <a:ext cx="3305175" cy="570142"/>
+          </a:xfrm>
+          <a:prstGeom prst="rect">
+            <a:avLst/>
+          </a:prstGeom>
+        </p:spPr>
+      </p:pic>
+      <p:sp>
+        <p:nvSpPr>
+          <p:cNvPr id="3" name="Content Placeholder 2">
+            <a:extLst>
+              <a:ext uri="{FF2B5EF4-FFF2-40B4-BE49-F238E27FC236}">
+                <a16:creationId xmlns:a16="http://schemas.microsoft.com/office/drawing/2014/main" id="{F6826B51-4938-4211-37F2-2A081C5D1792}"/>
+              </a:ext>
+            </a:extLst>
+          </p:cNvPr>
+          <p:cNvSpPr>
+            <a:spLocks noGrp="1"/>
+          </p:cNvSpPr>
+          <p:nvPr>
+            <p:ph idx="1"/>
+          </p:nvPr>
+        </p:nvSpPr>
+        <p:spPr>
+          <a:xfrm>
+            <a:off x="4505325" y="2180496"/>
+            <a:ext cx="7105481" cy="4045683"/>
+          </a:xfrm>
+        </p:spPr>
+        <p:txBody>
+          <a:bodyPr>
+            <a:normAutofit/>
+          </a:bodyPr>
+          <a:lstStyle/>
+          <a:p>
+            <a:pPr marL="305435" indent="-305435"/>
+            <a:r>
+              <a:rPr lang="en-US" dirty="0"/>
+              <a:t>13-week course</a:t>
+            </a:r>
+          </a:p>
+          <a:p>
+            <a:pPr marL="629435" lvl="1" indent="-305435"/>
+            <a:r>
+              <a:rPr lang="en-US" dirty="0"/>
+              <a:t>First 8 weeks is ServiceNow</a:t>
+            </a:r>
+          </a:p>
+          <a:p>
+            <a:pPr marL="629435" lvl="1" indent="-305435"/>
+            <a:r>
+              <a:rPr lang="en-US" dirty="0"/>
+              <a:t>Remaining 5 weeks will focus on Java</a:t>
+            </a:r>
+          </a:p>
+          <a:p>
+            <a:pPr marL="305435" indent="-305435"/>
+            <a:r>
+              <a:rPr lang="en-US" dirty="0"/>
+              <a:t>Various Assessment Types</a:t>
+            </a:r>
+          </a:p>
+          <a:p>
+            <a:pPr marL="629435" lvl="1" indent="-305435"/>
+            <a:r>
+              <a:rPr lang="en-US" dirty="0"/>
+              <a:t>Exams – Multiple Choice, Multiple Select, Short Answers</a:t>
+            </a:r>
+          </a:p>
+          <a:p>
+            <a:pPr marL="629435" lvl="1" indent="-305435"/>
+            <a:r>
+              <a:rPr lang="en-US" dirty="0"/>
+              <a:t>QC – Panel-Type Live Interviews</a:t>
+            </a:r>
+          </a:p>
+          <a:p>
+            <a:pPr marL="629435" lvl="1" indent="-305435"/>
+            <a:r>
+              <a:rPr lang="en-US" dirty="0"/>
+              <a:t>1-on-1s – Evaluations completed by the trainer (Loom or face-to-face)</a:t>
+            </a:r>
+          </a:p>
+          <a:p>
+            <a:pPr marL="629435" lvl="1" indent="-305435"/>
+            <a:r>
+              <a:rPr lang="en-US" dirty="0"/>
+              <a:t>Projects – Assigned project work that covers discussed topics (keep up day-to-day and you won’t be behind)</a:t>
+            </a:r>
+          </a:p>
+        </p:txBody>
+      </p:sp>
+    </p:spTree>
+    <p:extLst>
+      <p:ext uri="{BB962C8B-B14F-4D97-AF65-F5344CB8AC3E}">
+        <p14:creationId xmlns:p14="http://schemas.microsoft.com/office/powerpoint/2010/main" val="2540692116"/>
+      </p:ext>
+    </p:extLst>
+  </p:cSld>
+  <p:clrMapOvr>
+    <a:masterClrMapping/>
+  </p:clrMapOvr>
+</p:sld>
+</file>
+
+<file path=ppt/slides/slide93.xml><?xml version="1.0" encoding="utf-8"?>
+<p:sld xmlns:a="http://schemas.openxmlformats.org/drawingml/2006/main" xmlns:r="http://schemas.openxmlformats.org/officeDocument/2006/relationships" xmlns:p="http://schemas.openxmlformats.org/presentationml/2006/main" show="0">
+  <p:cSld>
+    <p:spTree>
+      <p:nvGrpSpPr>
+        <p:cNvPr id="1" name=""/>
+        <p:cNvGrpSpPr/>
+        <p:nvPr/>
+      </p:nvGrpSpPr>
+      <p:grpSpPr>
+        <a:xfrm>
+          <a:off x="0" y="0"/>
+          <a:ext cx="0" cy="0"/>
+          <a:chOff x="0" y="0"/>
+          <a:chExt cx="0" cy="0"/>
+        </a:xfrm>
+      </p:grpSpPr>
+      <p:sp>
+        <p:nvSpPr>
+          <p:cNvPr id="2" name="Title 1">
+            <a:extLst>
+              <a:ext uri="{FF2B5EF4-FFF2-40B4-BE49-F238E27FC236}">
+                <a16:creationId xmlns:a16="http://schemas.microsoft.com/office/drawing/2014/main" id="{04992356-009E-B671-396C-A5A470486D9E}"/>
+              </a:ext>
+            </a:extLst>
+          </p:cNvPr>
+          <p:cNvSpPr>
+            <a:spLocks noGrp="1"/>
+          </p:cNvSpPr>
+          <p:nvPr>
+            <p:ph type="title"/>
+          </p:nvPr>
+        </p:nvSpPr>
+        <p:spPr/>
+        <p:txBody>
+          <a:bodyPr/>
+          <a:lstStyle/>
+          <a:p>
+            <a:r>
+              <a:rPr lang="en-US" dirty="0"/>
+              <a:t>How to Excel in this Course</a:t>
+            </a:r>
+          </a:p>
+        </p:txBody>
+      </p:sp>
+      <p:sp>
+        <p:nvSpPr>
+          <p:cNvPr id="3" name="Content Placeholder 2">
+            <a:extLst>
+              <a:ext uri="{FF2B5EF4-FFF2-40B4-BE49-F238E27FC236}">
+                <a16:creationId xmlns:a16="http://schemas.microsoft.com/office/drawing/2014/main" id="{429EFB58-5DAE-C3C2-2D49-7AE40E75910D}"/>
+              </a:ext>
+            </a:extLst>
+          </p:cNvPr>
+          <p:cNvSpPr>
+            <a:spLocks noGrp="1"/>
+          </p:cNvSpPr>
+          <p:nvPr>
+            <p:ph idx="1"/>
+          </p:nvPr>
+        </p:nvSpPr>
+        <p:spPr>
+          <a:xfrm>
+            <a:off x="581191" y="2052918"/>
+            <a:ext cx="11029615" cy="1681246"/>
+          </a:xfrm>
+        </p:spPr>
+        <p:txBody>
+          <a:bodyPr/>
+          <a:lstStyle/>
+          <a:p>
+            <a:r>
+              <a:rPr lang="en-US" dirty="0"/>
+              <a:t>We will use slide decks throughout the course. </a:t>
+            </a:r>
+          </a:p>
+          <a:p>
+            <a:r>
+              <a:rPr lang="en-US" dirty="0"/>
+              <a:t>If it is on the slide deck, it is important, and you should consider writing it down. </a:t>
+            </a:r>
+          </a:p>
+          <a:p>
+            <a:r>
+              <a:rPr lang="en-US" dirty="0"/>
+              <a:t>Sometimes, you may see a definition, like this:</a:t>
+            </a:r>
+          </a:p>
+          <a:p>
+            <a:endParaRPr lang="en-US" dirty="0"/>
+          </a:p>
+        </p:txBody>
+      </p:sp>
+      <p:sp>
+        <p:nvSpPr>
+          <p:cNvPr id="4" name="TextBox 3">
+            <a:extLst>
+              <a:ext uri="{FF2B5EF4-FFF2-40B4-BE49-F238E27FC236}">
+                <a16:creationId xmlns:a16="http://schemas.microsoft.com/office/drawing/2014/main" id="{0352E508-0D10-9772-84C7-FCC523BB1A8A}"/>
+              </a:ext>
+            </a:extLst>
+          </p:cNvPr>
+          <p:cNvSpPr txBox="1"/>
+          <p:nvPr/>
+        </p:nvSpPr>
+        <p:spPr>
+          <a:xfrm>
+            <a:off x="1739151" y="3429000"/>
+            <a:ext cx="8713694" cy="646331"/>
+          </a:xfrm>
+          <a:prstGeom prst="rect">
+            <a:avLst/>
+          </a:prstGeom>
+          <a:noFill/>
+        </p:spPr>
+        <p:txBody>
+          <a:bodyPr wrap="square" rtlCol="0">
+            <a:spAutoFit/>
+          </a:bodyPr>
+          <a:lstStyle/>
+          <a:p>
+            <a:r>
+              <a:rPr lang="en-US" dirty="0"/>
+              <a:t>Definition: </a:t>
+            </a:r>
+            <a:r>
+              <a:rPr lang="en-US" dirty="0">
+                <a:solidFill>
+                  <a:srgbClr val="00B050"/>
+                </a:solidFill>
+              </a:rPr>
+              <a:t>ServiceNow</a:t>
+            </a:r>
+            <a:r>
+              <a:rPr lang="en-US" dirty="0"/>
+              <a:t> – A cloud-based, ITSM platform that helps organizations manage and automate their work processes across IT, HR, Customer Service, and more. </a:t>
+            </a:r>
+          </a:p>
+        </p:txBody>
+      </p:sp>
+      <p:sp>
+        <p:nvSpPr>
+          <p:cNvPr id="5" name="TextBox 4">
+            <a:extLst>
+              <a:ext uri="{FF2B5EF4-FFF2-40B4-BE49-F238E27FC236}">
+                <a16:creationId xmlns:a16="http://schemas.microsoft.com/office/drawing/2014/main" id="{A54BB974-FD75-0303-8FBE-56D4DFC4209D}"/>
+              </a:ext>
+            </a:extLst>
+          </p:cNvPr>
+          <p:cNvSpPr txBox="1"/>
+          <p:nvPr/>
+        </p:nvSpPr>
+        <p:spPr>
+          <a:xfrm>
+            <a:off x="581190" y="4361691"/>
+            <a:ext cx="8858645" cy="1477328"/>
+          </a:xfrm>
+          <a:prstGeom prst="rect">
+            <a:avLst/>
+          </a:prstGeom>
+          <a:noFill/>
+        </p:spPr>
+        <p:txBody>
+          <a:bodyPr wrap="square" rtlCol="0">
+            <a:spAutoFit/>
+          </a:bodyPr>
+          <a:lstStyle/>
+          <a:p>
+            <a:pPr marL="285750" indent="-285750">
+              <a:buClr>
+                <a:schemeClr val="accent2"/>
+              </a:buClr>
+              <a:buFont typeface="Wingdings" panose="05000000000000000000" pitchFamily="2" charset="2"/>
+              <a:buChar char="§"/>
+            </a:pPr>
+            <a:r>
+              <a:rPr lang="en-US" dirty="0"/>
+              <a:t>If you see a definition:</a:t>
+            </a:r>
+          </a:p>
+          <a:p>
+            <a:pPr marL="742950" lvl="1" indent="-285750">
+              <a:buClr>
+                <a:schemeClr val="accent2"/>
+              </a:buClr>
+              <a:buFont typeface="Wingdings" panose="05000000000000000000" pitchFamily="2" charset="2"/>
+              <a:buChar char="§"/>
+            </a:pPr>
+            <a:r>
+              <a:rPr lang="en-US" dirty="0"/>
+              <a:t>Write it down</a:t>
+            </a:r>
+          </a:p>
+          <a:p>
+            <a:pPr marL="742950" lvl="1" indent="-285750">
+              <a:buClr>
+                <a:schemeClr val="accent2"/>
+              </a:buClr>
+              <a:buFont typeface="Wingdings" panose="05000000000000000000" pitchFamily="2" charset="2"/>
+              <a:buChar char="§"/>
+            </a:pPr>
+            <a:r>
+              <a:rPr lang="en-US" dirty="0"/>
+              <a:t>Write down what its context is in the larger scope</a:t>
+            </a:r>
+          </a:p>
+          <a:p>
+            <a:pPr marL="742950" lvl="1" indent="-285750">
+              <a:buClr>
+                <a:schemeClr val="accent2"/>
+              </a:buClr>
+              <a:buFont typeface="Wingdings" panose="05000000000000000000" pitchFamily="2" charset="2"/>
+              <a:buChar char="§"/>
+            </a:pPr>
+            <a:r>
+              <a:rPr lang="en-US" dirty="0"/>
+              <a:t>E.G. ServiceNow is often just one piece in an enterprise system.  An organization may have many off-the-shelf software products that may integrate with ServiceNow.</a:t>
+            </a:r>
+          </a:p>
+        </p:txBody>
+      </p:sp>
+    </p:spTree>
+    <p:extLst>
+      <p:ext uri="{BB962C8B-B14F-4D97-AF65-F5344CB8AC3E}">
+        <p14:creationId xmlns:p14="http://schemas.microsoft.com/office/powerpoint/2010/main" val="3870370440"/>
+      </p:ext>
+    </p:extLst>
+  </p:cSld>
+  <p:clrMapOvr>
+    <a:masterClrMapping/>
+  </p:clrMapOvr>
+</p:sld>
+</file>
+
+<file path=ppt/slides/slide94.xml><?xml version="1.0" encoding="utf-8"?>
 <p:sld xmlns:a="http://schemas.openxmlformats.org/drawingml/2006/main" xmlns:r="http://schemas.openxmlformats.org/officeDocument/2006/relationships" xmlns:p="http://schemas.openxmlformats.org/presentationml/2006/main" show="0">
   <p:cSld>
     <p:spTree>
